--- a/reports/Customer_Segmentation.pptx
+++ b/reports/Customer_Segmentation.pptx
@@ -1,33 +1,43 @@
 
 <file path=ppt/presentation.xml><?xml version="1.0" encoding="utf-8"?>
-<p:presentation xmlns:a="http://schemas.openxmlformats.org/drawingml/2006/main" xmlns:r="http://schemas.openxmlformats.org/officeDocument/2006/relationships" xmlns:p="http://schemas.openxmlformats.org/presentationml/2006/main" saveSubsetFonts="1" autoCompressPictures="0">
+<p:presentation xmlns:a="http://schemas.openxmlformats.org/drawingml/2006/main" xmlns:r="http://schemas.openxmlformats.org/officeDocument/2006/relationships" xmlns:p="http://schemas.openxmlformats.org/presentationml/2006/main" saveSubsetFonts="1" embedTrueTypeFonts="true">
   <p:sldMasterIdLst>
     <p:sldMasterId id="2147483648" r:id="rId1"/>
   </p:sldMasterIdLst>
   <p:sldIdLst>
-    <p:sldId id="256" r:id="rId7"/>
-    <p:sldId id="257" r:id="rId8"/>
-    <p:sldId id="258" r:id="rId9"/>
-    <p:sldId id="259" r:id="rId10"/>
-    <p:sldId id="260" r:id="rId11"/>
-    <p:sldId id="261" r:id="rId12"/>
-    <p:sldId id="262" r:id="rId13"/>
-    <p:sldId id="263" r:id="rId14"/>
-    <p:sldId id="264" r:id="rId15"/>
-    <p:sldId id="265" r:id="rId16"/>
-    <p:sldId id="266" r:id="rId17"/>
-    <p:sldId id="267" r:id="rId18"/>
-    <p:sldId id="268" r:id="rId19"/>
-    <p:sldId id="269" r:id="rId20"/>
-    <p:sldId id="270" r:id="rId21"/>
+    <p:sldId id="256" r:id="rId6"/>
+    <p:sldId id="257" r:id="rId7"/>
+    <p:sldId id="258" r:id="rId8"/>
+    <p:sldId id="259" r:id="rId9"/>
+    <p:sldId id="260" r:id="rId10"/>
+    <p:sldId id="261" r:id="rId11"/>
+    <p:sldId id="262" r:id="rId12"/>
+    <p:sldId id="263" r:id="rId13"/>
+    <p:sldId id="264" r:id="rId14"/>
+    <p:sldId id="265" r:id="rId15"/>
+    <p:sldId id="266" r:id="rId16"/>
+    <p:sldId id="267" r:id="rId17"/>
+    <p:sldId id="268" r:id="rId18"/>
+    <p:sldId id="269" r:id="rId19"/>
+    <p:sldId id="270" r:id="rId20"/>
   </p:sldIdLst>
-  <p:sldSz cx="9144000" cy="6858000" type="screen4x3"/>
+  <p:sldSz cx="18288000" cy="10287000"/>
   <p:notesSz cx="6858000" cy="9144000"/>
+  <p:embeddedFontLst>
+    <p:embeddedFont>
+      <p:font typeface="PT Sans Bold" charset="1" panose="020B0703020203020204"/>
+      <p:regular r:id="rId21"/>
+    </p:embeddedFont>
+    <p:embeddedFont>
+      <p:font typeface="PT Sans" charset="1" panose="020B0503020203020204"/>
+      <p:regular r:id="rId22"/>
+    </p:embeddedFont>
+  </p:embeddedFontLst>
   <p:defaultTextStyle>
     <a:defPPr>
       <a:defRPr lang="en-US"/>
     </a:defPPr>
-    <a:lvl1pPr marL="0" algn="l" defTabSz="457200" rtl="0" eaLnBrk="1" latinLnBrk="0" hangingPunct="1">
+    <a:lvl1pPr marL="0" algn="l" defTabSz="914400" rtl="0" eaLnBrk="1" latinLnBrk="0" hangingPunct="1">
       <a:defRPr sz="1800" kern="1200">
         <a:solidFill>
           <a:schemeClr val="tx1"/>
@@ -37,7 +47,7 @@
         <a:cs typeface="+mn-cs"/>
       </a:defRPr>
     </a:lvl1pPr>
-    <a:lvl2pPr marL="457200" algn="l" defTabSz="457200" rtl="0" eaLnBrk="1" latinLnBrk="0" hangingPunct="1">
+    <a:lvl2pPr marL="457200" algn="l" defTabSz="914400" rtl="0" eaLnBrk="1" latinLnBrk="0" hangingPunct="1">
       <a:defRPr sz="1800" kern="1200">
         <a:solidFill>
           <a:schemeClr val="tx1"/>
@@ -47,7 +57,7 @@
         <a:cs typeface="+mn-cs"/>
       </a:defRPr>
     </a:lvl2pPr>
-    <a:lvl3pPr marL="914400" algn="l" defTabSz="457200" rtl="0" eaLnBrk="1" latinLnBrk="0" hangingPunct="1">
+    <a:lvl3pPr marL="914400" algn="l" defTabSz="914400" rtl="0" eaLnBrk="1" latinLnBrk="0" hangingPunct="1">
       <a:defRPr sz="1800" kern="1200">
         <a:solidFill>
           <a:schemeClr val="tx1"/>
@@ -57,7 +67,7 @@
         <a:cs typeface="+mn-cs"/>
       </a:defRPr>
     </a:lvl3pPr>
-    <a:lvl4pPr marL="1371600" algn="l" defTabSz="457200" rtl="0" eaLnBrk="1" latinLnBrk="0" hangingPunct="1">
+    <a:lvl4pPr marL="1371600" algn="l" defTabSz="914400" rtl="0" eaLnBrk="1" latinLnBrk="0" hangingPunct="1">
       <a:defRPr sz="1800" kern="1200">
         <a:solidFill>
           <a:schemeClr val="tx1"/>
@@ -67,7 +77,7 @@
         <a:cs typeface="+mn-cs"/>
       </a:defRPr>
     </a:lvl4pPr>
-    <a:lvl5pPr marL="1828800" algn="l" defTabSz="457200" rtl="0" eaLnBrk="1" latinLnBrk="0" hangingPunct="1">
+    <a:lvl5pPr marL="1828800" algn="l" defTabSz="914400" rtl="0" eaLnBrk="1" latinLnBrk="0" hangingPunct="1">
       <a:defRPr sz="1800" kern="1200">
         <a:solidFill>
           <a:schemeClr val="tx1"/>
@@ -77,7 +87,7 @@
         <a:cs typeface="+mn-cs"/>
       </a:defRPr>
     </a:lvl5pPr>
-    <a:lvl6pPr marL="2286000" algn="l" defTabSz="457200" rtl="0" eaLnBrk="1" latinLnBrk="0" hangingPunct="1">
+    <a:lvl6pPr marL="2286000" algn="l" defTabSz="914400" rtl="0" eaLnBrk="1" latinLnBrk="0" hangingPunct="1">
       <a:defRPr sz="1800" kern="1200">
         <a:solidFill>
           <a:schemeClr val="tx1"/>
@@ -87,7 +97,7 @@
         <a:cs typeface="+mn-cs"/>
       </a:defRPr>
     </a:lvl6pPr>
-    <a:lvl7pPr marL="2743200" algn="l" defTabSz="457200" rtl="0" eaLnBrk="1" latinLnBrk="0" hangingPunct="1">
+    <a:lvl7pPr marL="2743200" algn="l" defTabSz="914400" rtl="0" eaLnBrk="1" latinLnBrk="0" hangingPunct="1">
       <a:defRPr sz="1800" kern="1200">
         <a:solidFill>
           <a:schemeClr val="tx1"/>
@@ -97,7 +107,7 @@
         <a:cs typeface="+mn-cs"/>
       </a:defRPr>
     </a:lvl7pPr>
-    <a:lvl8pPr marL="3200400" algn="l" defTabSz="457200" rtl="0" eaLnBrk="1" latinLnBrk="0" hangingPunct="1">
+    <a:lvl8pPr marL="3200400" algn="l" defTabSz="914400" rtl="0" eaLnBrk="1" latinLnBrk="0" hangingPunct="1">
       <a:defRPr sz="1800" kern="1200">
         <a:solidFill>
           <a:schemeClr val="tx1"/>
@@ -107,7 +117,7 @@
         <a:cs typeface="+mn-cs"/>
       </a:defRPr>
     </a:lvl8pPr>
-    <a:lvl9pPr marL="3657600" algn="l" defTabSz="457200" rtl="0" eaLnBrk="1" latinLnBrk="0" hangingPunct="1">
+    <a:lvl9pPr marL="3657600" algn="l" defTabSz="914400" rtl="0" eaLnBrk="1" latinLnBrk="0" hangingPunct="1">
       <a:defRPr sz="1800" kern="1200">
         <a:solidFill>
           <a:schemeClr val="tx1"/>
@@ -300,9 +310,10 @@
           <a:bodyPr/>
           <a:lstStyle/>
           <a:p>
-            <a:fld id="{5BCAD085-E8A6-8845-BD4E-CB4CCA059FC4}" type="datetimeFigureOut">
+            <a:fld id="{1D8BD707-D9CF-40AE-B4C6-C98DA3205C09}" type="datetimeFigureOut">
               <a:rPr lang="en-US" smtClean="0"/>
-              <a:t>1/27/13</a:t>
+              <a:pPr/>
+              <a:t>8/1/2011</a:t>
             </a:fld>
             <a:endParaRPr lang="en-US"/>
           </a:p>
@@ -342,8 +353,9 @@
           <a:bodyPr/>
           <a:lstStyle/>
           <a:p>
-            <a:fld id="{C1FF6DA9-008F-8B48-92A6-B652298478BF}" type="slidenum">
+            <a:fld id="{B6F15528-21DE-4FAA-801E-634DDDAF4B2B}" type="slidenum">
               <a:rPr lang="en-US" smtClean="0"/>
+              <a:pPr/>
               <a:t>‹#›</a:t>
             </a:fld>
             <a:endParaRPr lang="en-US"/>
@@ -351,11 +363,6 @@
         </p:txBody>
       </p:sp>
     </p:spTree>
-    <p:extLst>
-      <p:ext uri="{BB962C8B-B14F-4D97-AF65-F5344CB8AC3E}">
-        <p14:creationId xmlns:p14="http://schemas.microsoft.com/office/powerpoint/2010/main" val="3168075583"/>
-      </p:ext>
-    </p:extLst>
   </p:cSld>
   <p:clrMapOvr>
     <a:masterClrMapping/>
@@ -470,9 +477,10 @@
           <a:bodyPr/>
           <a:lstStyle/>
           <a:p>
-            <a:fld id="{5BCAD085-E8A6-8845-BD4E-CB4CCA059FC4}" type="datetimeFigureOut">
+            <a:fld id="{1D8BD707-D9CF-40AE-B4C6-C98DA3205C09}" type="datetimeFigureOut">
               <a:rPr lang="en-US" smtClean="0"/>
-              <a:t>1/27/13</a:t>
+              <a:pPr/>
+              <a:t>8/1/2011</a:t>
             </a:fld>
             <a:endParaRPr lang="en-US"/>
           </a:p>
@@ -512,8 +520,9 @@
           <a:bodyPr/>
           <a:lstStyle/>
           <a:p>
-            <a:fld id="{C1FF6DA9-008F-8B48-92A6-B652298478BF}" type="slidenum">
+            <a:fld id="{B6F15528-21DE-4FAA-801E-634DDDAF4B2B}" type="slidenum">
               <a:rPr lang="en-US" smtClean="0"/>
+              <a:pPr/>
               <a:t>‹#›</a:t>
             </a:fld>
             <a:endParaRPr lang="en-US"/>
@@ -521,11 +530,6 @@
         </p:txBody>
       </p:sp>
     </p:spTree>
-    <p:extLst>
-      <p:ext uri="{BB962C8B-B14F-4D97-AF65-F5344CB8AC3E}">
-        <p14:creationId xmlns:p14="http://schemas.microsoft.com/office/powerpoint/2010/main" val="2910927964"/>
-      </p:ext>
-    </p:extLst>
   </p:cSld>
   <p:clrMapOvr>
     <a:masterClrMapping/>
@@ -650,9 +654,10 @@
           <a:bodyPr/>
           <a:lstStyle/>
           <a:p>
-            <a:fld id="{5BCAD085-E8A6-8845-BD4E-CB4CCA059FC4}" type="datetimeFigureOut">
+            <a:fld id="{1D8BD707-D9CF-40AE-B4C6-C98DA3205C09}" type="datetimeFigureOut">
               <a:rPr lang="en-US" smtClean="0"/>
-              <a:t>1/27/13</a:t>
+              <a:pPr/>
+              <a:t>8/1/2011</a:t>
             </a:fld>
             <a:endParaRPr lang="en-US"/>
           </a:p>
@@ -692,8 +697,9 @@
           <a:bodyPr/>
           <a:lstStyle/>
           <a:p>
-            <a:fld id="{C1FF6DA9-008F-8B48-92A6-B652298478BF}" type="slidenum">
+            <a:fld id="{B6F15528-21DE-4FAA-801E-634DDDAF4B2B}" type="slidenum">
               <a:rPr lang="en-US" smtClean="0"/>
+              <a:pPr/>
               <a:t>‹#›</a:t>
             </a:fld>
             <a:endParaRPr lang="en-US"/>
@@ -701,11 +707,6 @@
         </p:txBody>
       </p:sp>
     </p:spTree>
-    <p:extLst>
-      <p:ext uri="{BB962C8B-B14F-4D97-AF65-F5344CB8AC3E}">
-        <p14:creationId xmlns:p14="http://schemas.microsoft.com/office/powerpoint/2010/main" val="3612223792"/>
-      </p:ext>
-    </p:extLst>
   </p:cSld>
   <p:clrMapOvr>
     <a:masterClrMapping/>
@@ -820,9 +821,10 @@
           <a:bodyPr/>
           <a:lstStyle/>
           <a:p>
-            <a:fld id="{5BCAD085-E8A6-8845-BD4E-CB4CCA059FC4}" type="datetimeFigureOut">
+            <a:fld id="{1D8BD707-D9CF-40AE-B4C6-C98DA3205C09}" type="datetimeFigureOut">
               <a:rPr lang="en-US" smtClean="0"/>
-              <a:t>1/27/13</a:t>
+              <a:pPr/>
+              <a:t>8/1/2011</a:t>
             </a:fld>
             <a:endParaRPr lang="en-US"/>
           </a:p>
@@ -862,8 +864,9 @@
           <a:bodyPr/>
           <a:lstStyle/>
           <a:p>
-            <a:fld id="{C1FF6DA9-008F-8B48-92A6-B652298478BF}" type="slidenum">
+            <a:fld id="{B6F15528-21DE-4FAA-801E-634DDDAF4B2B}" type="slidenum">
               <a:rPr lang="en-US" smtClean="0"/>
+              <a:pPr/>
               <a:t>‹#›</a:t>
             </a:fld>
             <a:endParaRPr lang="en-US"/>
@@ -871,11 +874,6 @@
         </p:txBody>
       </p:sp>
     </p:spTree>
-    <p:extLst>
-      <p:ext uri="{BB962C8B-B14F-4D97-AF65-F5344CB8AC3E}">
-        <p14:creationId xmlns:p14="http://schemas.microsoft.com/office/powerpoint/2010/main" val="2614314258"/>
-      </p:ext>
-    </p:extLst>
   </p:cSld>
   <p:clrMapOvr>
     <a:masterClrMapping/>
@@ -1066,9 +1064,10 @@
           <a:bodyPr/>
           <a:lstStyle/>
           <a:p>
-            <a:fld id="{5BCAD085-E8A6-8845-BD4E-CB4CCA059FC4}" type="datetimeFigureOut">
+            <a:fld id="{1D8BD707-D9CF-40AE-B4C6-C98DA3205C09}" type="datetimeFigureOut">
               <a:rPr lang="en-US" smtClean="0"/>
-              <a:t>1/27/13</a:t>
+              <a:pPr/>
+              <a:t>8/1/2011</a:t>
             </a:fld>
             <a:endParaRPr lang="en-US"/>
           </a:p>
@@ -1108,8 +1107,9 @@
           <a:bodyPr/>
           <a:lstStyle/>
           <a:p>
-            <a:fld id="{C1FF6DA9-008F-8B48-92A6-B652298478BF}" type="slidenum">
+            <a:fld id="{B6F15528-21DE-4FAA-801E-634DDDAF4B2B}" type="slidenum">
               <a:rPr lang="en-US" smtClean="0"/>
+              <a:pPr/>
               <a:t>‹#›</a:t>
             </a:fld>
             <a:endParaRPr lang="en-US"/>
@@ -1117,11 +1117,6 @@
         </p:txBody>
       </p:sp>
     </p:spTree>
-    <p:extLst>
-      <p:ext uri="{BB962C8B-B14F-4D97-AF65-F5344CB8AC3E}">
-        <p14:creationId xmlns:p14="http://schemas.microsoft.com/office/powerpoint/2010/main" val="960648375"/>
-      </p:ext>
-    </p:extLst>
   </p:cSld>
   <p:clrMapOvr>
     <a:masterClrMapping/>
@@ -1354,9 +1349,10 @@
           <a:bodyPr/>
           <a:lstStyle/>
           <a:p>
-            <a:fld id="{5BCAD085-E8A6-8845-BD4E-CB4CCA059FC4}" type="datetimeFigureOut">
+            <a:fld id="{1D8BD707-D9CF-40AE-B4C6-C98DA3205C09}" type="datetimeFigureOut">
               <a:rPr lang="en-US" smtClean="0"/>
-              <a:t>1/27/13</a:t>
+              <a:pPr/>
+              <a:t>8/1/2011</a:t>
             </a:fld>
             <a:endParaRPr lang="en-US"/>
           </a:p>
@@ -1396,8 +1392,9 @@
           <a:bodyPr/>
           <a:lstStyle/>
           <a:p>
-            <a:fld id="{C1FF6DA9-008F-8B48-92A6-B652298478BF}" type="slidenum">
+            <a:fld id="{B6F15528-21DE-4FAA-801E-634DDDAF4B2B}" type="slidenum">
               <a:rPr lang="en-US" smtClean="0"/>
+              <a:pPr/>
               <a:t>‹#›</a:t>
             </a:fld>
             <a:endParaRPr lang="en-US"/>
@@ -1405,11 +1402,6 @@
         </p:txBody>
       </p:sp>
     </p:spTree>
-    <p:extLst>
-      <p:ext uri="{BB962C8B-B14F-4D97-AF65-F5344CB8AC3E}">
-        <p14:creationId xmlns:p14="http://schemas.microsoft.com/office/powerpoint/2010/main" val="2782244947"/>
-      </p:ext>
-    </p:extLst>
   </p:cSld>
   <p:clrMapOvr>
     <a:masterClrMapping/>
@@ -1776,9 +1768,10 @@
           <a:bodyPr/>
           <a:lstStyle/>
           <a:p>
-            <a:fld id="{5BCAD085-E8A6-8845-BD4E-CB4CCA059FC4}" type="datetimeFigureOut">
+            <a:fld id="{1D8BD707-D9CF-40AE-B4C6-C98DA3205C09}" type="datetimeFigureOut">
               <a:rPr lang="en-US" smtClean="0"/>
-              <a:t>1/27/13</a:t>
+              <a:pPr/>
+              <a:t>8/1/2011</a:t>
             </a:fld>
             <a:endParaRPr lang="en-US"/>
           </a:p>
@@ -1818,8 +1811,9 @@
           <a:bodyPr/>
           <a:lstStyle/>
           <a:p>
-            <a:fld id="{C1FF6DA9-008F-8B48-92A6-B652298478BF}" type="slidenum">
+            <a:fld id="{B6F15528-21DE-4FAA-801E-634DDDAF4B2B}" type="slidenum">
               <a:rPr lang="en-US" smtClean="0"/>
+              <a:pPr/>
               <a:t>‹#›</a:t>
             </a:fld>
             <a:endParaRPr lang="en-US"/>
@@ -1827,11 +1821,6 @@
         </p:txBody>
       </p:sp>
     </p:spTree>
-    <p:extLst>
-      <p:ext uri="{BB962C8B-B14F-4D97-AF65-F5344CB8AC3E}">
-        <p14:creationId xmlns:p14="http://schemas.microsoft.com/office/powerpoint/2010/main" val="990158736"/>
-      </p:ext>
-    </p:extLst>
   </p:cSld>
   <p:clrMapOvr>
     <a:masterClrMapping/>
@@ -1894,9 +1883,10 @@
           <a:bodyPr/>
           <a:lstStyle/>
           <a:p>
-            <a:fld id="{5BCAD085-E8A6-8845-BD4E-CB4CCA059FC4}" type="datetimeFigureOut">
+            <a:fld id="{1D8BD707-D9CF-40AE-B4C6-C98DA3205C09}" type="datetimeFigureOut">
               <a:rPr lang="en-US" smtClean="0"/>
-              <a:t>1/27/13</a:t>
+              <a:pPr/>
+              <a:t>8/1/2011</a:t>
             </a:fld>
             <a:endParaRPr lang="en-US"/>
           </a:p>
@@ -1936,8 +1926,9 @@
           <a:bodyPr/>
           <a:lstStyle/>
           <a:p>
-            <a:fld id="{C1FF6DA9-008F-8B48-92A6-B652298478BF}" type="slidenum">
+            <a:fld id="{B6F15528-21DE-4FAA-801E-634DDDAF4B2B}" type="slidenum">
               <a:rPr lang="en-US" smtClean="0"/>
+              <a:pPr/>
               <a:t>‹#›</a:t>
             </a:fld>
             <a:endParaRPr lang="en-US"/>
@@ -1945,11 +1936,6 @@
         </p:txBody>
       </p:sp>
     </p:spTree>
-    <p:extLst>
-      <p:ext uri="{BB962C8B-B14F-4D97-AF65-F5344CB8AC3E}">
-        <p14:creationId xmlns:p14="http://schemas.microsoft.com/office/powerpoint/2010/main" val="727027711"/>
-      </p:ext>
-    </p:extLst>
   </p:cSld>
   <p:clrMapOvr>
     <a:masterClrMapping/>
@@ -1989,9 +1975,10 @@
           <a:bodyPr/>
           <a:lstStyle/>
           <a:p>
-            <a:fld id="{5BCAD085-E8A6-8845-BD4E-CB4CCA059FC4}" type="datetimeFigureOut">
+            <a:fld id="{1D8BD707-D9CF-40AE-B4C6-C98DA3205C09}" type="datetimeFigureOut">
               <a:rPr lang="en-US" smtClean="0"/>
-              <a:t>1/27/13</a:t>
+              <a:pPr/>
+              <a:t>8/1/2011</a:t>
             </a:fld>
             <a:endParaRPr lang="en-US"/>
           </a:p>
@@ -2031,8 +2018,9 @@
           <a:bodyPr/>
           <a:lstStyle/>
           <a:p>
-            <a:fld id="{C1FF6DA9-008F-8B48-92A6-B652298478BF}" type="slidenum">
+            <a:fld id="{B6F15528-21DE-4FAA-801E-634DDDAF4B2B}" type="slidenum">
               <a:rPr lang="en-US" smtClean="0"/>
+              <a:pPr/>
               <a:t>‹#›</a:t>
             </a:fld>
             <a:endParaRPr lang="en-US"/>
@@ -2040,11 +2028,6 @@
         </p:txBody>
       </p:sp>
     </p:spTree>
-    <p:extLst>
-      <p:ext uri="{BB962C8B-B14F-4D97-AF65-F5344CB8AC3E}">
-        <p14:creationId xmlns:p14="http://schemas.microsoft.com/office/powerpoint/2010/main" val="1212999818"/>
-      </p:ext>
-    </p:extLst>
   </p:cSld>
   <p:clrMapOvr>
     <a:masterClrMapping/>
@@ -2266,9 +2249,10 @@
           <a:bodyPr/>
           <a:lstStyle/>
           <a:p>
-            <a:fld id="{5BCAD085-E8A6-8845-BD4E-CB4CCA059FC4}" type="datetimeFigureOut">
+            <a:fld id="{1D8BD707-D9CF-40AE-B4C6-C98DA3205C09}" type="datetimeFigureOut">
               <a:rPr lang="en-US" smtClean="0"/>
-              <a:t>1/27/13</a:t>
+              <a:pPr/>
+              <a:t>8/1/2011</a:t>
             </a:fld>
             <a:endParaRPr lang="en-US"/>
           </a:p>
@@ -2308,8 +2292,9 @@
           <a:bodyPr/>
           <a:lstStyle/>
           <a:p>
-            <a:fld id="{C1FF6DA9-008F-8B48-92A6-B652298478BF}" type="slidenum">
+            <a:fld id="{B6F15528-21DE-4FAA-801E-634DDDAF4B2B}" type="slidenum">
               <a:rPr lang="en-US" smtClean="0"/>
+              <a:pPr/>
               <a:t>‹#›</a:t>
             </a:fld>
             <a:endParaRPr lang="en-US"/>
@@ -2317,11 +2302,6 @@
         </p:txBody>
       </p:sp>
     </p:spTree>
-    <p:extLst>
-      <p:ext uri="{BB962C8B-B14F-4D97-AF65-F5344CB8AC3E}">
-        <p14:creationId xmlns:p14="http://schemas.microsoft.com/office/powerpoint/2010/main" val="1840726560"/>
-      </p:ext>
-    </p:extLst>
   </p:cSld>
   <p:clrMapOvr>
     <a:masterClrMapping/>
@@ -2519,9 +2499,10 @@
           <a:bodyPr/>
           <a:lstStyle/>
           <a:p>
-            <a:fld id="{5BCAD085-E8A6-8845-BD4E-CB4CCA059FC4}" type="datetimeFigureOut">
+            <a:fld id="{1D8BD707-D9CF-40AE-B4C6-C98DA3205C09}" type="datetimeFigureOut">
               <a:rPr lang="en-US" smtClean="0"/>
-              <a:t>1/27/13</a:t>
+              <a:pPr/>
+              <a:t>8/1/2011</a:t>
             </a:fld>
             <a:endParaRPr lang="en-US"/>
           </a:p>
@@ -2561,8 +2542,9 @@
           <a:bodyPr/>
           <a:lstStyle/>
           <a:p>
-            <a:fld id="{C1FF6DA9-008F-8B48-92A6-B652298478BF}" type="slidenum">
+            <a:fld id="{B6F15528-21DE-4FAA-801E-634DDDAF4B2B}" type="slidenum">
               <a:rPr lang="en-US" smtClean="0"/>
+              <a:pPr/>
               <a:t>‹#›</a:t>
             </a:fld>
             <a:endParaRPr lang="en-US"/>
@@ -2570,11 +2552,6 @@
         </p:txBody>
       </p:sp>
     </p:spTree>
-    <p:extLst>
-      <p:ext uri="{BB962C8B-B14F-4D97-AF65-F5344CB8AC3E}">
-        <p14:creationId xmlns:p14="http://schemas.microsoft.com/office/powerpoint/2010/main" val="3889236939"/>
-      </p:ext>
-    </p:extLst>
   </p:cSld>
   <p:clrMapOvr>
     <a:masterClrMapping/>
@@ -2732,9 +2709,10 @@
             </a:lvl1pPr>
           </a:lstStyle>
           <a:p>
-            <a:fld id="{5BCAD085-E8A6-8845-BD4E-CB4CCA059FC4}" type="datetimeFigureOut">
+            <a:fld id="{1D8BD707-D9CF-40AE-B4C6-C98DA3205C09}" type="datetimeFigureOut">
               <a:rPr lang="en-US" smtClean="0"/>
-              <a:t>1/27/13</a:t>
+              <a:pPr/>
+              <a:t>8/1/2011</a:t>
             </a:fld>
             <a:endParaRPr lang="en-US"/>
           </a:p>
@@ -2810,8 +2788,9 @@
             </a:lvl1pPr>
           </a:lstStyle>
           <a:p>
-            <a:fld id="{C1FF6DA9-008F-8B48-92A6-B652298478BF}" type="slidenum">
+            <a:fld id="{B6F15528-21DE-4FAA-801E-634DDDAF4B2B}" type="slidenum">
               <a:rPr lang="en-US" smtClean="0"/>
+              <a:pPr/>
               <a:t>‹#›</a:t>
             </a:fld>
             <a:endParaRPr lang="en-US"/>
@@ -2819,11 +2798,6 @@
         </p:txBody>
       </p:sp>
     </p:spTree>
-    <p:extLst>
-      <p:ext uri="{BB962C8B-B14F-4D97-AF65-F5344CB8AC3E}">
-        <p14:creationId xmlns:p14="http://schemas.microsoft.com/office/powerpoint/2010/main" val="2209977519"/>
-      </p:ext>
-    </p:extLst>
   </p:cSld>
   <p:clrMap bg1="lt1" tx1="dk1" bg2="lt2" tx2="dk2" accent1="accent1" accent2="accent2" accent3="accent3" accent4="accent4" accent5="accent5" accent6="accent6" hlink="hlink" folHlink="folHlink"/>
   <p:sldLayoutIdLst>
@@ -2841,7 +2815,7 @@
   </p:sldLayoutIdLst>
   <p:txStyles>
     <p:titleStyle>
-      <a:lvl1pPr algn="ctr" defTabSz="457200" rtl="0" eaLnBrk="1" latinLnBrk="0" hangingPunct="1">
+      <a:lvl1pPr algn="ctr" defTabSz="914400" rtl="0" eaLnBrk="1" latinLnBrk="0" hangingPunct="1">
         <a:spcBef>
           <a:spcPct val="0"/>
         </a:spcBef>
@@ -2857,11 +2831,11 @@
       </a:lvl1pPr>
     </p:titleStyle>
     <p:bodyStyle>
-      <a:lvl1pPr marL="342900" indent="-342900" algn="l" defTabSz="457200" rtl="0" eaLnBrk="1" latinLnBrk="0" hangingPunct="1">
+      <a:lvl1pPr marL="342900" indent="-342900" algn="l" defTabSz="914400" rtl="0" eaLnBrk="1" latinLnBrk="0" hangingPunct="1">
         <a:spcBef>
           <a:spcPct val="20000"/>
         </a:spcBef>
-        <a:buFont typeface="Arial"/>
+        <a:buFont typeface="Arial" pitchFamily="34" charset="0"/>
         <a:buChar char="•"/>
         <a:defRPr sz="3200" kern="1200">
           <a:solidFill>
@@ -2872,11 +2846,11 @@
           <a:cs typeface="+mn-cs"/>
         </a:defRPr>
       </a:lvl1pPr>
-      <a:lvl2pPr marL="742950" indent="-285750" algn="l" defTabSz="457200" rtl="0" eaLnBrk="1" latinLnBrk="0" hangingPunct="1">
+      <a:lvl2pPr marL="742950" indent="-285750" algn="l" defTabSz="914400" rtl="0" eaLnBrk="1" latinLnBrk="0" hangingPunct="1">
         <a:spcBef>
           <a:spcPct val="20000"/>
         </a:spcBef>
-        <a:buFont typeface="Arial"/>
+        <a:buFont typeface="Arial" pitchFamily="34" charset="0"/>
         <a:buChar char="–"/>
         <a:defRPr sz="2800" kern="1200">
           <a:solidFill>
@@ -2887,11 +2861,11 @@
           <a:cs typeface="+mn-cs"/>
         </a:defRPr>
       </a:lvl2pPr>
-      <a:lvl3pPr marL="1143000" indent="-228600" algn="l" defTabSz="457200" rtl="0" eaLnBrk="1" latinLnBrk="0" hangingPunct="1">
+      <a:lvl3pPr marL="1143000" indent="-228600" algn="l" defTabSz="914400" rtl="0" eaLnBrk="1" latinLnBrk="0" hangingPunct="1">
         <a:spcBef>
           <a:spcPct val="20000"/>
         </a:spcBef>
-        <a:buFont typeface="Arial"/>
+        <a:buFont typeface="Arial" pitchFamily="34" charset="0"/>
         <a:buChar char="•"/>
         <a:defRPr sz="2400" kern="1200">
           <a:solidFill>
@@ -2902,11 +2876,11 @@
           <a:cs typeface="+mn-cs"/>
         </a:defRPr>
       </a:lvl3pPr>
-      <a:lvl4pPr marL="1600200" indent="-228600" algn="l" defTabSz="457200" rtl="0" eaLnBrk="1" latinLnBrk="0" hangingPunct="1">
+      <a:lvl4pPr marL="1600200" indent="-228600" algn="l" defTabSz="914400" rtl="0" eaLnBrk="1" latinLnBrk="0" hangingPunct="1">
         <a:spcBef>
           <a:spcPct val="20000"/>
         </a:spcBef>
-        <a:buFont typeface="Arial"/>
+        <a:buFont typeface="Arial" pitchFamily="34" charset="0"/>
         <a:buChar char="–"/>
         <a:defRPr sz="2000" kern="1200">
           <a:solidFill>
@@ -2917,11 +2891,11 @@
           <a:cs typeface="+mn-cs"/>
         </a:defRPr>
       </a:lvl4pPr>
-      <a:lvl5pPr marL="2057400" indent="-228600" algn="l" defTabSz="457200" rtl="0" eaLnBrk="1" latinLnBrk="0" hangingPunct="1">
+      <a:lvl5pPr marL="2057400" indent="-228600" algn="l" defTabSz="914400" rtl="0" eaLnBrk="1" latinLnBrk="0" hangingPunct="1">
         <a:spcBef>
           <a:spcPct val="20000"/>
         </a:spcBef>
-        <a:buFont typeface="Arial"/>
+        <a:buFont typeface="Arial" pitchFamily="34" charset="0"/>
         <a:buChar char="»"/>
         <a:defRPr sz="2000" kern="1200">
           <a:solidFill>
@@ -2932,11 +2906,11 @@
           <a:cs typeface="+mn-cs"/>
         </a:defRPr>
       </a:lvl5pPr>
-      <a:lvl6pPr marL="2514600" indent="-228600" algn="l" defTabSz="457200" rtl="0" eaLnBrk="1" latinLnBrk="0" hangingPunct="1">
+      <a:lvl6pPr marL="2514600" indent="-228600" algn="l" defTabSz="914400" rtl="0" eaLnBrk="1" latinLnBrk="0" hangingPunct="1">
         <a:spcBef>
           <a:spcPct val="20000"/>
         </a:spcBef>
-        <a:buFont typeface="Arial"/>
+        <a:buFont typeface="Arial" pitchFamily="34" charset="0"/>
         <a:buChar char="•"/>
         <a:defRPr sz="2000" kern="1200">
           <a:solidFill>
@@ -2947,11 +2921,11 @@
           <a:cs typeface="+mn-cs"/>
         </a:defRPr>
       </a:lvl6pPr>
-      <a:lvl7pPr marL="2971800" indent="-228600" algn="l" defTabSz="457200" rtl="0" eaLnBrk="1" latinLnBrk="0" hangingPunct="1">
+      <a:lvl7pPr marL="2971800" indent="-228600" algn="l" defTabSz="914400" rtl="0" eaLnBrk="1" latinLnBrk="0" hangingPunct="1">
         <a:spcBef>
           <a:spcPct val="20000"/>
         </a:spcBef>
-        <a:buFont typeface="Arial"/>
+        <a:buFont typeface="Arial" pitchFamily="34" charset="0"/>
         <a:buChar char="•"/>
         <a:defRPr sz="2000" kern="1200">
           <a:solidFill>
@@ -2962,11 +2936,11 @@
           <a:cs typeface="+mn-cs"/>
         </a:defRPr>
       </a:lvl7pPr>
-      <a:lvl8pPr marL="3429000" indent="-228600" algn="l" defTabSz="457200" rtl="0" eaLnBrk="1" latinLnBrk="0" hangingPunct="1">
+      <a:lvl8pPr marL="3429000" indent="-228600" algn="l" defTabSz="914400" rtl="0" eaLnBrk="1" latinLnBrk="0" hangingPunct="1">
         <a:spcBef>
           <a:spcPct val="20000"/>
         </a:spcBef>
-        <a:buFont typeface="Arial"/>
+        <a:buFont typeface="Arial" pitchFamily="34" charset="0"/>
         <a:buChar char="•"/>
         <a:defRPr sz="2000" kern="1200">
           <a:solidFill>
@@ -2977,11 +2951,11 @@
           <a:cs typeface="+mn-cs"/>
         </a:defRPr>
       </a:lvl8pPr>
-      <a:lvl9pPr marL="3886200" indent="-228600" algn="l" defTabSz="457200" rtl="0" eaLnBrk="1" latinLnBrk="0" hangingPunct="1">
+      <a:lvl9pPr marL="3886200" indent="-228600" algn="l" defTabSz="914400" rtl="0" eaLnBrk="1" latinLnBrk="0" hangingPunct="1">
         <a:spcBef>
           <a:spcPct val="20000"/>
         </a:spcBef>
-        <a:buFont typeface="Arial"/>
+        <a:buFont typeface="Arial" pitchFamily="34" charset="0"/>
         <a:buChar char="•"/>
         <a:defRPr sz="2000" kern="1200">
           <a:solidFill>
@@ -2997,7 +2971,7 @@
       <a:defPPr>
         <a:defRPr lang="en-US"/>
       </a:defPPr>
-      <a:lvl1pPr marL="0" algn="l" defTabSz="457200" rtl="0" eaLnBrk="1" latinLnBrk="0" hangingPunct="1">
+      <a:lvl1pPr marL="0" algn="l" defTabSz="914400" rtl="0" eaLnBrk="1" latinLnBrk="0" hangingPunct="1">
         <a:defRPr sz="1800" kern="1200">
           <a:solidFill>
             <a:schemeClr val="tx1"/>
@@ -3007,7 +2981,7 @@
           <a:cs typeface="+mn-cs"/>
         </a:defRPr>
       </a:lvl1pPr>
-      <a:lvl2pPr marL="457200" algn="l" defTabSz="457200" rtl="0" eaLnBrk="1" latinLnBrk="0" hangingPunct="1">
+      <a:lvl2pPr marL="457200" algn="l" defTabSz="914400" rtl="0" eaLnBrk="1" latinLnBrk="0" hangingPunct="1">
         <a:defRPr sz="1800" kern="1200">
           <a:solidFill>
             <a:schemeClr val="tx1"/>
@@ -3017,7 +2991,7 @@
           <a:cs typeface="+mn-cs"/>
         </a:defRPr>
       </a:lvl2pPr>
-      <a:lvl3pPr marL="914400" algn="l" defTabSz="457200" rtl="0" eaLnBrk="1" latinLnBrk="0" hangingPunct="1">
+      <a:lvl3pPr marL="914400" algn="l" defTabSz="914400" rtl="0" eaLnBrk="1" latinLnBrk="0" hangingPunct="1">
         <a:defRPr sz="1800" kern="1200">
           <a:solidFill>
             <a:schemeClr val="tx1"/>
@@ -3027,7 +3001,7 @@
           <a:cs typeface="+mn-cs"/>
         </a:defRPr>
       </a:lvl3pPr>
-      <a:lvl4pPr marL="1371600" algn="l" defTabSz="457200" rtl="0" eaLnBrk="1" latinLnBrk="0" hangingPunct="1">
+      <a:lvl4pPr marL="1371600" algn="l" defTabSz="914400" rtl="0" eaLnBrk="1" latinLnBrk="0" hangingPunct="1">
         <a:defRPr sz="1800" kern="1200">
           <a:solidFill>
             <a:schemeClr val="tx1"/>
@@ -3037,7 +3011,7 @@
           <a:cs typeface="+mn-cs"/>
         </a:defRPr>
       </a:lvl4pPr>
-      <a:lvl5pPr marL="1828800" algn="l" defTabSz="457200" rtl="0" eaLnBrk="1" latinLnBrk="0" hangingPunct="1">
+      <a:lvl5pPr marL="1828800" algn="l" defTabSz="914400" rtl="0" eaLnBrk="1" latinLnBrk="0" hangingPunct="1">
         <a:defRPr sz="1800" kern="1200">
           <a:solidFill>
             <a:schemeClr val="tx1"/>
@@ -3047,7 +3021,7 @@
           <a:cs typeface="+mn-cs"/>
         </a:defRPr>
       </a:lvl5pPr>
-      <a:lvl6pPr marL="2286000" algn="l" defTabSz="457200" rtl="0" eaLnBrk="1" latinLnBrk="0" hangingPunct="1">
+      <a:lvl6pPr marL="2286000" algn="l" defTabSz="914400" rtl="0" eaLnBrk="1" latinLnBrk="0" hangingPunct="1">
         <a:defRPr sz="1800" kern="1200">
           <a:solidFill>
             <a:schemeClr val="tx1"/>
@@ -3057,7 +3031,7 @@
           <a:cs typeface="+mn-cs"/>
         </a:defRPr>
       </a:lvl6pPr>
-      <a:lvl7pPr marL="2743200" algn="l" defTabSz="457200" rtl="0" eaLnBrk="1" latinLnBrk="0" hangingPunct="1">
+      <a:lvl7pPr marL="2743200" algn="l" defTabSz="914400" rtl="0" eaLnBrk="1" latinLnBrk="0" hangingPunct="1">
         <a:defRPr sz="1800" kern="1200">
           <a:solidFill>
             <a:schemeClr val="tx1"/>
@@ -3067,7 +3041,7 @@
           <a:cs typeface="+mn-cs"/>
         </a:defRPr>
       </a:lvl7pPr>
-      <a:lvl8pPr marL="3200400" algn="l" defTabSz="457200" rtl="0" eaLnBrk="1" latinLnBrk="0" hangingPunct="1">
+      <a:lvl8pPr marL="3200400" algn="l" defTabSz="914400" rtl="0" eaLnBrk="1" latinLnBrk="0" hangingPunct="1">
         <a:defRPr sz="1800" kern="1200">
           <a:solidFill>
             <a:schemeClr val="tx1"/>
@@ -3077,7 +3051,7 @@
           <a:cs typeface="+mn-cs"/>
         </a:defRPr>
       </a:lvl8pPr>
-      <a:lvl9pPr marL="3657600" algn="l" defTabSz="457200" rtl="0" eaLnBrk="1" latinLnBrk="0" hangingPunct="1">
+      <a:lvl9pPr marL="3657600" algn="l" defTabSz="914400" rtl="0" eaLnBrk="1" latinLnBrk="0" hangingPunct="1">
         <a:defRPr sz="1800" kern="1200">
           <a:solidFill>
             <a:schemeClr val="tx1"/>
@@ -3093,117 +3067,447 @@
 </file>
 
 <file path=ppt/slides/slide1.xml><?xml version="1.0" encoding="utf-8"?>
-<p:sld xmlns:a="http://schemas.openxmlformats.org/drawingml/2006/main" xmlns:p="http://schemas.openxmlformats.org/presentationml/2006/main" xmlns:r="http://schemas.openxmlformats.org/officeDocument/2006/relationships">
+<p:sld xmlns:p="http://schemas.openxmlformats.org/presentationml/2006/main" xmlns:a="http://schemas.openxmlformats.org/drawingml/2006/main" xmlns:r="http://schemas.openxmlformats.org/officeDocument/2006/relationships">
   <p:cSld>
+    <p:bg>
+      <p:bgPr>
+        <a:solidFill>
+          <a:srgbClr val="FEF8F5"/>
+        </a:solidFill>
+      </p:bgPr>
+    </p:bg>
     <p:spTree>
       <p:nvGrpSpPr>
         <p:cNvPr id="1" name=""/>
         <p:cNvGrpSpPr/>
         <p:nvPr/>
       </p:nvGrpSpPr>
-      <p:grpSpPr/>
+      <p:grpSpPr>
+        <a:xfrm>
+          <a:off x="0" y="0"/>
+          <a:ext cx="0" cy="0"/>
+          <a:chOff x="0" y="0"/>
+          <a:chExt cx="0" cy="0"/>
+        </a:xfrm>
+      </p:grpSpPr>
+      <p:grpSp>
+        <p:nvGrpSpPr>
+          <p:cNvPr name="Group 2" id="2"/>
+          <p:cNvGrpSpPr/>
+          <p:nvPr/>
+        </p:nvGrpSpPr>
+        <p:grpSpPr>
+          <a:xfrm rot="0">
+            <a:off x="2286002" y="1138428"/>
+            <a:ext cx="3874033" cy="7996428"/>
+            <a:chOff x="0" y="0"/>
+            <a:chExt cx="3673158" cy="7581798"/>
+          </a:xfrm>
+        </p:grpSpPr>
+        <p:sp>
+          <p:nvSpPr>
+            <p:cNvPr name="Freeform 3" id="3"/>
+            <p:cNvSpPr/>
+            <p:nvPr/>
+          </p:nvSpPr>
+          <p:spPr>
+            <a:xfrm flipH="false" flipV="false" rot="0">
+              <a:off x="0" y="0"/>
+              <a:ext cx="3673221" cy="7581773"/>
+            </a:xfrm>
+            <a:custGeom>
+              <a:avLst/>
+              <a:gdLst/>
+              <a:ahLst/>
+              <a:cxnLst/>
+              <a:rect r="r" b="b" t="t" l="l"/>
+              <a:pathLst>
+                <a:path h="7581773" w="3673221">
+                  <a:moveTo>
+                    <a:pt x="0" y="0"/>
+                  </a:moveTo>
+                  <a:lnTo>
+                    <a:pt x="3673221" y="0"/>
+                  </a:lnTo>
+                  <a:lnTo>
+                    <a:pt x="3673221" y="7581773"/>
+                  </a:lnTo>
+                  <a:lnTo>
+                    <a:pt x="0" y="7581773"/>
+                  </a:lnTo>
+                  <a:close/>
+                </a:path>
+              </a:pathLst>
+            </a:custGeom>
+            <a:solidFill>
+              <a:srgbClr val="7A7169"/>
+            </a:solidFill>
+          </p:spPr>
+        </p:sp>
+      </p:grpSp>
+      <p:grpSp>
+        <p:nvGrpSpPr>
+          <p:cNvPr name="Group 4" id="4"/>
+          <p:cNvGrpSpPr/>
+          <p:nvPr/>
+        </p:nvGrpSpPr>
+        <p:grpSpPr>
+          <a:xfrm rot="0">
+            <a:off x="15578853" y="1138428"/>
+            <a:ext cx="432054" cy="7996428"/>
+            <a:chOff x="0" y="0"/>
+            <a:chExt cx="409651" cy="7581798"/>
+          </a:xfrm>
+        </p:grpSpPr>
+        <p:sp>
+          <p:nvSpPr>
+            <p:cNvPr name="Freeform 5" id="5"/>
+            <p:cNvSpPr/>
+            <p:nvPr/>
+          </p:nvSpPr>
+          <p:spPr>
+            <a:xfrm flipH="false" flipV="false" rot="0">
+              <a:off x="0" y="0"/>
+              <a:ext cx="409702" cy="7581773"/>
+            </a:xfrm>
+            <a:custGeom>
+              <a:avLst/>
+              <a:gdLst/>
+              <a:ahLst/>
+              <a:cxnLst/>
+              <a:rect r="r" b="b" t="t" l="l"/>
+              <a:pathLst>
+                <a:path h="7581773" w="409702">
+                  <a:moveTo>
+                    <a:pt x="0" y="0"/>
+                  </a:moveTo>
+                  <a:lnTo>
+                    <a:pt x="409702" y="0"/>
+                  </a:lnTo>
+                  <a:lnTo>
+                    <a:pt x="409702" y="7581773"/>
+                  </a:lnTo>
+                  <a:lnTo>
+                    <a:pt x="0" y="7581773"/>
+                  </a:lnTo>
+                  <a:close/>
+                </a:path>
+              </a:pathLst>
+            </a:custGeom>
+            <a:solidFill>
+              <a:srgbClr val="948A82">
+                <a:alpha val="24706"/>
+              </a:srgbClr>
+            </a:solidFill>
+          </p:spPr>
+        </p:sp>
+      </p:grpSp>
+      <p:grpSp>
+        <p:nvGrpSpPr>
+          <p:cNvPr name="Group 6" id="6"/>
+          <p:cNvGrpSpPr/>
+          <p:nvPr/>
+        </p:nvGrpSpPr>
+        <p:grpSpPr>
+          <a:xfrm rot="0">
+            <a:off x="2286002" y="1142996"/>
+            <a:ext cx="10284321" cy="8000996"/>
+            <a:chOff x="0" y="0"/>
+            <a:chExt cx="9751060" cy="7586129"/>
+          </a:xfrm>
+        </p:grpSpPr>
+        <p:sp>
+          <p:nvSpPr>
+            <p:cNvPr name="Freeform 7" id="7"/>
+            <p:cNvSpPr/>
+            <p:nvPr/>
+          </p:nvSpPr>
+          <p:spPr>
+            <a:xfrm flipH="false" flipV="false" rot="0">
+              <a:off x="0" y="0"/>
+              <a:ext cx="9751060" cy="7586091"/>
+            </a:xfrm>
+            <a:custGeom>
+              <a:avLst/>
+              <a:gdLst/>
+              <a:ahLst/>
+              <a:cxnLst/>
+              <a:rect r="r" b="b" t="t" l="l"/>
+              <a:pathLst>
+                <a:path h="7586091" w="9751060">
+                  <a:moveTo>
+                    <a:pt x="0" y="0"/>
+                  </a:moveTo>
+                  <a:lnTo>
+                    <a:pt x="9751060" y="0"/>
+                  </a:lnTo>
+                  <a:lnTo>
+                    <a:pt x="9751060" y="7586091"/>
+                  </a:lnTo>
+                  <a:lnTo>
+                    <a:pt x="0" y="7586091"/>
+                  </a:lnTo>
+                  <a:close/>
+                </a:path>
+              </a:pathLst>
+            </a:custGeom>
+            <a:solidFill>
+              <a:srgbClr val="7A7169"/>
+            </a:solidFill>
+          </p:spPr>
+        </p:sp>
+      </p:grpSp>
+      <p:grpSp>
+        <p:nvGrpSpPr>
+          <p:cNvPr name="Group 8" id="8"/>
+          <p:cNvGrpSpPr/>
+          <p:nvPr/>
+        </p:nvGrpSpPr>
+        <p:grpSpPr>
+          <a:xfrm rot="0">
+            <a:off x="3489579" y="1947672"/>
+            <a:ext cx="8229600" cy="4882896"/>
+            <a:chOff x="0" y="0"/>
+            <a:chExt cx="7802880" cy="4629709"/>
+          </a:xfrm>
+        </p:grpSpPr>
+        <p:sp>
+          <p:nvSpPr>
+            <p:cNvPr name="Freeform 9" id="9"/>
+            <p:cNvSpPr/>
+            <p:nvPr/>
+          </p:nvSpPr>
+          <p:spPr>
+            <a:xfrm flipH="false" flipV="false" rot="0">
+              <a:off x="0" y="0"/>
+              <a:ext cx="7802880" cy="4629709"/>
+            </a:xfrm>
+            <a:custGeom>
+              <a:avLst/>
+              <a:gdLst/>
+              <a:ahLst/>
+              <a:cxnLst/>
+              <a:rect r="r" b="b" t="t" l="l"/>
+              <a:pathLst>
+                <a:path h="4629709" w="7802880">
+                  <a:moveTo>
+                    <a:pt x="0" y="0"/>
+                  </a:moveTo>
+                  <a:lnTo>
+                    <a:pt x="7802880" y="0"/>
+                  </a:lnTo>
+                  <a:lnTo>
+                    <a:pt x="7802880" y="4629709"/>
+                  </a:lnTo>
+                  <a:lnTo>
+                    <a:pt x="0" y="4629709"/>
+                  </a:lnTo>
+                  <a:close/>
+                </a:path>
+              </a:pathLst>
+            </a:custGeom>
+            <a:blipFill>
+              <a:blip r:embed="rId2">
+                <a:alphaModFix amt="0"/>
+              </a:blip>
+              <a:stretch>
+                <a:fillRect l="-26126" t="0" r="-26126" b="0"/>
+              </a:stretch>
+            </a:blipFill>
+          </p:spPr>
+        </p:sp>
+        <p:sp>
+          <p:nvSpPr>
+            <p:cNvPr name="TextBox 10" id="10"/>
+            <p:cNvSpPr txBox="true"/>
+            <p:nvPr/>
+          </p:nvSpPr>
+          <p:spPr>
+            <a:xfrm>
+              <a:off x="0" y="47625"/>
+              <a:ext cx="7802880" cy="4582084"/>
+            </a:xfrm>
+            <a:prstGeom prst="rect">
+              <a:avLst/>
+            </a:prstGeom>
+          </p:spPr>
+          <p:txBody>
+            <a:bodyPr anchor="b" rtlCol="false" tIns="0" lIns="0" bIns="0" rIns="0"/>
+            <a:lstStyle/>
+            <a:p>
+              <a:pPr algn="l">
+                <a:lnSpc>
+                  <a:spcPts val="4860"/>
+                </a:lnSpc>
+              </a:pPr>
+              <a:r>
+                <a:rPr lang="en-US" b="true" sz="4500" spc="-156">
+                  <a:solidFill>
+                    <a:srgbClr val="FEF8F5"/>
+                  </a:solidFill>
+                  <a:latin typeface="PT Sans Bold"/>
+                  <a:ea typeface="PT Sans Bold"/>
+                  <a:cs typeface="PT Sans Bold"/>
+                  <a:sym typeface="PT Sans Bold"/>
+                </a:rPr>
+                <a:t>Advanced Customer Segmentation Using Unsupervised Learning</a:t>
+              </a:r>
+            </a:p>
+          </p:txBody>
+        </p:sp>
+      </p:grpSp>
       <p:sp>
         <p:nvSpPr>
-          <p:cNvPr id="2" name="Title 1"/>
-          <p:cNvSpPr>
-            <a:spLocks noGrp="1"/>
-          </p:cNvSpPr>
-          <p:nvPr>
-            <p:ph type="ctrTitle"/>
-          </p:nvPr>
+          <p:cNvPr name="TextBox 11" id="11"/>
+          <p:cNvSpPr txBox="true"/>
+          <p:nvPr/>
         </p:nvSpPr>
-        <p:spPr/>
+        <p:spPr>
+          <a:xfrm rot="0">
+            <a:off x="3652108" y="7098235"/>
+            <a:ext cx="7972425" cy="1214437"/>
+          </a:xfrm>
+          <a:prstGeom prst="rect">
+            <a:avLst/>
+          </a:prstGeom>
+        </p:spPr>
         <p:txBody>
-          <a:bodyPr/>
+          <a:bodyPr anchor="t" rtlCol="false" tIns="0" lIns="0" bIns="0" rIns="0">
+            <a:spAutoFit/>
+          </a:bodyPr>
           <a:lstStyle/>
           <a:p>
-            <a:pPr>
-              <a:defRPr sz="3000" b="1">
-                <a:solidFill>
-                  <a:srgbClr val="203864"/>
-                </a:solidFill>
-              </a:defRPr>
+            <a:pPr algn="l">
+              <a:lnSpc>
+                <a:spcPts val="2916"/>
+              </a:lnSpc>
             </a:pPr>
             <a:r>
-              <a:t>Advanced Customer Segmentation Using Unsupervised Learning</a:t>
+              <a:rPr lang="en-US" sz="2700" spc="-3">
+                <a:solidFill>
+                  <a:srgbClr val="FEF8F5"/>
+                </a:solidFill>
+                <a:latin typeface="PT Sans"/>
+                <a:ea typeface="PT Sans"/>
+                <a:cs typeface="PT Sans"/>
+                <a:sym typeface="PT Sans"/>
+              </a:rPr>
+              <a:t>Customer Intelligence &amp; Strategic Business Insights</a:t>
+            </a:r>
+          </a:p>
+          <a:p>
+            <a:pPr algn="l">
+              <a:lnSpc>
+                <a:spcPts val="2916"/>
+              </a:lnSpc>
+            </a:pPr>
+            <a:r>
+              <a:rPr lang="en-US" sz="2700" spc="-3">
+                <a:solidFill>
+                  <a:srgbClr val="FEF8F5"/>
+                </a:solidFill>
+                <a:latin typeface="PT Sans"/>
+                <a:ea typeface="PT Sans"/>
+                <a:cs typeface="PT Sans"/>
+                <a:sym typeface="PT Sans"/>
+              </a:rPr>
+              <a:t>Capstone Project Presentation</a:t>
             </a:r>
           </a:p>
         </p:txBody>
       </p:sp>
       <p:sp>
         <p:nvSpPr>
-          <p:cNvPr id="3" name="Subtitle 2"/>
-          <p:cNvSpPr>
-            <a:spLocks noGrp="1"/>
-          </p:cNvSpPr>
-          <p:nvPr>
-            <p:ph type="subTitle" idx="1"/>
-          </p:nvPr>
+          <p:cNvPr name="TextBox 12" id="12"/>
+          <p:cNvSpPr txBox="true"/>
+          <p:nvPr/>
         </p:nvSpPr>
-        <p:spPr/>
+        <p:spPr>
+          <a:xfrm rot="0">
+            <a:off x="3100388" y="9391174"/>
+            <a:ext cx="12087225" cy="282892"/>
+          </a:xfrm>
+          <a:prstGeom prst="rect">
+            <a:avLst/>
+          </a:prstGeom>
+        </p:spPr>
         <p:txBody>
-          <a:bodyPr/>
+          <a:bodyPr anchor="t" rtlCol="false" tIns="0" lIns="0" bIns="0" rIns="0">
+            <a:spAutoFit/>
+          </a:bodyPr>
           <a:lstStyle/>
           <a:p>
-            <a:pPr>
-              <a:defRPr sz="1800">
-                <a:solidFill>
-                  <a:srgbClr val="5A5A5A"/>
-                </a:solidFill>
-              </a:defRPr>
+            <a:pPr algn="l">
+              <a:lnSpc>
+                <a:spcPts val="1800"/>
+              </a:lnSpc>
             </a:pPr>
             <a:r>
-              <a:t>Customer Intelligence &amp; Strategic Business Insights</a:t>
-            </a:r>
-          </a:p>
-          <a:p>
-            <a:pPr>
-              <a:defRPr sz="1800">
+              <a:rPr lang="en-US" sz="1500" spc="-2">
                 <a:solidFill>
-                  <a:srgbClr val="5A5A5A"/>
+                  <a:srgbClr val="000000"/>
                 </a:solidFill>
-              </a:defRPr>
-            </a:pPr>
-            <a:r>
-              <a:t>Capstone Project Presentation</a:t>
+                <a:latin typeface="PT Sans"/>
+                <a:ea typeface="PT Sans"/>
+                <a:cs typeface="PT Sans"/>
+                <a:sym typeface="PT Sans"/>
+              </a:rPr>
+              <a:t>Advanced Customer Segmentation | Capstone Project    |    Slide 1</a:t>
             </a:r>
           </a:p>
         </p:txBody>
       </p:sp>
       <p:sp>
         <p:nvSpPr>
-          <p:cNvPr id="4" name="TextBox 3"/>
-          <p:cNvSpPr txBox="1"/>
+          <p:cNvPr name="Freeform 13" id="13"/>
+          <p:cNvSpPr/>
           <p:nvPr/>
         </p:nvSpPr>
         <p:spPr>
-          <a:xfrm>
-            <a:off x="457200" y="6217920"/>
-            <a:ext cx="8229600" cy="274320"/>
-          </a:xfrm>
-          <a:prstGeom prst="rect">
+          <a:xfrm flipH="false" flipV="false" rot="0">
+            <a:off x="13211019" y="6453582"/>
+            <a:ext cx="3265976" cy="3879669"/>
+          </a:xfrm>
+          <a:custGeom>
             <a:avLst/>
-          </a:prstGeom>
-          <a:noFill/>
+            <a:gdLst/>
+            <a:ahLst/>
+            <a:cxnLst/>
+            <a:rect r="r" b="b" t="t" l="l"/>
+            <a:pathLst>
+              <a:path h="3879669" w="3265976">
+                <a:moveTo>
+                  <a:pt x="0" y="0"/>
+                </a:moveTo>
+                <a:lnTo>
+                  <a:pt x="3265975" y="0"/>
+                </a:lnTo>
+                <a:lnTo>
+                  <a:pt x="3265975" y="3879669"/>
+                </a:lnTo>
+                <a:lnTo>
+                  <a:pt x="0" y="3879669"/>
+                </a:lnTo>
+                <a:lnTo>
+                  <a:pt x="0" y="0"/>
+                </a:lnTo>
+                <a:close/>
+              </a:path>
+            </a:pathLst>
+          </a:custGeom>
+          <a:blipFill>
+            <a:blip r:embed="rId3">
+              <a:extLst>
+                <a:ext uri="{96DAC541-7B7A-43D3-8B79-37D633B846F1}">
+                  <asvg:svgBlip xmlns:asvg="http://schemas.microsoft.com/office/drawing/2016/SVG/main" r:embed="rId4"/>
+                </a:ext>
+              </a:extLst>
+            </a:blip>
+            <a:stretch>
+              <a:fillRect l="0" t="0" r="0" b="0"/>
+            </a:stretch>
+          </a:blipFill>
         </p:spPr>
-        <p:txBody>
-          <a:bodyPr wrap="none">
-            <a:spAutoFit/>
-          </a:bodyPr>
-          <a:lstStyle/>
-          <a:p>
-            <a:pPr>
-              <a:defRPr sz="1000">
-                <a:solidFill>
-                  <a:srgbClr val="5A5A5A"/>
-                </a:solidFill>
-              </a:defRPr>
-            </a:pPr>
-            <a:r>
-              <a:t>Advanced Customer Segmentation | Capstone Project    |    Slide 1</a:t>
-            </a:r>
-          </a:p>
-        </p:txBody>
       </p:sp>
     </p:spTree>
   </p:cSld>
@@ -3214,97 +3518,337 @@
 </file>
 
 <file path=ppt/slides/slide10.xml><?xml version="1.0" encoding="utf-8"?>
-<p:sld xmlns:a="http://schemas.openxmlformats.org/drawingml/2006/main" xmlns:p="http://schemas.openxmlformats.org/presentationml/2006/main" xmlns:r="http://schemas.openxmlformats.org/officeDocument/2006/relationships">
+<p:sld xmlns:p="http://schemas.openxmlformats.org/presentationml/2006/main" xmlns:a="http://schemas.openxmlformats.org/drawingml/2006/main" xmlns:r="http://schemas.openxmlformats.org/officeDocument/2006/relationships">
   <p:cSld>
+    <p:bg>
+      <p:bgPr>
+        <a:solidFill>
+          <a:srgbClr val="FEF8F5"/>
+        </a:solidFill>
+      </p:bgPr>
+    </p:bg>
     <p:spTree>
       <p:nvGrpSpPr>
         <p:cNvPr id="1" name=""/>
         <p:cNvGrpSpPr/>
         <p:nvPr/>
       </p:nvGrpSpPr>
-      <p:grpSpPr/>
+      <p:grpSpPr>
+        <a:xfrm>
+          <a:off x="0" y="0"/>
+          <a:ext cx="0" cy="0"/>
+          <a:chOff x="0" y="0"/>
+          <a:chExt cx="0" cy="0"/>
+        </a:xfrm>
+      </p:grpSpPr>
+      <p:grpSp>
+        <p:nvGrpSpPr>
+          <p:cNvPr name="Group 2" id="2"/>
+          <p:cNvGrpSpPr/>
+          <p:nvPr/>
+        </p:nvGrpSpPr>
+        <p:grpSpPr>
+          <a:xfrm rot="0">
+            <a:off x="2286002" y="1138428"/>
+            <a:ext cx="3874033" cy="7996428"/>
+            <a:chOff x="0" y="0"/>
+            <a:chExt cx="3673158" cy="7581798"/>
+          </a:xfrm>
+        </p:grpSpPr>
+        <p:sp>
+          <p:nvSpPr>
+            <p:cNvPr name="Freeform 3" id="3"/>
+            <p:cNvSpPr/>
+            <p:nvPr/>
+          </p:nvSpPr>
+          <p:spPr>
+            <a:xfrm flipH="false" flipV="false" rot="0">
+              <a:off x="0" y="0"/>
+              <a:ext cx="3673221" cy="7581773"/>
+            </a:xfrm>
+            <a:custGeom>
+              <a:avLst/>
+              <a:gdLst/>
+              <a:ahLst/>
+              <a:cxnLst/>
+              <a:rect r="r" b="b" t="t" l="l"/>
+              <a:pathLst>
+                <a:path h="7581773" w="3673221">
+                  <a:moveTo>
+                    <a:pt x="0" y="0"/>
+                  </a:moveTo>
+                  <a:lnTo>
+                    <a:pt x="3673221" y="0"/>
+                  </a:lnTo>
+                  <a:lnTo>
+                    <a:pt x="3673221" y="7581773"/>
+                  </a:lnTo>
+                  <a:lnTo>
+                    <a:pt x="0" y="7581773"/>
+                  </a:lnTo>
+                  <a:close/>
+                </a:path>
+              </a:pathLst>
+            </a:custGeom>
+            <a:solidFill>
+              <a:srgbClr val="CCB6AD"/>
+            </a:solidFill>
+          </p:spPr>
+        </p:sp>
+      </p:grpSp>
+      <p:grpSp>
+        <p:nvGrpSpPr>
+          <p:cNvPr name="Group 4" id="4"/>
+          <p:cNvGrpSpPr/>
+          <p:nvPr/>
+        </p:nvGrpSpPr>
+        <p:grpSpPr>
+          <a:xfrm rot="0">
+            <a:off x="15578853" y="1138428"/>
+            <a:ext cx="432054" cy="7996428"/>
+            <a:chOff x="0" y="0"/>
+            <a:chExt cx="409651" cy="7581798"/>
+          </a:xfrm>
+        </p:grpSpPr>
+        <p:sp>
+          <p:nvSpPr>
+            <p:cNvPr name="Freeform 5" id="5"/>
+            <p:cNvSpPr/>
+            <p:nvPr/>
+          </p:nvSpPr>
+          <p:spPr>
+            <a:xfrm flipH="false" flipV="false" rot="0">
+              <a:off x="0" y="0"/>
+              <a:ext cx="409702" cy="7581773"/>
+            </a:xfrm>
+            <a:custGeom>
+              <a:avLst/>
+              <a:gdLst/>
+              <a:ahLst/>
+              <a:cxnLst/>
+              <a:rect r="r" b="b" t="t" l="l"/>
+              <a:pathLst>
+                <a:path h="7581773" w="409702">
+                  <a:moveTo>
+                    <a:pt x="0" y="0"/>
+                  </a:moveTo>
+                  <a:lnTo>
+                    <a:pt x="409702" y="0"/>
+                  </a:lnTo>
+                  <a:lnTo>
+                    <a:pt x="409702" y="7581773"/>
+                  </a:lnTo>
+                  <a:lnTo>
+                    <a:pt x="0" y="7581773"/>
+                  </a:lnTo>
+                  <a:close/>
+                </a:path>
+              </a:pathLst>
+            </a:custGeom>
+            <a:solidFill>
+              <a:srgbClr val="948A82">
+                <a:alpha val="24706"/>
+              </a:srgbClr>
+            </a:solidFill>
+          </p:spPr>
+        </p:sp>
+      </p:grpSp>
+      <p:grpSp>
+        <p:nvGrpSpPr>
+          <p:cNvPr name="Group 6" id="6"/>
+          <p:cNvGrpSpPr/>
+          <p:nvPr/>
+        </p:nvGrpSpPr>
+        <p:grpSpPr>
+          <a:xfrm rot="0">
+            <a:off x="2570540" y="1685755"/>
+            <a:ext cx="3315923" cy="6901773"/>
+            <a:chOff x="0" y="0"/>
+            <a:chExt cx="3143987" cy="6543904"/>
+          </a:xfrm>
+        </p:grpSpPr>
+        <p:sp>
+          <p:nvSpPr>
+            <p:cNvPr name="Freeform 7" id="7"/>
+            <p:cNvSpPr/>
+            <p:nvPr/>
+          </p:nvSpPr>
+          <p:spPr>
+            <a:xfrm flipH="false" flipV="false" rot="0">
+              <a:off x="0" y="0"/>
+              <a:ext cx="3143982" cy="6543904"/>
+            </a:xfrm>
+            <a:custGeom>
+              <a:avLst/>
+              <a:gdLst/>
+              <a:ahLst/>
+              <a:cxnLst/>
+              <a:rect r="r" b="b" t="t" l="l"/>
+              <a:pathLst>
+                <a:path h="6543904" w="3143982">
+                  <a:moveTo>
+                    <a:pt x="0" y="0"/>
+                  </a:moveTo>
+                  <a:lnTo>
+                    <a:pt x="3143982" y="0"/>
+                  </a:lnTo>
+                  <a:lnTo>
+                    <a:pt x="3143982" y="6543904"/>
+                  </a:lnTo>
+                  <a:lnTo>
+                    <a:pt x="0" y="6543904"/>
+                  </a:lnTo>
+                  <a:close/>
+                </a:path>
+              </a:pathLst>
+            </a:custGeom>
+            <a:blipFill>
+              <a:blip r:embed="rId2">
+                <a:alphaModFix amt="0"/>
+              </a:blip>
+              <a:stretch>
+                <a:fillRect l="-217051" t="0" r="-217051" b="0"/>
+              </a:stretch>
+            </a:blipFill>
+          </p:spPr>
+        </p:sp>
+        <p:sp>
+          <p:nvSpPr>
+            <p:cNvPr name="TextBox 8" id="8"/>
+            <p:cNvSpPr txBox="true"/>
+            <p:nvPr/>
+          </p:nvSpPr>
+          <p:spPr>
+            <a:xfrm>
+              <a:off x="0" y="47625"/>
+              <a:ext cx="3143987" cy="6496279"/>
+            </a:xfrm>
+            <a:prstGeom prst="rect">
+              <a:avLst/>
+            </a:prstGeom>
+          </p:spPr>
+          <p:txBody>
+            <a:bodyPr anchor="ctr" rtlCol="false" tIns="0" lIns="0" bIns="0" rIns="0"/>
+            <a:lstStyle/>
+            <a:p>
+              <a:pPr algn="l">
+                <a:lnSpc>
+                  <a:spcPts val="4535"/>
+                </a:lnSpc>
+              </a:pPr>
+              <a:r>
+                <a:rPr lang="en-US" b="true" sz="4199" spc="-95">
+                  <a:solidFill>
+                    <a:srgbClr val="000000"/>
+                  </a:solidFill>
+                  <a:latin typeface="PT Sans Bold"/>
+                  <a:ea typeface="PT Sans Bold"/>
+                  <a:cs typeface="PT Sans Bold"/>
+                  <a:sym typeface="PT Sans Bold"/>
+                </a:rPr>
+                <a:t>PCA Cluster Visualization</a:t>
+              </a:r>
+            </a:p>
+          </p:txBody>
+        </p:sp>
+      </p:grpSp>
+      <p:grpSp>
+        <p:nvGrpSpPr>
+          <p:cNvPr name="Group 9" id="9"/>
+          <p:cNvGrpSpPr/>
+          <p:nvPr/>
+        </p:nvGrpSpPr>
+        <p:grpSpPr>
+          <a:xfrm rot="0">
+            <a:off x="6555654" y="2057400"/>
+            <a:ext cx="8229600" cy="6172200"/>
+            <a:chOff x="0" y="0"/>
+            <a:chExt cx="7802880" cy="5852160"/>
+          </a:xfrm>
+        </p:grpSpPr>
+        <p:sp>
+          <p:nvSpPr>
+            <p:cNvPr name="Freeform 10" id="10" descr="pca_plot.png"/>
+            <p:cNvSpPr/>
+            <p:nvPr/>
+          </p:nvSpPr>
+          <p:spPr>
+            <a:xfrm flipH="false" flipV="false" rot="0">
+              <a:off x="0" y="0"/>
+              <a:ext cx="7802880" cy="5852160"/>
+            </a:xfrm>
+            <a:custGeom>
+              <a:avLst/>
+              <a:gdLst/>
+              <a:ahLst/>
+              <a:cxnLst/>
+              <a:rect r="r" b="b" t="t" l="l"/>
+              <a:pathLst>
+                <a:path h="5852160" w="7802880">
+                  <a:moveTo>
+                    <a:pt x="0" y="0"/>
+                  </a:moveTo>
+                  <a:lnTo>
+                    <a:pt x="7802880" y="0"/>
+                  </a:lnTo>
+                  <a:lnTo>
+                    <a:pt x="7802880" y="5852160"/>
+                  </a:lnTo>
+                  <a:lnTo>
+                    <a:pt x="0" y="5852160"/>
+                  </a:lnTo>
+                  <a:lnTo>
+                    <a:pt x="0" y="0"/>
+                  </a:lnTo>
+                  <a:close/>
+                </a:path>
+              </a:pathLst>
+            </a:custGeom>
+            <a:blipFill>
+              <a:blip r:embed="rId3"/>
+              <a:stretch>
+                <a:fillRect l="0" t="0" r="0" b="0"/>
+              </a:stretch>
+            </a:blipFill>
+          </p:spPr>
+        </p:sp>
+      </p:grpSp>
       <p:sp>
         <p:nvSpPr>
-          <p:cNvPr id="2" name="Title 1"/>
-          <p:cNvSpPr>
-            <a:spLocks noGrp="1"/>
-          </p:cNvSpPr>
-          <p:nvPr>
-            <p:ph type="title"/>
-          </p:nvPr>
+          <p:cNvPr name="TextBox 11" id="11"/>
+          <p:cNvSpPr txBox="true"/>
+          <p:nvPr/>
         </p:nvSpPr>
-        <p:spPr/>
-        <p:txBody>
-          <a:bodyPr/>
-          <a:lstStyle/>
-          <a:p>
-            <a:pPr>
-              <a:defRPr sz="3000" b="1">
-                <a:solidFill>
-                  <a:srgbClr val="203864"/>
-                </a:solidFill>
-              </a:defRPr>
-            </a:pPr>
-            <a:r>
-              <a:t>PCA Cluster Visualization</a:t>
-            </a:r>
-          </a:p>
-        </p:txBody>
-      </p:sp>
-      <p:pic>
-        <p:nvPicPr>
-          <p:cNvPr id="3" name="Picture 2" descr="pca_plot.png"/>
-          <p:cNvPicPr>
-            <a:picLocks noChangeAspect="1"/>
-          </p:cNvPicPr>
-          <p:nvPr/>
-        </p:nvPicPr>
-        <p:blipFill>
-          <a:blip r:embed="rId2"/>
-          <a:stretch>
-            <a:fillRect/>
-          </a:stretch>
-        </p:blipFill>
         <p:spPr>
-          <a:xfrm>
-            <a:off x="914400" y="1371600"/>
-            <a:ext cx="5486400" cy="4114800"/>
+          <a:xfrm rot="0">
+            <a:off x="3100388" y="9391174"/>
+            <a:ext cx="12087225" cy="282892"/>
           </a:xfrm>
           <a:prstGeom prst="rect">
             <a:avLst/>
           </a:prstGeom>
         </p:spPr>
-      </p:pic>
-      <p:sp>
-        <p:nvSpPr>
-          <p:cNvPr id="4" name="TextBox 3"/>
-          <p:cNvSpPr txBox="1"/>
-          <p:nvPr/>
-        </p:nvSpPr>
-        <p:spPr>
-          <a:xfrm>
-            <a:off x="457200" y="6217920"/>
-            <a:ext cx="8229600" cy="274320"/>
-          </a:xfrm>
-          <a:prstGeom prst="rect">
-            <a:avLst/>
-          </a:prstGeom>
-          <a:noFill/>
-        </p:spPr>
         <p:txBody>
-          <a:bodyPr wrap="none">
+          <a:bodyPr anchor="t" rtlCol="false" tIns="0" lIns="0" bIns="0" rIns="0">
             <a:spAutoFit/>
           </a:bodyPr>
           <a:lstStyle/>
           <a:p>
-            <a:pPr>
-              <a:defRPr sz="1000">
-                <a:solidFill>
-                  <a:srgbClr val="5A5A5A"/>
-                </a:solidFill>
-              </a:defRPr>
+            <a:pPr algn="l">
+              <a:lnSpc>
+                <a:spcPts val="1800"/>
+              </a:lnSpc>
             </a:pPr>
             <a:r>
+              <a:rPr lang="en-US" sz="1500" spc="-2">
+                <a:solidFill>
+                  <a:srgbClr val="000000"/>
+                </a:solidFill>
+                <a:latin typeface="PT Sans"/>
+                <a:ea typeface="PT Sans"/>
+                <a:cs typeface="PT Sans"/>
+                <a:sym typeface="PT Sans"/>
+              </a:rPr>
               <a:t>Advanced Customer Segmentation | Capstone Project    |    Slide 10</a:t>
             </a:r>
           </a:p>
@@ -3319,137 +3863,440 @@
 </file>
 
 <file path=ppt/slides/slide11.xml><?xml version="1.0" encoding="utf-8"?>
-<p:sld xmlns:a="http://schemas.openxmlformats.org/drawingml/2006/main" xmlns:p="http://schemas.openxmlformats.org/presentationml/2006/main" xmlns:r="http://schemas.openxmlformats.org/officeDocument/2006/relationships">
+<p:sld xmlns:p="http://schemas.openxmlformats.org/presentationml/2006/main" xmlns:a="http://schemas.openxmlformats.org/drawingml/2006/main" xmlns:r="http://schemas.openxmlformats.org/officeDocument/2006/relationships">
   <p:cSld>
+    <p:bg>
+      <p:bgPr>
+        <a:solidFill>
+          <a:srgbClr val="FEF8F5"/>
+        </a:solidFill>
+      </p:bgPr>
+    </p:bg>
     <p:spTree>
       <p:nvGrpSpPr>
         <p:cNvPr id="1" name=""/>
         <p:cNvGrpSpPr/>
         <p:nvPr/>
       </p:nvGrpSpPr>
-      <p:grpSpPr/>
+      <p:grpSpPr>
+        <a:xfrm>
+          <a:off x="0" y="0"/>
+          <a:ext cx="0" cy="0"/>
+          <a:chOff x="0" y="0"/>
+          <a:chExt cx="0" cy="0"/>
+        </a:xfrm>
+      </p:grpSpPr>
+      <p:grpSp>
+        <p:nvGrpSpPr>
+          <p:cNvPr name="Group 2" id="2"/>
+          <p:cNvGrpSpPr/>
+          <p:nvPr/>
+        </p:nvGrpSpPr>
+        <p:grpSpPr>
+          <a:xfrm rot="0">
+            <a:off x="2286002" y="1138428"/>
+            <a:ext cx="3874033" cy="7996428"/>
+            <a:chOff x="0" y="0"/>
+            <a:chExt cx="3673158" cy="7581798"/>
+          </a:xfrm>
+        </p:grpSpPr>
+        <p:sp>
+          <p:nvSpPr>
+            <p:cNvPr name="Freeform 3" id="3"/>
+            <p:cNvSpPr/>
+            <p:nvPr/>
+          </p:nvSpPr>
+          <p:spPr>
+            <a:xfrm flipH="false" flipV="false" rot="0">
+              <a:off x="0" y="0"/>
+              <a:ext cx="3673221" cy="7581773"/>
+            </a:xfrm>
+            <a:custGeom>
+              <a:avLst/>
+              <a:gdLst/>
+              <a:ahLst/>
+              <a:cxnLst/>
+              <a:rect r="r" b="b" t="t" l="l"/>
+              <a:pathLst>
+                <a:path h="7581773" w="3673221">
+                  <a:moveTo>
+                    <a:pt x="0" y="0"/>
+                  </a:moveTo>
+                  <a:lnTo>
+                    <a:pt x="3673221" y="0"/>
+                  </a:lnTo>
+                  <a:lnTo>
+                    <a:pt x="3673221" y="7581773"/>
+                  </a:lnTo>
+                  <a:lnTo>
+                    <a:pt x="0" y="7581773"/>
+                  </a:lnTo>
+                  <a:close/>
+                </a:path>
+              </a:pathLst>
+            </a:custGeom>
+            <a:solidFill>
+              <a:srgbClr val="DFA186"/>
+            </a:solidFill>
+          </p:spPr>
+        </p:sp>
+      </p:grpSp>
+      <p:grpSp>
+        <p:nvGrpSpPr>
+          <p:cNvPr name="Group 4" id="4"/>
+          <p:cNvGrpSpPr/>
+          <p:nvPr/>
+        </p:nvGrpSpPr>
+        <p:grpSpPr>
+          <a:xfrm rot="0">
+            <a:off x="15578853" y="1138428"/>
+            <a:ext cx="432054" cy="7996428"/>
+            <a:chOff x="0" y="0"/>
+            <a:chExt cx="409651" cy="7581798"/>
+          </a:xfrm>
+        </p:grpSpPr>
+        <p:sp>
+          <p:nvSpPr>
+            <p:cNvPr name="Freeform 5" id="5"/>
+            <p:cNvSpPr/>
+            <p:nvPr/>
+          </p:nvSpPr>
+          <p:spPr>
+            <a:xfrm flipH="false" flipV="false" rot="0">
+              <a:off x="0" y="0"/>
+              <a:ext cx="409702" cy="7581773"/>
+            </a:xfrm>
+            <a:custGeom>
+              <a:avLst/>
+              <a:gdLst/>
+              <a:ahLst/>
+              <a:cxnLst/>
+              <a:rect r="r" b="b" t="t" l="l"/>
+              <a:pathLst>
+                <a:path h="7581773" w="409702">
+                  <a:moveTo>
+                    <a:pt x="0" y="0"/>
+                  </a:moveTo>
+                  <a:lnTo>
+                    <a:pt x="409702" y="0"/>
+                  </a:lnTo>
+                  <a:lnTo>
+                    <a:pt x="409702" y="7581773"/>
+                  </a:lnTo>
+                  <a:lnTo>
+                    <a:pt x="0" y="7581773"/>
+                  </a:lnTo>
+                  <a:close/>
+                </a:path>
+              </a:pathLst>
+            </a:custGeom>
+            <a:solidFill>
+              <a:srgbClr val="948A82">
+                <a:alpha val="24706"/>
+              </a:srgbClr>
+            </a:solidFill>
+          </p:spPr>
+        </p:sp>
+      </p:grpSp>
+      <p:grpSp>
+        <p:nvGrpSpPr>
+          <p:cNvPr name="Group 6" id="6"/>
+          <p:cNvGrpSpPr/>
+          <p:nvPr/>
+        </p:nvGrpSpPr>
+        <p:grpSpPr>
+          <a:xfrm rot="0">
+            <a:off x="2570540" y="1685755"/>
+            <a:ext cx="3315923" cy="6901773"/>
+            <a:chOff x="0" y="0"/>
+            <a:chExt cx="3143987" cy="6543904"/>
+          </a:xfrm>
+        </p:grpSpPr>
+        <p:sp>
+          <p:nvSpPr>
+            <p:cNvPr name="Freeform 7" id="7"/>
+            <p:cNvSpPr/>
+            <p:nvPr/>
+          </p:nvSpPr>
+          <p:spPr>
+            <a:xfrm flipH="false" flipV="false" rot="0">
+              <a:off x="0" y="0"/>
+              <a:ext cx="3143982" cy="6543904"/>
+            </a:xfrm>
+            <a:custGeom>
+              <a:avLst/>
+              <a:gdLst/>
+              <a:ahLst/>
+              <a:cxnLst/>
+              <a:rect r="r" b="b" t="t" l="l"/>
+              <a:pathLst>
+                <a:path h="6543904" w="3143982">
+                  <a:moveTo>
+                    <a:pt x="0" y="0"/>
+                  </a:moveTo>
+                  <a:lnTo>
+                    <a:pt x="3143982" y="0"/>
+                  </a:lnTo>
+                  <a:lnTo>
+                    <a:pt x="3143982" y="6543904"/>
+                  </a:lnTo>
+                  <a:lnTo>
+                    <a:pt x="0" y="6543904"/>
+                  </a:lnTo>
+                  <a:close/>
+                </a:path>
+              </a:pathLst>
+            </a:custGeom>
+            <a:blipFill>
+              <a:blip r:embed="rId2">
+                <a:alphaModFix amt="0"/>
+              </a:blip>
+              <a:stretch>
+                <a:fillRect l="-217051" t="0" r="-217051" b="0"/>
+              </a:stretch>
+            </a:blipFill>
+          </p:spPr>
+        </p:sp>
+        <p:sp>
+          <p:nvSpPr>
+            <p:cNvPr name="TextBox 8" id="8"/>
+            <p:cNvSpPr txBox="true"/>
+            <p:nvPr/>
+          </p:nvSpPr>
+          <p:spPr>
+            <a:xfrm>
+              <a:off x="0" y="47625"/>
+              <a:ext cx="3143987" cy="6496279"/>
+            </a:xfrm>
+            <a:prstGeom prst="rect">
+              <a:avLst/>
+            </a:prstGeom>
+          </p:spPr>
+          <p:txBody>
+            <a:bodyPr anchor="ctr" rtlCol="false" tIns="0" lIns="0" bIns="0" rIns="0"/>
+            <a:lstStyle/>
+            <a:p>
+              <a:pPr algn="l">
+                <a:lnSpc>
+                  <a:spcPts val="4860"/>
+                </a:lnSpc>
+              </a:pPr>
+              <a:r>
+                <a:rPr lang="en-US" b="true" sz="4500" spc="-96">
+                  <a:solidFill>
+                    <a:srgbClr val="000000"/>
+                  </a:solidFill>
+                  <a:latin typeface="PT Sans Bold"/>
+                  <a:ea typeface="PT Sans Bold"/>
+                  <a:cs typeface="PT Sans Bold"/>
+                  <a:sym typeface="PT Sans Bold"/>
+                </a:rPr>
+                <a:t>Cluster 0 – Dormant / At-Risk Segment</a:t>
+              </a:r>
+            </a:p>
+          </p:txBody>
+        </p:sp>
+      </p:grpSp>
+      <p:grpSp>
+        <p:nvGrpSpPr>
+          <p:cNvPr name="Group 9" id="9"/>
+          <p:cNvGrpSpPr/>
+          <p:nvPr/>
+        </p:nvGrpSpPr>
+        <p:grpSpPr>
+          <a:xfrm rot="0">
+            <a:off x="6638928" y="1296162"/>
+            <a:ext cx="8229600" cy="7680960"/>
+            <a:chOff x="0" y="0"/>
+            <a:chExt cx="7802880" cy="7282688"/>
+          </a:xfrm>
+        </p:grpSpPr>
+        <p:sp>
+          <p:nvSpPr>
+            <p:cNvPr name="Freeform 10" id="10"/>
+            <p:cNvSpPr/>
+            <p:nvPr/>
+          </p:nvSpPr>
+          <p:spPr>
+            <a:xfrm flipH="false" flipV="false" rot="0">
+              <a:off x="0" y="0"/>
+              <a:ext cx="7802880" cy="7282688"/>
+            </a:xfrm>
+            <a:custGeom>
+              <a:avLst/>
+              <a:gdLst/>
+              <a:ahLst/>
+              <a:cxnLst/>
+              <a:rect r="r" b="b" t="t" l="l"/>
+              <a:pathLst>
+                <a:path h="7282688" w="7802880">
+                  <a:moveTo>
+                    <a:pt x="0" y="0"/>
+                  </a:moveTo>
+                  <a:lnTo>
+                    <a:pt x="7802880" y="0"/>
+                  </a:lnTo>
+                  <a:lnTo>
+                    <a:pt x="7802880" y="7282688"/>
+                  </a:lnTo>
+                  <a:lnTo>
+                    <a:pt x="0" y="7282688"/>
+                  </a:lnTo>
+                  <a:close/>
+                </a:path>
+              </a:pathLst>
+            </a:custGeom>
+            <a:blipFill>
+              <a:blip r:embed="rId2">
+                <a:alphaModFix amt="0"/>
+              </a:blip>
+              <a:stretch>
+                <a:fillRect l="-69749" t="0" r="-69749" b="0"/>
+              </a:stretch>
+            </a:blipFill>
+          </p:spPr>
+        </p:sp>
+        <p:sp>
+          <p:nvSpPr>
+            <p:cNvPr name="TextBox 11" id="11"/>
+            <p:cNvSpPr txBox="true"/>
+            <p:nvPr/>
+          </p:nvSpPr>
+          <p:spPr>
+            <a:xfrm>
+              <a:off x="0" y="28575"/>
+              <a:ext cx="7802880" cy="7254113"/>
+            </a:xfrm>
+            <a:prstGeom prst="rect">
+              <a:avLst/>
+            </a:prstGeom>
+          </p:spPr>
+          <p:txBody>
+            <a:bodyPr anchor="ctr" rtlCol="false" tIns="0" lIns="0" bIns="0" rIns="0"/>
+            <a:lstStyle/>
+            <a:p>
+              <a:pPr algn="l" marL="347472" indent="-173736" lvl="1">
+                <a:lnSpc>
+                  <a:spcPts val="2916"/>
+                </a:lnSpc>
+                <a:buFont typeface="Arial"/>
+                <a:buChar char="•"/>
+              </a:pPr>
+              <a:r>
+                <a:rPr lang="en-US" sz="2700" spc="-3">
+                  <a:solidFill>
+                    <a:srgbClr val="000000"/>
+                  </a:solidFill>
+                  <a:latin typeface="PT Sans"/>
+                  <a:ea typeface="PT Sans"/>
+                  <a:cs typeface="PT Sans"/>
+                  <a:sym typeface="PT Sans"/>
+                </a:rPr>
+                <a:t>High Recency, Low Frequency</a:t>
+              </a:r>
+            </a:p>
+            <a:p>
+              <a:pPr algn="l" marL="1101852" indent="-367284" lvl="2">
+                <a:lnSpc>
+                  <a:spcPts val="2916"/>
+                </a:lnSpc>
+                <a:buFont typeface="Arial"/>
+                <a:buChar char="⚬"/>
+              </a:pPr>
+              <a:r>
+                <a:rPr lang="en-US" sz="2700" spc="-3">
+                  <a:solidFill>
+                    <a:srgbClr val="000000"/>
+                  </a:solidFill>
+                  <a:latin typeface="PT Sans"/>
+                  <a:ea typeface="PT Sans"/>
+                  <a:cs typeface="PT Sans"/>
+                  <a:sym typeface="PT Sans"/>
+                </a:rPr>
+                <a:t>Minimal revenue contribution</a:t>
+              </a:r>
+            </a:p>
+            <a:p>
+              <a:pPr algn="l" marL="1101852" indent="-367284" lvl="2">
+                <a:lnSpc>
+                  <a:spcPts val="2916"/>
+                </a:lnSpc>
+                <a:buFont typeface="Arial"/>
+                <a:buChar char="⚬"/>
+              </a:pPr>
+              <a:r>
+                <a:rPr lang="en-US" sz="2700" spc="-3">
+                  <a:solidFill>
+                    <a:srgbClr val="000000"/>
+                  </a:solidFill>
+                  <a:latin typeface="PT Sans"/>
+                  <a:ea typeface="PT Sans"/>
+                  <a:cs typeface="PT Sans"/>
+                  <a:sym typeface="PT Sans"/>
+                </a:rPr>
+                <a:t>High churn probability</a:t>
+              </a:r>
+            </a:p>
+            <a:p>
+              <a:pPr algn="l" marL="1101852" indent="-367284" lvl="2">
+                <a:lnSpc>
+                  <a:spcPts val="2916"/>
+                </a:lnSpc>
+                <a:buFont typeface="Arial"/>
+                <a:buChar char="⚬"/>
+              </a:pPr>
+              <a:r>
+                <a:rPr lang="en-US" sz="2700" spc="-3">
+                  <a:solidFill>
+                    <a:srgbClr val="000000"/>
+                  </a:solidFill>
+                  <a:latin typeface="PT Sans"/>
+                  <a:ea typeface="PT Sans"/>
+                  <a:cs typeface="PT Sans"/>
+                  <a:sym typeface="PT Sans"/>
+                </a:rPr>
+                <a:t>Strategy: Re-engagement &amp; retention campaigns</a:t>
+              </a:r>
+            </a:p>
+          </p:txBody>
+        </p:sp>
+      </p:grpSp>
       <p:sp>
         <p:nvSpPr>
-          <p:cNvPr id="2" name="Title 1"/>
-          <p:cNvSpPr>
-            <a:spLocks noGrp="1"/>
-          </p:cNvSpPr>
-          <p:nvPr>
-            <p:ph type="title"/>
-          </p:nvPr>
-        </p:nvSpPr>
-        <p:spPr/>
-        <p:txBody>
-          <a:bodyPr/>
-          <a:lstStyle/>
-          <a:p>
-            <a:pPr>
-              <a:defRPr sz="3000" b="1">
-                <a:solidFill>
-                  <a:srgbClr val="203864"/>
-                </a:solidFill>
-              </a:defRPr>
-            </a:pPr>
-            <a:r>
-              <a:t>Cluster 0 – Dormant / At-Risk Segment</a:t>
-            </a:r>
-          </a:p>
-        </p:txBody>
-      </p:sp>
-      <p:sp>
-        <p:nvSpPr>
-          <p:cNvPr id="3" name="Content Placeholder 2"/>
-          <p:cNvSpPr>
-            <a:spLocks noGrp="1"/>
-          </p:cNvSpPr>
-          <p:nvPr>
-            <p:ph idx="1"/>
-          </p:nvPr>
-        </p:nvSpPr>
-        <p:spPr/>
-        <p:txBody>
-          <a:bodyPr/>
-          <a:lstStyle/>
-          <a:p>
-            <a:pPr>
-              <a:defRPr sz="1800">
-                <a:solidFill>
-                  <a:srgbClr val="5A5A5A"/>
-                </a:solidFill>
-              </a:defRPr>
-            </a:pPr>
-            <a:r>
-              <a:t>High Recency, Low Frequency</a:t>
-            </a:r>
-          </a:p>
-          <a:p>
-            <a:pPr lvl="1">
-              <a:defRPr sz="1800">
-                <a:solidFill>
-                  <a:srgbClr val="5A5A5A"/>
-                </a:solidFill>
-              </a:defRPr>
-            </a:pPr>
-            <a:r>
-              <a:t>Minimal revenue contribution</a:t>
-            </a:r>
-          </a:p>
-          <a:p>
-            <a:pPr lvl="1">
-              <a:defRPr sz="1800">
-                <a:solidFill>
-                  <a:srgbClr val="5A5A5A"/>
-                </a:solidFill>
-              </a:defRPr>
-            </a:pPr>
-            <a:r>
-              <a:t>High churn probability</a:t>
-            </a:r>
-          </a:p>
-          <a:p>
-            <a:pPr lvl="1">
-              <a:defRPr sz="1800">
-                <a:solidFill>
-                  <a:srgbClr val="5A5A5A"/>
-                </a:solidFill>
-              </a:defRPr>
-            </a:pPr>
-            <a:r>
-              <a:t>Strategy: Re-engagement &amp; retention campaigns</a:t>
-            </a:r>
-          </a:p>
-        </p:txBody>
-      </p:sp>
-      <p:sp>
-        <p:nvSpPr>
-          <p:cNvPr id="4" name="TextBox 3"/>
-          <p:cNvSpPr txBox="1"/>
+          <p:cNvPr name="TextBox 12" id="12"/>
+          <p:cNvSpPr txBox="true"/>
           <p:nvPr/>
         </p:nvSpPr>
         <p:spPr>
-          <a:xfrm>
-            <a:off x="457200" y="6217920"/>
-            <a:ext cx="8229600" cy="274320"/>
+          <a:xfrm rot="0">
+            <a:off x="3100388" y="9391174"/>
+            <a:ext cx="12087225" cy="282892"/>
           </a:xfrm>
           <a:prstGeom prst="rect">
             <a:avLst/>
           </a:prstGeom>
-          <a:noFill/>
         </p:spPr>
         <p:txBody>
-          <a:bodyPr wrap="none">
+          <a:bodyPr anchor="t" rtlCol="false" tIns="0" lIns="0" bIns="0" rIns="0">
             <a:spAutoFit/>
           </a:bodyPr>
           <a:lstStyle/>
           <a:p>
-            <a:pPr>
-              <a:defRPr sz="1000">
-                <a:solidFill>
-                  <a:srgbClr val="5A5A5A"/>
-                </a:solidFill>
-              </a:defRPr>
+            <a:pPr algn="l">
+              <a:lnSpc>
+                <a:spcPts val="1800"/>
+              </a:lnSpc>
             </a:pPr>
             <a:r>
+              <a:rPr lang="en-US" sz="1500" spc="-2">
+                <a:solidFill>
+                  <a:srgbClr val="000000"/>
+                </a:solidFill>
+                <a:latin typeface="PT Sans"/>
+                <a:ea typeface="PT Sans"/>
+                <a:cs typeface="PT Sans"/>
+                <a:sym typeface="PT Sans"/>
+              </a:rPr>
               <a:t>Advanced Customer Segmentation | Capstone Project    |    Slide 11</a:t>
             </a:r>
           </a:p>
@@ -3464,137 +4311,440 @@
 </file>
 
 <file path=ppt/slides/slide12.xml><?xml version="1.0" encoding="utf-8"?>
-<p:sld xmlns:a="http://schemas.openxmlformats.org/drawingml/2006/main" xmlns:p="http://schemas.openxmlformats.org/presentationml/2006/main" xmlns:r="http://schemas.openxmlformats.org/officeDocument/2006/relationships">
+<p:sld xmlns:p="http://schemas.openxmlformats.org/presentationml/2006/main" xmlns:a="http://schemas.openxmlformats.org/drawingml/2006/main" xmlns:r="http://schemas.openxmlformats.org/officeDocument/2006/relationships">
   <p:cSld>
+    <p:bg>
+      <p:bgPr>
+        <a:solidFill>
+          <a:srgbClr val="FEF8F5"/>
+        </a:solidFill>
+      </p:bgPr>
+    </p:bg>
     <p:spTree>
       <p:nvGrpSpPr>
         <p:cNvPr id="1" name=""/>
         <p:cNvGrpSpPr/>
         <p:nvPr/>
       </p:nvGrpSpPr>
-      <p:grpSpPr/>
+      <p:grpSpPr>
+        <a:xfrm>
+          <a:off x="0" y="0"/>
+          <a:ext cx="0" cy="0"/>
+          <a:chOff x="0" y="0"/>
+          <a:chExt cx="0" cy="0"/>
+        </a:xfrm>
+      </p:grpSpPr>
+      <p:grpSp>
+        <p:nvGrpSpPr>
+          <p:cNvPr name="Group 2" id="2"/>
+          <p:cNvGrpSpPr/>
+          <p:nvPr/>
+        </p:nvGrpSpPr>
+        <p:grpSpPr>
+          <a:xfrm rot="0">
+            <a:off x="2286002" y="1138428"/>
+            <a:ext cx="3874033" cy="7996428"/>
+            <a:chOff x="0" y="0"/>
+            <a:chExt cx="3673158" cy="7581798"/>
+          </a:xfrm>
+        </p:grpSpPr>
+        <p:sp>
+          <p:nvSpPr>
+            <p:cNvPr name="Freeform 3" id="3"/>
+            <p:cNvSpPr/>
+            <p:nvPr/>
+          </p:nvSpPr>
+          <p:spPr>
+            <a:xfrm flipH="false" flipV="false" rot="0">
+              <a:off x="0" y="0"/>
+              <a:ext cx="3673221" cy="7581773"/>
+            </a:xfrm>
+            <a:custGeom>
+              <a:avLst/>
+              <a:gdLst/>
+              <a:ahLst/>
+              <a:cxnLst/>
+              <a:rect r="r" b="b" t="t" l="l"/>
+              <a:pathLst>
+                <a:path h="7581773" w="3673221">
+                  <a:moveTo>
+                    <a:pt x="0" y="0"/>
+                  </a:moveTo>
+                  <a:lnTo>
+                    <a:pt x="3673221" y="0"/>
+                  </a:lnTo>
+                  <a:lnTo>
+                    <a:pt x="3673221" y="7581773"/>
+                  </a:lnTo>
+                  <a:lnTo>
+                    <a:pt x="0" y="7581773"/>
+                  </a:lnTo>
+                  <a:close/>
+                </a:path>
+              </a:pathLst>
+            </a:custGeom>
+            <a:solidFill>
+              <a:srgbClr val="DFA186"/>
+            </a:solidFill>
+          </p:spPr>
+        </p:sp>
+      </p:grpSp>
+      <p:grpSp>
+        <p:nvGrpSpPr>
+          <p:cNvPr name="Group 4" id="4"/>
+          <p:cNvGrpSpPr/>
+          <p:nvPr/>
+        </p:nvGrpSpPr>
+        <p:grpSpPr>
+          <a:xfrm rot="0">
+            <a:off x="15578853" y="1138428"/>
+            <a:ext cx="432054" cy="7996428"/>
+            <a:chOff x="0" y="0"/>
+            <a:chExt cx="409651" cy="7581798"/>
+          </a:xfrm>
+        </p:grpSpPr>
+        <p:sp>
+          <p:nvSpPr>
+            <p:cNvPr name="Freeform 5" id="5"/>
+            <p:cNvSpPr/>
+            <p:nvPr/>
+          </p:nvSpPr>
+          <p:spPr>
+            <a:xfrm flipH="false" flipV="false" rot="0">
+              <a:off x="0" y="0"/>
+              <a:ext cx="409702" cy="7581773"/>
+            </a:xfrm>
+            <a:custGeom>
+              <a:avLst/>
+              <a:gdLst/>
+              <a:ahLst/>
+              <a:cxnLst/>
+              <a:rect r="r" b="b" t="t" l="l"/>
+              <a:pathLst>
+                <a:path h="7581773" w="409702">
+                  <a:moveTo>
+                    <a:pt x="0" y="0"/>
+                  </a:moveTo>
+                  <a:lnTo>
+                    <a:pt x="409702" y="0"/>
+                  </a:lnTo>
+                  <a:lnTo>
+                    <a:pt x="409702" y="7581773"/>
+                  </a:lnTo>
+                  <a:lnTo>
+                    <a:pt x="0" y="7581773"/>
+                  </a:lnTo>
+                  <a:close/>
+                </a:path>
+              </a:pathLst>
+            </a:custGeom>
+            <a:solidFill>
+              <a:srgbClr val="948A82">
+                <a:alpha val="24706"/>
+              </a:srgbClr>
+            </a:solidFill>
+          </p:spPr>
+        </p:sp>
+      </p:grpSp>
+      <p:grpSp>
+        <p:nvGrpSpPr>
+          <p:cNvPr name="Group 6" id="6"/>
+          <p:cNvGrpSpPr/>
+          <p:nvPr/>
+        </p:nvGrpSpPr>
+        <p:grpSpPr>
+          <a:xfrm rot="0">
+            <a:off x="2570540" y="1685755"/>
+            <a:ext cx="3315923" cy="6901773"/>
+            <a:chOff x="0" y="0"/>
+            <a:chExt cx="3143987" cy="6543904"/>
+          </a:xfrm>
+        </p:grpSpPr>
+        <p:sp>
+          <p:nvSpPr>
+            <p:cNvPr name="Freeform 7" id="7"/>
+            <p:cNvSpPr/>
+            <p:nvPr/>
+          </p:nvSpPr>
+          <p:spPr>
+            <a:xfrm flipH="false" flipV="false" rot="0">
+              <a:off x="0" y="0"/>
+              <a:ext cx="3143982" cy="6543904"/>
+            </a:xfrm>
+            <a:custGeom>
+              <a:avLst/>
+              <a:gdLst/>
+              <a:ahLst/>
+              <a:cxnLst/>
+              <a:rect r="r" b="b" t="t" l="l"/>
+              <a:pathLst>
+                <a:path h="6543904" w="3143982">
+                  <a:moveTo>
+                    <a:pt x="0" y="0"/>
+                  </a:moveTo>
+                  <a:lnTo>
+                    <a:pt x="3143982" y="0"/>
+                  </a:lnTo>
+                  <a:lnTo>
+                    <a:pt x="3143982" y="6543904"/>
+                  </a:lnTo>
+                  <a:lnTo>
+                    <a:pt x="0" y="6543904"/>
+                  </a:lnTo>
+                  <a:close/>
+                </a:path>
+              </a:pathLst>
+            </a:custGeom>
+            <a:blipFill>
+              <a:blip r:embed="rId2">
+                <a:alphaModFix amt="0"/>
+              </a:blip>
+              <a:stretch>
+                <a:fillRect l="-217051" t="0" r="-217051" b="0"/>
+              </a:stretch>
+            </a:blipFill>
+          </p:spPr>
+        </p:sp>
+        <p:sp>
+          <p:nvSpPr>
+            <p:cNvPr name="TextBox 8" id="8"/>
+            <p:cNvSpPr txBox="true"/>
+            <p:nvPr/>
+          </p:nvSpPr>
+          <p:spPr>
+            <a:xfrm>
+              <a:off x="0" y="47625"/>
+              <a:ext cx="3143987" cy="6496279"/>
+            </a:xfrm>
+            <a:prstGeom prst="rect">
+              <a:avLst/>
+            </a:prstGeom>
+          </p:spPr>
+          <p:txBody>
+            <a:bodyPr anchor="ctr" rtlCol="false" tIns="0" lIns="0" bIns="0" rIns="0"/>
+            <a:lstStyle/>
+            <a:p>
+              <a:pPr algn="l">
+                <a:lnSpc>
+                  <a:spcPts val="4860"/>
+                </a:lnSpc>
+              </a:pPr>
+              <a:r>
+                <a:rPr lang="en-US" b="true" sz="4500" spc="-96">
+                  <a:solidFill>
+                    <a:srgbClr val="000000"/>
+                  </a:solidFill>
+                  <a:latin typeface="PT Sans Bold"/>
+                  <a:ea typeface="PT Sans Bold"/>
+                  <a:cs typeface="PT Sans Bold"/>
+                  <a:sym typeface="PT Sans Bold"/>
+                </a:rPr>
+                <a:t>Cluster 1 – Premium Loyal Segment</a:t>
+              </a:r>
+            </a:p>
+          </p:txBody>
+        </p:sp>
+      </p:grpSp>
+      <p:grpSp>
+        <p:nvGrpSpPr>
+          <p:cNvPr name="Group 9" id="9"/>
+          <p:cNvGrpSpPr/>
+          <p:nvPr/>
+        </p:nvGrpSpPr>
+        <p:grpSpPr>
+          <a:xfrm rot="0">
+            <a:off x="6638928" y="1296162"/>
+            <a:ext cx="8229600" cy="7680960"/>
+            <a:chOff x="0" y="0"/>
+            <a:chExt cx="7802880" cy="7282688"/>
+          </a:xfrm>
+        </p:grpSpPr>
+        <p:sp>
+          <p:nvSpPr>
+            <p:cNvPr name="Freeform 10" id="10"/>
+            <p:cNvSpPr/>
+            <p:nvPr/>
+          </p:nvSpPr>
+          <p:spPr>
+            <a:xfrm flipH="false" flipV="false" rot="0">
+              <a:off x="0" y="0"/>
+              <a:ext cx="7802880" cy="7282688"/>
+            </a:xfrm>
+            <a:custGeom>
+              <a:avLst/>
+              <a:gdLst/>
+              <a:ahLst/>
+              <a:cxnLst/>
+              <a:rect r="r" b="b" t="t" l="l"/>
+              <a:pathLst>
+                <a:path h="7282688" w="7802880">
+                  <a:moveTo>
+                    <a:pt x="0" y="0"/>
+                  </a:moveTo>
+                  <a:lnTo>
+                    <a:pt x="7802880" y="0"/>
+                  </a:lnTo>
+                  <a:lnTo>
+                    <a:pt x="7802880" y="7282688"/>
+                  </a:lnTo>
+                  <a:lnTo>
+                    <a:pt x="0" y="7282688"/>
+                  </a:lnTo>
+                  <a:close/>
+                </a:path>
+              </a:pathLst>
+            </a:custGeom>
+            <a:blipFill>
+              <a:blip r:embed="rId2">
+                <a:alphaModFix amt="0"/>
+              </a:blip>
+              <a:stretch>
+                <a:fillRect l="-69749" t="0" r="-69749" b="0"/>
+              </a:stretch>
+            </a:blipFill>
+          </p:spPr>
+        </p:sp>
+        <p:sp>
+          <p:nvSpPr>
+            <p:cNvPr name="TextBox 11" id="11"/>
+            <p:cNvSpPr txBox="true"/>
+            <p:nvPr/>
+          </p:nvSpPr>
+          <p:spPr>
+            <a:xfrm>
+              <a:off x="0" y="28575"/>
+              <a:ext cx="7802880" cy="7254113"/>
+            </a:xfrm>
+            <a:prstGeom prst="rect">
+              <a:avLst/>
+            </a:prstGeom>
+          </p:spPr>
+          <p:txBody>
+            <a:bodyPr anchor="ctr" rtlCol="false" tIns="0" lIns="0" bIns="0" rIns="0"/>
+            <a:lstStyle/>
+            <a:p>
+              <a:pPr algn="l" marL="347472" indent="-173736" lvl="1">
+                <a:lnSpc>
+                  <a:spcPts val="2916"/>
+                </a:lnSpc>
+                <a:buFont typeface="Arial"/>
+                <a:buChar char="•"/>
+              </a:pPr>
+              <a:r>
+                <a:rPr lang="en-US" sz="2700" spc="-3">
+                  <a:solidFill>
+                    <a:srgbClr val="000000"/>
+                  </a:solidFill>
+                  <a:latin typeface="PT Sans"/>
+                  <a:ea typeface="PT Sans"/>
+                  <a:cs typeface="PT Sans"/>
+                  <a:sym typeface="PT Sans"/>
+                </a:rPr>
+                <a:t>Low Recency, High Frequency</a:t>
+              </a:r>
+            </a:p>
+            <a:p>
+              <a:pPr algn="l" marL="1101852" indent="-367284" lvl="2">
+                <a:lnSpc>
+                  <a:spcPts val="2916"/>
+                </a:lnSpc>
+                <a:buFont typeface="Arial"/>
+                <a:buChar char="⚬"/>
+              </a:pPr>
+              <a:r>
+                <a:rPr lang="en-US" sz="2700" spc="-3">
+                  <a:solidFill>
+                    <a:srgbClr val="000000"/>
+                  </a:solidFill>
+                  <a:latin typeface="PT Sans"/>
+                  <a:ea typeface="PT Sans"/>
+                  <a:cs typeface="PT Sans"/>
+                  <a:sym typeface="PT Sans"/>
+                </a:rPr>
+                <a:t>Highest revenue contribution</a:t>
+              </a:r>
+            </a:p>
+            <a:p>
+              <a:pPr algn="l" marL="1101852" indent="-367284" lvl="2">
+                <a:lnSpc>
+                  <a:spcPts val="2916"/>
+                </a:lnSpc>
+                <a:buFont typeface="Arial"/>
+                <a:buChar char="⚬"/>
+              </a:pPr>
+              <a:r>
+                <a:rPr lang="en-US" sz="2700" spc="-3">
+                  <a:solidFill>
+                    <a:srgbClr val="000000"/>
+                  </a:solidFill>
+                  <a:latin typeface="PT Sans"/>
+                  <a:ea typeface="PT Sans"/>
+                  <a:cs typeface="PT Sans"/>
+                  <a:sym typeface="PT Sans"/>
+                </a:rPr>
+                <a:t>Core customer base</a:t>
+              </a:r>
+            </a:p>
+            <a:p>
+              <a:pPr algn="l" marL="1101852" indent="-367284" lvl="2">
+                <a:lnSpc>
+                  <a:spcPts val="2916"/>
+                </a:lnSpc>
+                <a:buFont typeface="Arial"/>
+                <a:buChar char="⚬"/>
+              </a:pPr>
+              <a:r>
+                <a:rPr lang="en-US" sz="2700" spc="-3">
+                  <a:solidFill>
+                    <a:srgbClr val="000000"/>
+                  </a:solidFill>
+                  <a:latin typeface="PT Sans"/>
+                  <a:ea typeface="PT Sans"/>
+                  <a:cs typeface="PT Sans"/>
+                  <a:sym typeface="PT Sans"/>
+                </a:rPr>
+                <a:t>Strategy: Loyalty programs &amp; exclusive offers</a:t>
+              </a:r>
+            </a:p>
+          </p:txBody>
+        </p:sp>
+      </p:grpSp>
       <p:sp>
         <p:nvSpPr>
-          <p:cNvPr id="2" name="Title 1"/>
-          <p:cNvSpPr>
-            <a:spLocks noGrp="1"/>
-          </p:cNvSpPr>
-          <p:nvPr>
-            <p:ph type="title"/>
-          </p:nvPr>
-        </p:nvSpPr>
-        <p:spPr/>
-        <p:txBody>
-          <a:bodyPr/>
-          <a:lstStyle/>
-          <a:p>
-            <a:pPr>
-              <a:defRPr sz="3000" b="1">
-                <a:solidFill>
-                  <a:srgbClr val="203864"/>
-                </a:solidFill>
-              </a:defRPr>
-            </a:pPr>
-            <a:r>
-              <a:t>Cluster 1 – Premium Loyal Segment</a:t>
-            </a:r>
-          </a:p>
-        </p:txBody>
-      </p:sp>
-      <p:sp>
-        <p:nvSpPr>
-          <p:cNvPr id="3" name="Content Placeholder 2"/>
-          <p:cNvSpPr>
-            <a:spLocks noGrp="1"/>
-          </p:cNvSpPr>
-          <p:nvPr>
-            <p:ph idx="1"/>
-          </p:nvPr>
-        </p:nvSpPr>
-        <p:spPr/>
-        <p:txBody>
-          <a:bodyPr/>
-          <a:lstStyle/>
-          <a:p>
-            <a:pPr>
-              <a:defRPr sz="1800">
-                <a:solidFill>
-                  <a:srgbClr val="5A5A5A"/>
-                </a:solidFill>
-              </a:defRPr>
-            </a:pPr>
-            <a:r>
-              <a:t>Low Recency, High Frequency</a:t>
-            </a:r>
-          </a:p>
-          <a:p>
-            <a:pPr lvl="1">
-              <a:defRPr sz="1800">
-                <a:solidFill>
-                  <a:srgbClr val="5A5A5A"/>
-                </a:solidFill>
-              </a:defRPr>
-            </a:pPr>
-            <a:r>
-              <a:t>Highest revenue contribution</a:t>
-            </a:r>
-          </a:p>
-          <a:p>
-            <a:pPr lvl="1">
-              <a:defRPr sz="1800">
-                <a:solidFill>
-                  <a:srgbClr val="5A5A5A"/>
-                </a:solidFill>
-              </a:defRPr>
-            </a:pPr>
-            <a:r>
-              <a:t>Core customer base</a:t>
-            </a:r>
-          </a:p>
-          <a:p>
-            <a:pPr lvl="1">
-              <a:defRPr sz="1800">
-                <a:solidFill>
-                  <a:srgbClr val="5A5A5A"/>
-                </a:solidFill>
-              </a:defRPr>
-            </a:pPr>
-            <a:r>
-              <a:t>Strategy: Loyalty programs &amp; exclusive offers</a:t>
-            </a:r>
-          </a:p>
-        </p:txBody>
-      </p:sp>
-      <p:sp>
-        <p:nvSpPr>
-          <p:cNvPr id="4" name="TextBox 3"/>
-          <p:cNvSpPr txBox="1"/>
+          <p:cNvPr name="TextBox 12" id="12"/>
+          <p:cNvSpPr txBox="true"/>
           <p:nvPr/>
         </p:nvSpPr>
         <p:spPr>
-          <a:xfrm>
-            <a:off x="457200" y="6217920"/>
-            <a:ext cx="8229600" cy="274320"/>
+          <a:xfrm rot="0">
+            <a:off x="3100388" y="9391174"/>
+            <a:ext cx="12087225" cy="282892"/>
           </a:xfrm>
           <a:prstGeom prst="rect">
             <a:avLst/>
           </a:prstGeom>
-          <a:noFill/>
         </p:spPr>
         <p:txBody>
-          <a:bodyPr wrap="none">
+          <a:bodyPr anchor="t" rtlCol="false" tIns="0" lIns="0" bIns="0" rIns="0">
             <a:spAutoFit/>
           </a:bodyPr>
           <a:lstStyle/>
           <a:p>
-            <a:pPr>
-              <a:defRPr sz="1000">
-                <a:solidFill>
-                  <a:srgbClr val="5A5A5A"/>
-                </a:solidFill>
-              </a:defRPr>
+            <a:pPr algn="l">
+              <a:lnSpc>
+                <a:spcPts val="1800"/>
+              </a:lnSpc>
             </a:pPr>
             <a:r>
+              <a:rPr lang="en-US" sz="1500" spc="-2">
+                <a:solidFill>
+                  <a:srgbClr val="000000"/>
+                </a:solidFill>
+                <a:latin typeface="PT Sans"/>
+                <a:ea typeface="PT Sans"/>
+                <a:cs typeface="PT Sans"/>
+                <a:sym typeface="PT Sans"/>
+              </a:rPr>
               <a:t>Advanced Customer Segmentation | Capstone Project    |    Slide 12</a:t>
             </a:r>
           </a:p>
@@ -3609,137 +4759,440 @@
 </file>
 
 <file path=ppt/slides/slide13.xml><?xml version="1.0" encoding="utf-8"?>
-<p:sld xmlns:a="http://schemas.openxmlformats.org/drawingml/2006/main" xmlns:p="http://schemas.openxmlformats.org/presentationml/2006/main" xmlns:r="http://schemas.openxmlformats.org/officeDocument/2006/relationships">
+<p:sld xmlns:p="http://schemas.openxmlformats.org/presentationml/2006/main" xmlns:a="http://schemas.openxmlformats.org/drawingml/2006/main" xmlns:r="http://schemas.openxmlformats.org/officeDocument/2006/relationships">
   <p:cSld>
+    <p:bg>
+      <p:bgPr>
+        <a:solidFill>
+          <a:srgbClr val="FEF8F5"/>
+        </a:solidFill>
+      </p:bgPr>
+    </p:bg>
     <p:spTree>
       <p:nvGrpSpPr>
         <p:cNvPr id="1" name=""/>
         <p:cNvGrpSpPr/>
         <p:nvPr/>
       </p:nvGrpSpPr>
-      <p:grpSpPr/>
+      <p:grpSpPr>
+        <a:xfrm>
+          <a:off x="0" y="0"/>
+          <a:ext cx="0" cy="0"/>
+          <a:chOff x="0" y="0"/>
+          <a:chExt cx="0" cy="0"/>
+        </a:xfrm>
+      </p:grpSpPr>
+      <p:grpSp>
+        <p:nvGrpSpPr>
+          <p:cNvPr name="Group 2" id="2"/>
+          <p:cNvGrpSpPr/>
+          <p:nvPr/>
+        </p:nvGrpSpPr>
+        <p:grpSpPr>
+          <a:xfrm rot="0">
+            <a:off x="2286002" y="1138428"/>
+            <a:ext cx="3874033" cy="7996428"/>
+            <a:chOff x="0" y="0"/>
+            <a:chExt cx="3673158" cy="7581798"/>
+          </a:xfrm>
+        </p:grpSpPr>
+        <p:sp>
+          <p:nvSpPr>
+            <p:cNvPr name="Freeform 3" id="3"/>
+            <p:cNvSpPr/>
+            <p:nvPr/>
+          </p:nvSpPr>
+          <p:spPr>
+            <a:xfrm flipH="false" flipV="false" rot="0">
+              <a:off x="0" y="0"/>
+              <a:ext cx="3673221" cy="7581773"/>
+            </a:xfrm>
+            <a:custGeom>
+              <a:avLst/>
+              <a:gdLst/>
+              <a:ahLst/>
+              <a:cxnLst/>
+              <a:rect r="r" b="b" t="t" l="l"/>
+              <a:pathLst>
+                <a:path h="7581773" w="3673221">
+                  <a:moveTo>
+                    <a:pt x="0" y="0"/>
+                  </a:moveTo>
+                  <a:lnTo>
+                    <a:pt x="3673221" y="0"/>
+                  </a:lnTo>
+                  <a:lnTo>
+                    <a:pt x="3673221" y="7581773"/>
+                  </a:lnTo>
+                  <a:lnTo>
+                    <a:pt x="0" y="7581773"/>
+                  </a:lnTo>
+                  <a:close/>
+                </a:path>
+              </a:pathLst>
+            </a:custGeom>
+            <a:solidFill>
+              <a:srgbClr val="DFA186"/>
+            </a:solidFill>
+          </p:spPr>
+        </p:sp>
+      </p:grpSp>
+      <p:grpSp>
+        <p:nvGrpSpPr>
+          <p:cNvPr name="Group 4" id="4"/>
+          <p:cNvGrpSpPr/>
+          <p:nvPr/>
+        </p:nvGrpSpPr>
+        <p:grpSpPr>
+          <a:xfrm rot="0">
+            <a:off x="15578853" y="1138428"/>
+            <a:ext cx="432054" cy="7996428"/>
+            <a:chOff x="0" y="0"/>
+            <a:chExt cx="409651" cy="7581798"/>
+          </a:xfrm>
+        </p:grpSpPr>
+        <p:sp>
+          <p:nvSpPr>
+            <p:cNvPr name="Freeform 5" id="5"/>
+            <p:cNvSpPr/>
+            <p:nvPr/>
+          </p:nvSpPr>
+          <p:spPr>
+            <a:xfrm flipH="false" flipV="false" rot="0">
+              <a:off x="0" y="0"/>
+              <a:ext cx="409702" cy="7581773"/>
+            </a:xfrm>
+            <a:custGeom>
+              <a:avLst/>
+              <a:gdLst/>
+              <a:ahLst/>
+              <a:cxnLst/>
+              <a:rect r="r" b="b" t="t" l="l"/>
+              <a:pathLst>
+                <a:path h="7581773" w="409702">
+                  <a:moveTo>
+                    <a:pt x="0" y="0"/>
+                  </a:moveTo>
+                  <a:lnTo>
+                    <a:pt x="409702" y="0"/>
+                  </a:lnTo>
+                  <a:lnTo>
+                    <a:pt x="409702" y="7581773"/>
+                  </a:lnTo>
+                  <a:lnTo>
+                    <a:pt x="0" y="7581773"/>
+                  </a:lnTo>
+                  <a:close/>
+                </a:path>
+              </a:pathLst>
+            </a:custGeom>
+            <a:solidFill>
+              <a:srgbClr val="948A82">
+                <a:alpha val="24706"/>
+              </a:srgbClr>
+            </a:solidFill>
+          </p:spPr>
+        </p:sp>
+      </p:grpSp>
+      <p:grpSp>
+        <p:nvGrpSpPr>
+          <p:cNvPr name="Group 6" id="6"/>
+          <p:cNvGrpSpPr/>
+          <p:nvPr/>
+        </p:nvGrpSpPr>
+        <p:grpSpPr>
+          <a:xfrm rot="0">
+            <a:off x="2570540" y="1685755"/>
+            <a:ext cx="3315923" cy="6901773"/>
+            <a:chOff x="0" y="0"/>
+            <a:chExt cx="3143987" cy="6543904"/>
+          </a:xfrm>
+        </p:grpSpPr>
+        <p:sp>
+          <p:nvSpPr>
+            <p:cNvPr name="Freeform 7" id="7"/>
+            <p:cNvSpPr/>
+            <p:nvPr/>
+          </p:nvSpPr>
+          <p:spPr>
+            <a:xfrm flipH="false" flipV="false" rot="0">
+              <a:off x="0" y="0"/>
+              <a:ext cx="3143982" cy="6543904"/>
+            </a:xfrm>
+            <a:custGeom>
+              <a:avLst/>
+              <a:gdLst/>
+              <a:ahLst/>
+              <a:cxnLst/>
+              <a:rect r="r" b="b" t="t" l="l"/>
+              <a:pathLst>
+                <a:path h="6543904" w="3143982">
+                  <a:moveTo>
+                    <a:pt x="0" y="0"/>
+                  </a:moveTo>
+                  <a:lnTo>
+                    <a:pt x="3143982" y="0"/>
+                  </a:lnTo>
+                  <a:lnTo>
+                    <a:pt x="3143982" y="6543904"/>
+                  </a:lnTo>
+                  <a:lnTo>
+                    <a:pt x="0" y="6543904"/>
+                  </a:lnTo>
+                  <a:close/>
+                </a:path>
+              </a:pathLst>
+            </a:custGeom>
+            <a:blipFill>
+              <a:blip r:embed="rId2">
+                <a:alphaModFix amt="0"/>
+              </a:blip>
+              <a:stretch>
+                <a:fillRect l="-217051" t="0" r="-217051" b="0"/>
+              </a:stretch>
+            </a:blipFill>
+          </p:spPr>
+        </p:sp>
+        <p:sp>
+          <p:nvSpPr>
+            <p:cNvPr name="TextBox 8" id="8"/>
+            <p:cNvSpPr txBox="true"/>
+            <p:nvPr/>
+          </p:nvSpPr>
+          <p:spPr>
+            <a:xfrm>
+              <a:off x="0" y="47625"/>
+              <a:ext cx="3143987" cy="6496279"/>
+            </a:xfrm>
+            <a:prstGeom prst="rect">
+              <a:avLst/>
+            </a:prstGeom>
+          </p:spPr>
+          <p:txBody>
+            <a:bodyPr anchor="ctr" rtlCol="false" tIns="0" lIns="0" bIns="0" rIns="0"/>
+            <a:lstStyle/>
+            <a:p>
+              <a:pPr algn="l">
+                <a:lnSpc>
+                  <a:spcPts val="4860"/>
+                </a:lnSpc>
+              </a:pPr>
+              <a:r>
+                <a:rPr lang="en-US" b="true" sz="4500" spc="-96">
+                  <a:solidFill>
+                    <a:srgbClr val="000000"/>
+                  </a:solidFill>
+                  <a:latin typeface="PT Sans Bold"/>
+                  <a:ea typeface="PT Sans Bold"/>
+                  <a:cs typeface="PT Sans Bold"/>
+                  <a:sym typeface="PT Sans Bold"/>
+                </a:rPr>
+                <a:t>Cluster 2 – Mid-Tier Growth Segment</a:t>
+              </a:r>
+            </a:p>
+          </p:txBody>
+        </p:sp>
+      </p:grpSp>
+      <p:grpSp>
+        <p:nvGrpSpPr>
+          <p:cNvPr name="Group 9" id="9"/>
+          <p:cNvGrpSpPr/>
+          <p:nvPr/>
+        </p:nvGrpSpPr>
+        <p:grpSpPr>
+          <a:xfrm rot="0">
+            <a:off x="6638928" y="1296162"/>
+            <a:ext cx="8229600" cy="7680960"/>
+            <a:chOff x="0" y="0"/>
+            <a:chExt cx="7802880" cy="7282688"/>
+          </a:xfrm>
+        </p:grpSpPr>
+        <p:sp>
+          <p:nvSpPr>
+            <p:cNvPr name="Freeform 10" id="10"/>
+            <p:cNvSpPr/>
+            <p:nvPr/>
+          </p:nvSpPr>
+          <p:spPr>
+            <a:xfrm flipH="false" flipV="false" rot="0">
+              <a:off x="0" y="0"/>
+              <a:ext cx="7802880" cy="7282688"/>
+            </a:xfrm>
+            <a:custGeom>
+              <a:avLst/>
+              <a:gdLst/>
+              <a:ahLst/>
+              <a:cxnLst/>
+              <a:rect r="r" b="b" t="t" l="l"/>
+              <a:pathLst>
+                <a:path h="7282688" w="7802880">
+                  <a:moveTo>
+                    <a:pt x="0" y="0"/>
+                  </a:moveTo>
+                  <a:lnTo>
+                    <a:pt x="7802880" y="0"/>
+                  </a:lnTo>
+                  <a:lnTo>
+                    <a:pt x="7802880" y="7282688"/>
+                  </a:lnTo>
+                  <a:lnTo>
+                    <a:pt x="0" y="7282688"/>
+                  </a:lnTo>
+                  <a:close/>
+                </a:path>
+              </a:pathLst>
+            </a:custGeom>
+            <a:blipFill>
+              <a:blip r:embed="rId2">
+                <a:alphaModFix amt="0"/>
+              </a:blip>
+              <a:stretch>
+                <a:fillRect l="-69749" t="0" r="-69749" b="0"/>
+              </a:stretch>
+            </a:blipFill>
+          </p:spPr>
+        </p:sp>
+        <p:sp>
+          <p:nvSpPr>
+            <p:cNvPr name="TextBox 11" id="11"/>
+            <p:cNvSpPr txBox="true"/>
+            <p:nvPr/>
+          </p:nvSpPr>
+          <p:spPr>
+            <a:xfrm>
+              <a:off x="0" y="28575"/>
+              <a:ext cx="7802880" cy="7254113"/>
+            </a:xfrm>
+            <a:prstGeom prst="rect">
+              <a:avLst/>
+            </a:prstGeom>
+          </p:spPr>
+          <p:txBody>
+            <a:bodyPr anchor="ctr" rtlCol="false" tIns="0" lIns="0" bIns="0" rIns="0"/>
+            <a:lstStyle/>
+            <a:p>
+              <a:pPr algn="l" marL="347472" indent="-173736" lvl="1">
+                <a:lnSpc>
+                  <a:spcPts val="2916"/>
+                </a:lnSpc>
+                <a:buFont typeface="Arial"/>
+                <a:buChar char="•"/>
+              </a:pPr>
+              <a:r>
+                <a:rPr lang="en-US" sz="2700" spc="-3">
+                  <a:solidFill>
+                    <a:srgbClr val="000000"/>
+                  </a:solidFill>
+                  <a:latin typeface="PT Sans"/>
+                  <a:ea typeface="PT Sans"/>
+                  <a:cs typeface="PT Sans"/>
+                  <a:sym typeface="PT Sans"/>
+                </a:rPr>
+                <a:t>Moderate purchasing behavior</a:t>
+              </a:r>
+            </a:p>
+            <a:p>
+              <a:pPr algn="l" marL="1101852" indent="-367284" lvl="2">
+                <a:lnSpc>
+                  <a:spcPts val="2916"/>
+                </a:lnSpc>
+                <a:buFont typeface="Arial"/>
+                <a:buChar char="⚬"/>
+              </a:pPr>
+              <a:r>
+                <a:rPr lang="en-US" sz="2700" spc="-3">
+                  <a:solidFill>
+                    <a:srgbClr val="000000"/>
+                  </a:solidFill>
+                  <a:latin typeface="PT Sans"/>
+                  <a:ea typeface="PT Sans"/>
+                  <a:cs typeface="PT Sans"/>
+                  <a:sym typeface="PT Sans"/>
+                </a:rPr>
+                <a:t>Stable revenue contribution</a:t>
+              </a:r>
+            </a:p>
+            <a:p>
+              <a:pPr algn="l" marL="1101852" indent="-367284" lvl="2">
+                <a:lnSpc>
+                  <a:spcPts val="2916"/>
+                </a:lnSpc>
+                <a:buFont typeface="Arial"/>
+                <a:buChar char="⚬"/>
+              </a:pPr>
+              <a:r>
+                <a:rPr lang="en-US" sz="2700" spc="-3">
+                  <a:solidFill>
+                    <a:srgbClr val="000000"/>
+                  </a:solidFill>
+                  <a:latin typeface="PT Sans"/>
+                  <a:ea typeface="PT Sans"/>
+                  <a:cs typeface="PT Sans"/>
+                  <a:sym typeface="PT Sans"/>
+                </a:rPr>
+                <a:t>Upselling opportunity</a:t>
+              </a:r>
+            </a:p>
+            <a:p>
+              <a:pPr algn="l" marL="1101852" indent="-367284" lvl="2">
+                <a:lnSpc>
+                  <a:spcPts val="2916"/>
+                </a:lnSpc>
+                <a:buFont typeface="Arial"/>
+                <a:buChar char="⚬"/>
+              </a:pPr>
+              <a:r>
+                <a:rPr lang="en-US" sz="2700" spc="-3">
+                  <a:solidFill>
+                    <a:srgbClr val="000000"/>
+                  </a:solidFill>
+                  <a:latin typeface="PT Sans"/>
+                  <a:ea typeface="PT Sans"/>
+                  <a:cs typeface="PT Sans"/>
+                  <a:sym typeface="PT Sans"/>
+                </a:rPr>
+                <a:t>Strategy: Cross-sell &amp; personalization</a:t>
+              </a:r>
+            </a:p>
+          </p:txBody>
+        </p:sp>
+      </p:grpSp>
       <p:sp>
         <p:nvSpPr>
-          <p:cNvPr id="2" name="Title 1"/>
-          <p:cNvSpPr>
-            <a:spLocks noGrp="1"/>
-          </p:cNvSpPr>
-          <p:nvPr>
-            <p:ph type="title"/>
-          </p:nvPr>
-        </p:nvSpPr>
-        <p:spPr/>
-        <p:txBody>
-          <a:bodyPr/>
-          <a:lstStyle/>
-          <a:p>
-            <a:pPr>
-              <a:defRPr sz="3000" b="1">
-                <a:solidFill>
-                  <a:srgbClr val="203864"/>
-                </a:solidFill>
-              </a:defRPr>
-            </a:pPr>
-            <a:r>
-              <a:t>Cluster 2 – Mid-Tier Growth Segment</a:t>
-            </a:r>
-          </a:p>
-        </p:txBody>
-      </p:sp>
-      <p:sp>
-        <p:nvSpPr>
-          <p:cNvPr id="3" name="Content Placeholder 2"/>
-          <p:cNvSpPr>
-            <a:spLocks noGrp="1"/>
-          </p:cNvSpPr>
-          <p:nvPr>
-            <p:ph idx="1"/>
-          </p:nvPr>
-        </p:nvSpPr>
-        <p:spPr/>
-        <p:txBody>
-          <a:bodyPr/>
-          <a:lstStyle/>
-          <a:p>
-            <a:pPr>
-              <a:defRPr sz="1800">
-                <a:solidFill>
-                  <a:srgbClr val="5A5A5A"/>
-                </a:solidFill>
-              </a:defRPr>
-            </a:pPr>
-            <a:r>
-              <a:t>Moderate purchasing behavior</a:t>
-            </a:r>
-          </a:p>
-          <a:p>
-            <a:pPr lvl="1">
-              <a:defRPr sz="1800">
-                <a:solidFill>
-                  <a:srgbClr val="5A5A5A"/>
-                </a:solidFill>
-              </a:defRPr>
-            </a:pPr>
-            <a:r>
-              <a:t>Stable revenue contribution</a:t>
-            </a:r>
-          </a:p>
-          <a:p>
-            <a:pPr lvl="1">
-              <a:defRPr sz="1800">
-                <a:solidFill>
-                  <a:srgbClr val="5A5A5A"/>
-                </a:solidFill>
-              </a:defRPr>
-            </a:pPr>
-            <a:r>
-              <a:t>Upselling opportunity</a:t>
-            </a:r>
-          </a:p>
-          <a:p>
-            <a:pPr lvl="1">
-              <a:defRPr sz="1800">
-                <a:solidFill>
-                  <a:srgbClr val="5A5A5A"/>
-                </a:solidFill>
-              </a:defRPr>
-            </a:pPr>
-            <a:r>
-              <a:t>Strategy: Cross-sell &amp; personalization</a:t>
-            </a:r>
-          </a:p>
-        </p:txBody>
-      </p:sp>
-      <p:sp>
-        <p:nvSpPr>
-          <p:cNvPr id="4" name="TextBox 3"/>
-          <p:cNvSpPr txBox="1"/>
+          <p:cNvPr name="TextBox 12" id="12"/>
+          <p:cNvSpPr txBox="true"/>
           <p:nvPr/>
         </p:nvSpPr>
         <p:spPr>
-          <a:xfrm>
-            <a:off x="457200" y="6217920"/>
-            <a:ext cx="8229600" cy="274320"/>
+          <a:xfrm rot="0">
+            <a:off x="3100388" y="9391174"/>
+            <a:ext cx="12087225" cy="282892"/>
           </a:xfrm>
           <a:prstGeom prst="rect">
             <a:avLst/>
           </a:prstGeom>
-          <a:noFill/>
         </p:spPr>
         <p:txBody>
-          <a:bodyPr wrap="none">
+          <a:bodyPr anchor="t" rtlCol="false" tIns="0" lIns="0" bIns="0" rIns="0">
             <a:spAutoFit/>
           </a:bodyPr>
           <a:lstStyle/>
           <a:p>
-            <a:pPr>
-              <a:defRPr sz="1000">
-                <a:solidFill>
-                  <a:srgbClr val="5A5A5A"/>
-                </a:solidFill>
-              </a:defRPr>
+            <a:pPr algn="l">
+              <a:lnSpc>
+                <a:spcPts val="1800"/>
+              </a:lnSpc>
             </a:pPr>
             <a:r>
+              <a:rPr lang="en-US" sz="1500" spc="-2">
+                <a:solidFill>
+                  <a:srgbClr val="000000"/>
+                </a:solidFill>
+                <a:latin typeface="PT Sans"/>
+                <a:ea typeface="PT Sans"/>
+                <a:cs typeface="PT Sans"/>
+                <a:sym typeface="PT Sans"/>
+              </a:rPr>
               <a:t>Advanced Customer Segmentation | Capstone Project    |    Slide 13</a:t>
             </a:r>
           </a:p>
@@ -3754,137 +5207,440 @@
 </file>
 
 <file path=ppt/slides/slide14.xml><?xml version="1.0" encoding="utf-8"?>
-<p:sld xmlns:a="http://schemas.openxmlformats.org/drawingml/2006/main" xmlns:p="http://schemas.openxmlformats.org/presentationml/2006/main" xmlns:r="http://schemas.openxmlformats.org/officeDocument/2006/relationships">
+<p:sld xmlns:p="http://schemas.openxmlformats.org/presentationml/2006/main" xmlns:a="http://schemas.openxmlformats.org/drawingml/2006/main" xmlns:r="http://schemas.openxmlformats.org/officeDocument/2006/relationships">
   <p:cSld>
+    <p:bg>
+      <p:bgPr>
+        <a:solidFill>
+          <a:srgbClr val="FEF8F5"/>
+        </a:solidFill>
+      </p:bgPr>
+    </p:bg>
     <p:spTree>
       <p:nvGrpSpPr>
         <p:cNvPr id="1" name=""/>
         <p:cNvGrpSpPr/>
         <p:nvPr/>
       </p:nvGrpSpPr>
-      <p:grpSpPr/>
+      <p:grpSpPr>
+        <a:xfrm>
+          <a:off x="0" y="0"/>
+          <a:ext cx="0" cy="0"/>
+          <a:chOff x="0" y="0"/>
+          <a:chExt cx="0" cy="0"/>
+        </a:xfrm>
+      </p:grpSpPr>
+      <p:grpSp>
+        <p:nvGrpSpPr>
+          <p:cNvPr name="Group 2" id="2"/>
+          <p:cNvGrpSpPr/>
+          <p:nvPr/>
+        </p:nvGrpSpPr>
+        <p:grpSpPr>
+          <a:xfrm rot="0">
+            <a:off x="2286002" y="1138428"/>
+            <a:ext cx="3874033" cy="7996428"/>
+            <a:chOff x="0" y="0"/>
+            <a:chExt cx="3673158" cy="7581798"/>
+          </a:xfrm>
+        </p:grpSpPr>
+        <p:sp>
+          <p:nvSpPr>
+            <p:cNvPr name="Freeform 3" id="3"/>
+            <p:cNvSpPr/>
+            <p:nvPr/>
+          </p:nvSpPr>
+          <p:spPr>
+            <a:xfrm flipH="false" flipV="false" rot="0">
+              <a:off x="0" y="0"/>
+              <a:ext cx="3673221" cy="7581773"/>
+            </a:xfrm>
+            <a:custGeom>
+              <a:avLst/>
+              <a:gdLst/>
+              <a:ahLst/>
+              <a:cxnLst/>
+              <a:rect r="r" b="b" t="t" l="l"/>
+              <a:pathLst>
+                <a:path h="7581773" w="3673221">
+                  <a:moveTo>
+                    <a:pt x="0" y="0"/>
+                  </a:moveTo>
+                  <a:lnTo>
+                    <a:pt x="3673221" y="0"/>
+                  </a:lnTo>
+                  <a:lnTo>
+                    <a:pt x="3673221" y="7581773"/>
+                  </a:lnTo>
+                  <a:lnTo>
+                    <a:pt x="0" y="7581773"/>
+                  </a:lnTo>
+                  <a:close/>
+                </a:path>
+              </a:pathLst>
+            </a:custGeom>
+            <a:solidFill>
+              <a:srgbClr val="DFA186"/>
+            </a:solidFill>
+          </p:spPr>
+        </p:sp>
+      </p:grpSp>
+      <p:grpSp>
+        <p:nvGrpSpPr>
+          <p:cNvPr name="Group 4" id="4"/>
+          <p:cNvGrpSpPr/>
+          <p:nvPr/>
+        </p:nvGrpSpPr>
+        <p:grpSpPr>
+          <a:xfrm rot="0">
+            <a:off x="15578853" y="1138428"/>
+            <a:ext cx="432054" cy="7996428"/>
+            <a:chOff x="0" y="0"/>
+            <a:chExt cx="409651" cy="7581798"/>
+          </a:xfrm>
+        </p:grpSpPr>
+        <p:sp>
+          <p:nvSpPr>
+            <p:cNvPr name="Freeform 5" id="5"/>
+            <p:cNvSpPr/>
+            <p:nvPr/>
+          </p:nvSpPr>
+          <p:spPr>
+            <a:xfrm flipH="false" flipV="false" rot="0">
+              <a:off x="0" y="0"/>
+              <a:ext cx="409702" cy="7581773"/>
+            </a:xfrm>
+            <a:custGeom>
+              <a:avLst/>
+              <a:gdLst/>
+              <a:ahLst/>
+              <a:cxnLst/>
+              <a:rect r="r" b="b" t="t" l="l"/>
+              <a:pathLst>
+                <a:path h="7581773" w="409702">
+                  <a:moveTo>
+                    <a:pt x="0" y="0"/>
+                  </a:moveTo>
+                  <a:lnTo>
+                    <a:pt x="409702" y="0"/>
+                  </a:lnTo>
+                  <a:lnTo>
+                    <a:pt x="409702" y="7581773"/>
+                  </a:lnTo>
+                  <a:lnTo>
+                    <a:pt x="0" y="7581773"/>
+                  </a:lnTo>
+                  <a:close/>
+                </a:path>
+              </a:pathLst>
+            </a:custGeom>
+            <a:solidFill>
+              <a:srgbClr val="948A82">
+                <a:alpha val="24706"/>
+              </a:srgbClr>
+            </a:solidFill>
+          </p:spPr>
+        </p:sp>
+      </p:grpSp>
+      <p:grpSp>
+        <p:nvGrpSpPr>
+          <p:cNvPr name="Group 6" id="6"/>
+          <p:cNvGrpSpPr/>
+          <p:nvPr/>
+        </p:nvGrpSpPr>
+        <p:grpSpPr>
+          <a:xfrm rot="0">
+            <a:off x="2570540" y="1685755"/>
+            <a:ext cx="3315923" cy="6901773"/>
+            <a:chOff x="0" y="0"/>
+            <a:chExt cx="3143987" cy="6543904"/>
+          </a:xfrm>
+        </p:grpSpPr>
+        <p:sp>
+          <p:nvSpPr>
+            <p:cNvPr name="Freeform 7" id="7"/>
+            <p:cNvSpPr/>
+            <p:nvPr/>
+          </p:nvSpPr>
+          <p:spPr>
+            <a:xfrm flipH="false" flipV="false" rot="0">
+              <a:off x="0" y="0"/>
+              <a:ext cx="3143982" cy="6543904"/>
+            </a:xfrm>
+            <a:custGeom>
+              <a:avLst/>
+              <a:gdLst/>
+              <a:ahLst/>
+              <a:cxnLst/>
+              <a:rect r="r" b="b" t="t" l="l"/>
+              <a:pathLst>
+                <a:path h="6543904" w="3143982">
+                  <a:moveTo>
+                    <a:pt x="0" y="0"/>
+                  </a:moveTo>
+                  <a:lnTo>
+                    <a:pt x="3143982" y="0"/>
+                  </a:lnTo>
+                  <a:lnTo>
+                    <a:pt x="3143982" y="6543904"/>
+                  </a:lnTo>
+                  <a:lnTo>
+                    <a:pt x="0" y="6543904"/>
+                  </a:lnTo>
+                  <a:close/>
+                </a:path>
+              </a:pathLst>
+            </a:custGeom>
+            <a:blipFill>
+              <a:blip r:embed="rId2">
+                <a:alphaModFix amt="0"/>
+              </a:blip>
+              <a:stretch>
+                <a:fillRect l="-217051" t="0" r="-217051" b="0"/>
+              </a:stretch>
+            </a:blipFill>
+          </p:spPr>
+        </p:sp>
+        <p:sp>
+          <p:nvSpPr>
+            <p:cNvPr name="TextBox 8" id="8"/>
+            <p:cNvSpPr txBox="true"/>
+            <p:nvPr/>
+          </p:nvSpPr>
+          <p:spPr>
+            <a:xfrm>
+              <a:off x="0" y="47625"/>
+              <a:ext cx="3143987" cy="6496279"/>
+            </a:xfrm>
+            <a:prstGeom prst="rect">
+              <a:avLst/>
+            </a:prstGeom>
+          </p:spPr>
+          <p:txBody>
+            <a:bodyPr anchor="ctr" rtlCol="false" tIns="0" lIns="0" bIns="0" rIns="0"/>
+            <a:lstStyle/>
+            <a:p>
+              <a:pPr algn="l">
+                <a:lnSpc>
+                  <a:spcPts val="4860"/>
+                </a:lnSpc>
+              </a:pPr>
+              <a:r>
+                <a:rPr lang="en-US" b="true" sz="4500" spc="-96">
+                  <a:solidFill>
+                    <a:srgbClr val="000000"/>
+                  </a:solidFill>
+                  <a:latin typeface="PT Sans Bold"/>
+                  <a:ea typeface="PT Sans Bold"/>
+                  <a:cs typeface="PT Sans Bold"/>
+                  <a:sym typeface="PT Sans Bold"/>
+                </a:rPr>
+                <a:t>Strategic Business Impact</a:t>
+              </a:r>
+            </a:p>
+          </p:txBody>
+        </p:sp>
+      </p:grpSp>
+      <p:grpSp>
+        <p:nvGrpSpPr>
+          <p:cNvPr name="Group 9" id="9"/>
+          <p:cNvGrpSpPr/>
+          <p:nvPr/>
+        </p:nvGrpSpPr>
+        <p:grpSpPr>
+          <a:xfrm rot="0">
+            <a:off x="6638928" y="1296162"/>
+            <a:ext cx="8229600" cy="7680960"/>
+            <a:chOff x="0" y="0"/>
+            <a:chExt cx="7802880" cy="7282688"/>
+          </a:xfrm>
+        </p:grpSpPr>
+        <p:sp>
+          <p:nvSpPr>
+            <p:cNvPr name="Freeform 10" id="10"/>
+            <p:cNvSpPr/>
+            <p:nvPr/>
+          </p:nvSpPr>
+          <p:spPr>
+            <a:xfrm flipH="false" flipV="false" rot="0">
+              <a:off x="0" y="0"/>
+              <a:ext cx="7802880" cy="7282688"/>
+            </a:xfrm>
+            <a:custGeom>
+              <a:avLst/>
+              <a:gdLst/>
+              <a:ahLst/>
+              <a:cxnLst/>
+              <a:rect r="r" b="b" t="t" l="l"/>
+              <a:pathLst>
+                <a:path h="7282688" w="7802880">
+                  <a:moveTo>
+                    <a:pt x="0" y="0"/>
+                  </a:moveTo>
+                  <a:lnTo>
+                    <a:pt x="7802880" y="0"/>
+                  </a:lnTo>
+                  <a:lnTo>
+                    <a:pt x="7802880" y="7282688"/>
+                  </a:lnTo>
+                  <a:lnTo>
+                    <a:pt x="0" y="7282688"/>
+                  </a:lnTo>
+                  <a:close/>
+                </a:path>
+              </a:pathLst>
+            </a:custGeom>
+            <a:blipFill>
+              <a:blip r:embed="rId2">
+                <a:alphaModFix amt="0"/>
+              </a:blip>
+              <a:stretch>
+                <a:fillRect l="-69749" t="0" r="-69749" b="0"/>
+              </a:stretch>
+            </a:blipFill>
+          </p:spPr>
+        </p:sp>
+        <p:sp>
+          <p:nvSpPr>
+            <p:cNvPr name="TextBox 11" id="11"/>
+            <p:cNvSpPr txBox="true"/>
+            <p:nvPr/>
+          </p:nvSpPr>
+          <p:spPr>
+            <a:xfrm>
+              <a:off x="0" y="28575"/>
+              <a:ext cx="7802880" cy="7254113"/>
+            </a:xfrm>
+            <a:prstGeom prst="rect">
+              <a:avLst/>
+            </a:prstGeom>
+          </p:spPr>
+          <p:txBody>
+            <a:bodyPr anchor="ctr" rtlCol="false" tIns="0" lIns="0" bIns="0" rIns="0"/>
+            <a:lstStyle/>
+            <a:p>
+              <a:pPr algn="l" marL="347472" indent="-173736" lvl="1">
+                <a:lnSpc>
+                  <a:spcPts val="2916"/>
+                </a:lnSpc>
+                <a:buFont typeface="Arial"/>
+                <a:buChar char="•"/>
+              </a:pPr>
+              <a:r>
+                <a:rPr lang="en-US" sz="2700" spc="-3">
+                  <a:solidFill>
+                    <a:srgbClr val="000000"/>
+                  </a:solidFill>
+                  <a:latin typeface="PT Sans"/>
+                  <a:ea typeface="PT Sans"/>
+                  <a:cs typeface="PT Sans"/>
+                  <a:sym typeface="PT Sans"/>
+                </a:rPr>
+                <a:t>Premium segment drives majority revenue</a:t>
+              </a:r>
+            </a:p>
+            <a:p>
+              <a:pPr algn="l" marL="1101852" indent="-367284" lvl="2">
+                <a:lnSpc>
+                  <a:spcPts val="2916"/>
+                </a:lnSpc>
+                <a:buFont typeface="Arial"/>
+                <a:buChar char="⚬"/>
+              </a:pPr>
+              <a:r>
+                <a:rPr lang="en-US" sz="2700" spc="-3">
+                  <a:solidFill>
+                    <a:srgbClr val="000000"/>
+                  </a:solidFill>
+                  <a:latin typeface="PT Sans"/>
+                  <a:ea typeface="PT Sans"/>
+                  <a:cs typeface="PT Sans"/>
+                  <a:sym typeface="PT Sans"/>
+                </a:rPr>
+                <a:t>Dormant segment represents retention opportunity</a:t>
+              </a:r>
+            </a:p>
+            <a:p>
+              <a:pPr algn="l" marL="1101852" indent="-367284" lvl="2">
+                <a:lnSpc>
+                  <a:spcPts val="2916"/>
+                </a:lnSpc>
+                <a:buFont typeface="Arial"/>
+                <a:buChar char="⚬"/>
+              </a:pPr>
+              <a:r>
+                <a:rPr lang="en-US" sz="2700" spc="-3">
+                  <a:solidFill>
+                    <a:srgbClr val="000000"/>
+                  </a:solidFill>
+                  <a:latin typeface="PT Sans"/>
+                  <a:ea typeface="PT Sans"/>
+                  <a:cs typeface="PT Sans"/>
+                  <a:sym typeface="PT Sans"/>
+                </a:rPr>
+                <a:t>Targeted segmentation improves marketing ROI</a:t>
+              </a:r>
+            </a:p>
+            <a:p>
+              <a:pPr algn="l" marL="1101852" indent="-367284" lvl="2">
+                <a:lnSpc>
+                  <a:spcPts val="2916"/>
+                </a:lnSpc>
+                <a:buFont typeface="Arial"/>
+                <a:buChar char="⚬"/>
+              </a:pPr>
+              <a:r>
+                <a:rPr lang="en-US" sz="2700" spc="-3">
+                  <a:solidFill>
+                    <a:srgbClr val="000000"/>
+                  </a:solidFill>
+                  <a:latin typeface="PT Sans"/>
+                  <a:ea typeface="PT Sans"/>
+                  <a:cs typeface="PT Sans"/>
+                  <a:sym typeface="PT Sans"/>
+                </a:rPr>
+                <a:t>Scalable enterprise-ready analytics pipeline</a:t>
+              </a:r>
+            </a:p>
+          </p:txBody>
+        </p:sp>
+      </p:grpSp>
       <p:sp>
         <p:nvSpPr>
-          <p:cNvPr id="2" name="Title 1"/>
-          <p:cNvSpPr>
-            <a:spLocks noGrp="1"/>
-          </p:cNvSpPr>
-          <p:nvPr>
-            <p:ph type="title"/>
-          </p:nvPr>
-        </p:nvSpPr>
-        <p:spPr/>
-        <p:txBody>
-          <a:bodyPr/>
-          <a:lstStyle/>
-          <a:p>
-            <a:pPr>
-              <a:defRPr sz="3000" b="1">
-                <a:solidFill>
-                  <a:srgbClr val="203864"/>
-                </a:solidFill>
-              </a:defRPr>
-            </a:pPr>
-            <a:r>
-              <a:t>Strategic Business Impact</a:t>
-            </a:r>
-          </a:p>
-        </p:txBody>
-      </p:sp>
-      <p:sp>
-        <p:nvSpPr>
-          <p:cNvPr id="3" name="Content Placeholder 2"/>
-          <p:cNvSpPr>
-            <a:spLocks noGrp="1"/>
-          </p:cNvSpPr>
-          <p:nvPr>
-            <p:ph idx="1"/>
-          </p:nvPr>
-        </p:nvSpPr>
-        <p:spPr/>
-        <p:txBody>
-          <a:bodyPr/>
-          <a:lstStyle/>
-          <a:p>
-            <a:pPr>
-              <a:defRPr sz="1800">
-                <a:solidFill>
-                  <a:srgbClr val="5A5A5A"/>
-                </a:solidFill>
-              </a:defRPr>
-            </a:pPr>
-            <a:r>
-              <a:t>Premium segment drives majority revenue</a:t>
-            </a:r>
-          </a:p>
-          <a:p>
-            <a:pPr lvl="1">
-              <a:defRPr sz="1800">
-                <a:solidFill>
-                  <a:srgbClr val="5A5A5A"/>
-                </a:solidFill>
-              </a:defRPr>
-            </a:pPr>
-            <a:r>
-              <a:t>Dormant segment represents retention opportunity</a:t>
-            </a:r>
-          </a:p>
-          <a:p>
-            <a:pPr lvl="1">
-              <a:defRPr sz="1800">
-                <a:solidFill>
-                  <a:srgbClr val="5A5A5A"/>
-                </a:solidFill>
-              </a:defRPr>
-            </a:pPr>
-            <a:r>
-              <a:t>Targeted segmentation improves marketing ROI</a:t>
-            </a:r>
-          </a:p>
-          <a:p>
-            <a:pPr lvl="1">
-              <a:defRPr sz="1800">
-                <a:solidFill>
-                  <a:srgbClr val="5A5A5A"/>
-                </a:solidFill>
-              </a:defRPr>
-            </a:pPr>
-            <a:r>
-              <a:t>Scalable enterprise-ready analytics pipeline</a:t>
-            </a:r>
-          </a:p>
-        </p:txBody>
-      </p:sp>
-      <p:sp>
-        <p:nvSpPr>
-          <p:cNvPr id="4" name="TextBox 3"/>
-          <p:cNvSpPr txBox="1"/>
+          <p:cNvPr name="TextBox 12" id="12"/>
+          <p:cNvSpPr txBox="true"/>
           <p:nvPr/>
         </p:nvSpPr>
         <p:spPr>
-          <a:xfrm>
-            <a:off x="457200" y="6217920"/>
-            <a:ext cx="8229600" cy="274320"/>
+          <a:xfrm rot="0">
+            <a:off x="3100388" y="9391174"/>
+            <a:ext cx="12087225" cy="282892"/>
           </a:xfrm>
           <a:prstGeom prst="rect">
             <a:avLst/>
           </a:prstGeom>
-          <a:noFill/>
         </p:spPr>
         <p:txBody>
-          <a:bodyPr wrap="none">
+          <a:bodyPr anchor="t" rtlCol="false" tIns="0" lIns="0" bIns="0" rIns="0">
             <a:spAutoFit/>
           </a:bodyPr>
           <a:lstStyle/>
           <a:p>
-            <a:pPr>
-              <a:defRPr sz="1000">
-                <a:solidFill>
-                  <a:srgbClr val="5A5A5A"/>
-                </a:solidFill>
-              </a:defRPr>
+            <a:pPr algn="l">
+              <a:lnSpc>
+                <a:spcPts val="1800"/>
+              </a:lnSpc>
             </a:pPr>
             <a:r>
+              <a:rPr lang="en-US" sz="1500" spc="-2">
+                <a:solidFill>
+                  <a:srgbClr val="000000"/>
+                </a:solidFill>
+                <a:latin typeface="PT Sans"/>
+                <a:ea typeface="PT Sans"/>
+                <a:cs typeface="PT Sans"/>
+                <a:sym typeface="PT Sans"/>
+              </a:rPr>
               <a:t>Advanced Customer Segmentation | Capstone Project    |    Slide 14</a:t>
             </a:r>
           </a:p>
@@ -3899,137 +5655,440 @@
 </file>
 
 <file path=ppt/slides/slide15.xml><?xml version="1.0" encoding="utf-8"?>
-<p:sld xmlns:a="http://schemas.openxmlformats.org/drawingml/2006/main" xmlns:p="http://schemas.openxmlformats.org/presentationml/2006/main" xmlns:r="http://schemas.openxmlformats.org/officeDocument/2006/relationships">
+<p:sld xmlns:p="http://schemas.openxmlformats.org/presentationml/2006/main" xmlns:a="http://schemas.openxmlformats.org/drawingml/2006/main" xmlns:r="http://schemas.openxmlformats.org/officeDocument/2006/relationships">
   <p:cSld>
+    <p:bg>
+      <p:bgPr>
+        <a:solidFill>
+          <a:srgbClr val="FEF8F5"/>
+        </a:solidFill>
+      </p:bgPr>
+    </p:bg>
     <p:spTree>
       <p:nvGrpSpPr>
         <p:cNvPr id="1" name=""/>
         <p:cNvGrpSpPr/>
         <p:nvPr/>
       </p:nvGrpSpPr>
-      <p:grpSpPr/>
+      <p:grpSpPr>
+        <a:xfrm>
+          <a:off x="0" y="0"/>
+          <a:ext cx="0" cy="0"/>
+          <a:chOff x="0" y="0"/>
+          <a:chExt cx="0" cy="0"/>
+        </a:xfrm>
+      </p:grpSpPr>
+      <p:grpSp>
+        <p:nvGrpSpPr>
+          <p:cNvPr name="Group 2" id="2"/>
+          <p:cNvGrpSpPr/>
+          <p:nvPr/>
+        </p:nvGrpSpPr>
+        <p:grpSpPr>
+          <a:xfrm rot="0">
+            <a:off x="2286002" y="1138428"/>
+            <a:ext cx="3874033" cy="7996428"/>
+            <a:chOff x="0" y="0"/>
+            <a:chExt cx="3673158" cy="7581798"/>
+          </a:xfrm>
+        </p:grpSpPr>
+        <p:sp>
+          <p:nvSpPr>
+            <p:cNvPr name="Freeform 3" id="3"/>
+            <p:cNvSpPr/>
+            <p:nvPr/>
+          </p:nvSpPr>
+          <p:spPr>
+            <a:xfrm flipH="false" flipV="false" rot="0">
+              <a:off x="0" y="0"/>
+              <a:ext cx="3673221" cy="7581773"/>
+            </a:xfrm>
+            <a:custGeom>
+              <a:avLst/>
+              <a:gdLst/>
+              <a:ahLst/>
+              <a:cxnLst/>
+              <a:rect r="r" b="b" t="t" l="l"/>
+              <a:pathLst>
+                <a:path h="7581773" w="3673221">
+                  <a:moveTo>
+                    <a:pt x="0" y="0"/>
+                  </a:moveTo>
+                  <a:lnTo>
+                    <a:pt x="3673221" y="0"/>
+                  </a:lnTo>
+                  <a:lnTo>
+                    <a:pt x="3673221" y="7581773"/>
+                  </a:lnTo>
+                  <a:lnTo>
+                    <a:pt x="0" y="7581773"/>
+                  </a:lnTo>
+                  <a:close/>
+                </a:path>
+              </a:pathLst>
+            </a:custGeom>
+            <a:solidFill>
+              <a:srgbClr val="DFA186"/>
+            </a:solidFill>
+          </p:spPr>
+        </p:sp>
+      </p:grpSp>
+      <p:grpSp>
+        <p:nvGrpSpPr>
+          <p:cNvPr name="Group 4" id="4"/>
+          <p:cNvGrpSpPr/>
+          <p:nvPr/>
+        </p:nvGrpSpPr>
+        <p:grpSpPr>
+          <a:xfrm rot="0">
+            <a:off x="15578853" y="1138428"/>
+            <a:ext cx="432054" cy="7996428"/>
+            <a:chOff x="0" y="0"/>
+            <a:chExt cx="409651" cy="7581798"/>
+          </a:xfrm>
+        </p:grpSpPr>
+        <p:sp>
+          <p:nvSpPr>
+            <p:cNvPr name="Freeform 5" id="5"/>
+            <p:cNvSpPr/>
+            <p:nvPr/>
+          </p:nvSpPr>
+          <p:spPr>
+            <a:xfrm flipH="false" flipV="false" rot="0">
+              <a:off x="0" y="0"/>
+              <a:ext cx="409702" cy="7581773"/>
+            </a:xfrm>
+            <a:custGeom>
+              <a:avLst/>
+              <a:gdLst/>
+              <a:ahLst/>
+              <a:cxnLst/>
+              <a:rect r="r" b="b" t="t" l="l"/>
+              <a:pathLst>
+                <a:path h="7581773" w="409702">
+                  <a:moveTo>
+                    <a:pt x="0" y="0"/>
+                  </a:moveTo>
+                  <a:lnTo>
+                    <a:pt x="409702" y="0"/>
+                  </a:lnTo>
+                  <a:lnTo>
+                    <a:pt x="409702" y="7581773"/>
+                  </a:lnTo>
+                  <a:lnTo>
+                    <a:pt x="0" y="7581773"/>
+                  </a:lnTo>
+                  <a:close/>
+                </a:path>
+              </a:pathLst>
+            </a:custGeom>
+            <a:solidFill>
+              <a:srgbClr val="948A82">
+                <a:alpha val="24706"/>
+              </a:srgbClr>
+            </a:solidFill>
+          </p:spPr>
+        </p:sp>
+      </p:grpSp>
+      <p:grpSp>
+        <p:nvGrpSpPr>
+          <p:cNvPr name="Group 6" id="6"/>
+          <p:cNvGrpSpPr/>
+          <p:nvPr/>
+        </p:nvGrpSpPr>
+        <p:grpSpPr>
+          <a:xfrm rot="0">
+            <a:off x="2570540" y="1685755"/>
+            <a:ext cx="3315923" cy="6901773"/>
+            <a:chOff x="0" y="0"/>
+            <a:chExt cx="3143987" cy="6543904"/>
+          </a:xfrm>
+        </p:grpSpPr>
+        <p:sp>
+          <p:nvSpPr>
+            <p:cNvPr name="Freeform 7" id="7"/>
+            <p:cNvSpPr/>
+            <p:nvPr/>
+          </p:nvSpPr>
+          <p:spPr>
+            <a:xfrm flipH="false" flipV="false" rot="0">
+              <a:off x="0" y="0"/>
+              <a:ext cx="3143982" cy="6543904"/>
+            </a:xfrm>
+            <a:custGeom>
+              <a:avLst/>
+              <a:gdLst/>
+              <a:ahLst/>
+              <a:cxnLst/>
+              <a:rect r="r" b="b" t="t" l="l"/>
+              <a:pathLst>
+                <a:path h="6543904" w="3143982">
+                  <a:moveTo>
+                    <a:pt x="0" y="0"/>
+                  </a:moveTo>
+                  <a:lnTo>
+                    <a:pt x="3143982" y="0"/>
+                  </a:lnTo>
+                  <a:lnTo>
+                    <a:pt x="3143982" y="6543904"/>
+                  </a:lnTo>
+                  <a:lnTo>
+                    <a:pt x="0" y="6543904"/>
+                  </a:lnTo>
+                  <a:close/>
+                </a:path>
+              </a:pathLst>
+            </a:custGeom>
+            <a:blipFill>
+              <a:blip r:embed="rId2">
+                <a:alphaModFix amt="0"/>
+              </a:blip>
+              <a:stretch>
+                <a:fillRect l="-217051" t="0" r="-217051" b="0"/>
+              </a:stretch>
+            </a:blipFill>
+          </p:spPr>
+        </p:sp>
+        <p:sp>
+          <p:nvSpPr>
+            <p:cNvPr name="TextBox 8" id="8"/>
+            <p:cNvSpPr txBox="true"/>
+            <p:nvPr/>
+          </p:nvSpPr>
+          <p:spPr>
+            <a:xfrm>
+              <a:off x="0" y="47625"/>
+              <a:ext cx="3143987" cy="6496279"/>
+            </a:xfrm>
+            <a:prstGeom prst="rect">
+              <a:avLst/>
+            </a:prstGeom>
+          </p:spPr>
+          <p:txBody>
+            <a:bodyPr anchor="ctr" rtlCol="false" tIns="0" lIns="0" bIns="0" rIns="0"/>
+            <a:lstStyle/>
+            <a:p>
+              <a:pPr algn="l">
+                <a:lnSpc>
+                  <a:spcPts val="4860"/>
+                </a:lnSpc>
+              </a:pPr>
+              <a:r>
+                <a:rPr lang="en-US" b="true" sz="4500" spc="-96">
+                  <a:solidFill>
+                    <a:srgbClr val="000000"/>
+                  </a:solidFill>
+                  <a:latin typeface="PT Sans Bold"/>
+                  <a:ea typeface="PT Sans Bold"/>
+                  <a:cs typeface="PT Sans Bold"/>
+                  <a:sym typeface="PT Sans Bold"/>
+                </a:rPr>
+                <a:t>Conclusion</a:t>
+              </a:r>
+            </a:p>
+          </p:txBody>
+        </p:sp>
+      </p:grpSp>
+      <p:grpSp>
+        <p:nvGrpSpPr>
+          <p:cNvPr name="Group 9" id="9"/>
+          <p:cNvGrpSpPr/>
+          <p:nvPr/>
+        </p:nvGrpSpPr>
+        <p:grpSpPr>
+          <a:xfrm rot="0">
+            <a:off x="6638928" y="1296162"/>
+            <a:ext cx="8229600" cy="7680960"/>
+            <a:chOff x="0" y="0"/>
+            <a:chExt cx="7802880" cy="7282688"/>
+          </a:xfrm>
+        </p:grpSpPr>
+        <p:sp>
+          <p:nvSpPr>
+            <p:cNvPr name="Freeform 10" id="10"/>
+            <p:cNvSpPr/>
+            <p:nvPr/>
+          </p:nvSpPr>
+          <p:spPr>
+            <a:xfrm flipH="false" flipV="false" rot="0">
+              <a:off x="0" y="0"/>
+              <a:ext cx="7802880" cy="7282688"/>
+            </a:xfrm>
+            <a:custGeom>
+              <a:avLst/>
+              <a:gdLst/>
+              <a:ahLst/>
+              <a:cxnLst/>
+              <a:rect r="r" b="b" t="t" l="l"/>
+              <a:pathLst>
+                <a:path h="7282688" w="7802880">
+                  <a:moveTo>
+                    <a:pt x="0" y="0"/>
+                  </a:moveTo>
+                  <a:lnTo>
+                    <a:pt x="7802880" y="0"/>
+                  </a:lnTo>
+                  <a:lnTo>
+                    <a:pt x="7802880" y="7282688"/>
+                  </a:lnTo>
+                  <a:lnTo>
+                    <a:pt x="0" y="7282688"/>
+                  </a:lnTo>
+                  <a:close/>
+                </a:path>
+              </a:pathLst>
+            </a:custGeom>
+            <a:blipFill>
+              <a:blip r:embed="rId2">
+                <a:alphaModFix amt="0"/>
+              </a:blip>
+              <a:stretch>
+                <a:fillRect l="-69749" t="0" r="-69749" b="0"/>
+              </a:stretch>
+            </a:blipFill>
+          </p:spPr>
+        </p:sp>
+        <p:sp>
+          <p:nvSpPr>
+            <p:cNvPr name="TextBox 11" id="11"/>
+            <p:cNvSpPr txBox="true"/>
+            <p:nvPr/>
+          </p:nvSpPr>
+          <p:spPr>
+            <a:xfrm>
+              <a:off x="0" y="28575"/>
+              <a:ext cx="7802880" cy="7254113"/>
+            </a:xfrm>
+            <a:prstGeom prst="rect">
+              <a:avLst/>
+            </a:prstGeom>
+          </p:spPr>
+          <p:txBody>
+            <a:bodyPr anchor="ctr" rtlCol="false" tIns="0" lIns="0" bIns="0" rIns="0"/>
+            <a:lstStyle/>
+            <a:p>
+              <a:pPr algn="l" marL="347472" indent="-173736" lvl="1">
+                <a:lnSpc>
+                  <a:spcPts val="2916"/>
+                </a:lnSpc>
+                <a:buFont typeface="Arial"/>
+                <a:buChar char="•"/>
+              </a:pPr>
+              <a:r>
+                <a:rPr lang="en-US" sz="2700" spc="-3">
+                  <a:solidFill>
+                    <a:srgbClr val="000000"/>
+                  </a:solidFill>
+                  <a:latin typeface="PT Sans"/>
+                  <a:ea typeface="PT Sans"/>
+                  <a:cs typeface="PT Sans"/>
+                  <a:sym typeface="PT Sans"/>
+                </a:rPr>
+                <a:t>3 distinct behavioral customer segments identified</a:t>
+              </a:r>
+            </a:p>
+            <a:p>
+              <a:pPr algn="l" marL="1101852" indent="-367284" lvl="2">
+                <a:lnSpc>
+                  <a:spcPts val="2916"/>
+                </a:lnSpc>
+                <a:buFont typeface="Arial"/>
+                <a:buChar char="⚬"/>
+              </a:pPr>
+              <a:r>
+                <a:rPr lang="en-US" sz="2700" spc="-3">
+                  <a:solidFill>
+                    <a:srgbClr val="000000"/>
+                  </a:solidFill>
+                  <a:latin typeface="PT Sans"/>
+                  <a:ea typeface="PT Sans"/>
+                  <a:cs typeface="PT Sans"/>
+                  <a:sym typeface="PT Sans"/>
+                </a:rPr>
+                <a:t>Scientific validation through multiple clustering metrics</a:t>
+              </a:r>
+            </a:p>
+            <a:p>
+              <a:pPr algn="l" marL="1101852" indent="-367284" lvl="2">
+                <a:lnSpc>
+                  <a:spcPts val="2916"/>
+                </a:lnSpc>
+                <a:buFont typeface="Arial"/>
+                <a:buChar char="⚬"/>
+              </a:pPr>
+              <a:r>
+                <a:rPr lang="en-US" sz="2700" spc="-3">
+                  <a:solidFill>
+                    <a:srgbClr val="000000"/>
+                  </a:solidFill>
+                  <a:latin typeface="PT Sans"/>
+                  <a:ea typeface="PT Sans"/>
+                  <a:cs typeface="PT Sans"/>
+                  <a:sym typeface="PT Sans"/>
+                </a:rPr>
+                <a:t>Actionable marketing strategies developed</a:t>
+              </a:r>
+            </a:p>
+            <a:p>
+              <a:pPr algn="l" marL="1101852" indent="-367284" lvl="2">
+                <a:lnSpc>
+                  <a:spcPts val="2916"/>
+                </a:lnSpc>
+                <a:buFont typeface="Arial"/>
+                <a:buChar char="⚬"/>
+              </a:pPr>
+              <a:r>
+                <a:rPr lang="en-US" sz="2700" spc="-3">
+                  <a:solidFill>
+                    <a:srgbClr val="000000"/>
+                  </a:solidFill>
+                  <a:latin typeface="PT Sans"/>
+                  <a:ea typeface="PT Sans"/>
+                  <a:cs typeface="PT Sans"/>
+                  <a:sym typeface="PT Sans"/>
+                </a:rPr>
+                <a:t>Framework ready for real-world deployment</a:t>
+              </a:r>
+            </a:p>
+          </p:txBody>
+        </p:sp>
+      </p:grpSp>
       <p:sp>
         <p:nvSpPr>
-          <p:cNvPr id="2" name="Title 1"/>
-          <p:cNvSpPr>
-            <a:spLocks noGrp="1"/>
-          </p:cNvSpPr>
-          <p:nvPr>
-            <p:ph type="title"/>
-          </p:nvPr>
-        </p:nvSpPr>
-        <p:spPr/>
-        <p:txBody>
-          <a:bodyPr/>
-          <a:lstStyle/>
-          <a:p>
-            <a:pPr>
-              <a:defRPr sz="3000" b="1">
-                <a:solidFill>
-                  <a:srgbClr val="203864"/>
-                </a:solidFill>
-              </a:defRPr>
-            </a:pPr>
-            <a:r>
-              <a:t>Conclusion</a:t>
-            </a:r>
-          </a:p>
-        </p:txBody>
-      </p:sp>
-      <p:sp>
-        <p:nvSpPr>
-          <p:cNvPr id="3" name="Content Placeholder 2"/>
-          <p:cNvSpPr>
-            <a:spLocks noGrp="1"/>
-          </p:cNvSpPr>
-          <p:nvPr>
-            <p:ph idx="1"/>
-          </p:nvPr>
-        </p:nvSpPr>
-        <p:spPr/>
-        <p:txBody>
-          <a:bodyPr/>
-          <a:lstStyle/>
-          <a:p>
-            <a:pPr>
-              <a:defRPr sz="1800">
-                <a:solidFill>
-                  <a:srgbClr val="5A5A5A"/>
-                </a:solidFill>
-              </a:defRPr>
-            </a:pPr>
-            <a:r>
-              <a:t>3 distinct behavioral customer segments identified</a:t>
-            </a:r>
-          </a:p>
-          <a:p>
-            <a:pPr lvl="1">
-              <a:defRPr sz="1800">
-                <a:solidFill>
-                  <a:srgbClr val="5A5A5A"/>
-                </a:solidFill>
-              </a:defRPr>
-            </a:pPr>
-            <a:r>
-              <a:t>Scientific validation through multiple clustering metrics</a:t>
-            </a:r>
-          </a:p>
-          <a:p>
-            <a:pPr lvl="1">
-              <a:defRPr sz="1800">
-                <a:solidFill>
-                  <a:srgbClr val="5A5A5A"/>
-                </a:solidFill>
-              </a:defRPr>
-            </a:pPr>
-            <a:r>
-              <a:t>Actionable marketing strategies developed</a:t>
-            </a:r>
-          </a:p>
-          <a:p>
-            <a:pPr lvl="1">
-              <a:defRPr sz="1800">
-                <a:solidFill>
-                  <a:srgbClr val="5A5A5A"/>
-                </a:solidFill>
-              </a:defRPr>
-            </a:pPr>
-            <a:r>
-              <a:t>Framework ready for real-world deployment</a:t>
-            </a:r>
-          </a:p>
-        </p:txBody>
-      </p:sp>
-      <p:sp>
-        <p:nvSpPr>
-          <p:cNvPr id="4" name="TextBox 3"/>
-          <p:cNvSpPr txBox="1"/>
+          <p:cNvPr name="TextBox 12" id="12"/>
+          <p:cNvSpPr txBox="true"/>
           <p:nvPr/>
         </p:nvSpPr>
         <p:spPr>
-          <a:xfrm>
-            <a:off x="457200" y="6217920"/>
-            <a:ext cx="8229600" cy="274320"/>
+          <a:xfrm rot="0">
+            <a:off x="3100388" y="9391174"/>
+            <a:ext cx="12087225" cy="282892"/>
           </a:xfrm>
           <a:prstGeom prst="rect">
             <a:avLst/>
           </a:prstGeom>
-          <a:noFill/>
         </p:spPr>
         <p:txBody>
-          <a:bodyPr wrap="none">
+          <a:bodyPr anchor="t" rtlCol="false" tIns="0" lIns="0" bIns="0" rIns="0">
             <a:spAutoFit/>
           </a:bodyPr>
           <a:lstStyle/>
           <a:p>
-            <a:pPr>
-              <a:defRPr sz="1000">
-                <a:solidFill>
-                  <a:srgbClr val="5A5A5A"/>
-                </a:solidFill>
-              </a:defRPr>
+            <a:pPr algn="l">
+              <a:lnSpc>
+                <a:spcPts val="1800"/>
+              </a:lnSpc>
             </a:pPr>
             <a:r>
+              <a:rPr lang="en-US" sz="1500" spc="-2">
+                <a:solidFill>
+                  <a:srgbClr val="000000"/>
+                </a:solidFill>
+                <a:latin typeface="PT Sans"/>
+                <a:ea typeface="PT Sans"/>
+                <a:cs typeface="PT Sans"/>
+                <a:sym typeface="PT Sans"/>
+              </a:rPr>
               <a:t>Advanced Customer Segmentation | Capstone Project    |    Slide 15</a:t>
             </a:r>
           </a:p>
@@ -4044,137 +6103,440 @@
 </file>
 
 <file path=ppt/slides/slide2.xml><?xml version="1.0" encoding="utf-8"?>
-<p:sld xmlns:a="http://schemas.openxmlformats.org/drawingml/2006/main" xmlns:p="http://schemas.openxmlformats.org/presentationml/2006/main" xmlns:r="http://schemas.openxmlformats.org/officeDocument/2006/relationships">
+<p:sld xmlns:p="http://schemas.openxmlformats.org/presentationml/2006/main" xmlns:a="http://schemas.openxmlformats.org/drawingml/2006/main" xmlns:r="http://schemas.openxmlformats.org/officeDocument/2006/relationships">
   <p:cSld>
+    <p:bg>
+      <p:bgPr>
+        <a:solidFill>
+          <a:srgbClr val="FEF8F5"/>
+        </a:solidFill>
+      </p:bgPr>
+    </p:bg>
     <p:spTree>
       <p:nvGrpSpPr>
         <p:cNvPr id="1" name=""/>
         <p:cNvGrpSpPr/>
         <p:nvPr/>
       </p:nvGrpSpPr>
-      <p:grpSpPr/>
+      <p:grpSpPr>
+        <a:xfrm>
+          <a:off x="0" y="0"/>
+          <a:ext cx="0" cy="0"/>
+          <a:chOff x="0" y="0"/>
+          <a:chExt cx="0" cy="0"/>
+        </a:xfrm>
+      </p:grpSpPr>
+      <p:grpSp>
+        <p:nvGrpSpPr>
+          <p:cNvPr name="Group 2" id="2"/>
+          <p:cNvGrpSpPr/>
+          <p:nvPr/>
+        </p:nvGrpSpPr>
+        <p:grpSpPr>
+          <a:xfrm rot="0">
+            <a:off x="2286002" y="1138428"/>
+            <a:ext cx="3874033" cy="7996428"/>
+            <a:chOff x="0" y="0"/>
+            <a:chExt cx="3673158" cy="7581798"/>
+          </a:xfrm>
+        </p:grpSpPr>
+        <p:sp>
+          <p:nvSpPr>
+            <p:cNvPr name="Freeform 3" id="3"/>
+            <p:cNvSpPr/>
+            <p:nvPr/>
+          </p:nvSpPr>
+          <p:spPr>
+            <a:xfrm flipH="false" flipV="false" rot="0">
+              <a:off x="0" y="0"/>
+              <a:ext cx="3673221" cy="7581773"/>
+            </a:xfrm>
+            <a:custGeom>
+              <a:avLst/>
+              <a:gdLst/>
+              <a:ahLst/>
+              <a:cxnLst/>
+              <a:rect r="r" b="b" t="t" l="l"/>
+              <a:pathLst>
+                <a:path h="7581773" w="3673221">
+                  <a:moveTo>
+                    <a:pt x="0" y="0"/>
+                  </a:moveTo>
+                  <a:lnTo>
+                    <a:pt x="3673221" y="0"/>
+                  </a:lnTo>
+                  <a:lnTo>
+                    <a:pt x="3673221" y="7581773"/>
+                  </a:lnTo>
+                  <a:lnTo>
+                    <a:pt x="0" y="7581773"/>
+                  </a:lnTo>
+                  <a:close/>
+                </a:path>
+              </a:pathLst>
+            </a:custGeom>
+            <a:solidFill>
+              <a:srgbClr val="DFA186"/>
+            </a:solidFill>
+          </p:spPr>
+        </p:sp>
+      </p:grpSp>
+      <p:grpSp>
+        <p:nvGrpSpPr>
+          <p:cNvPr name="Group 4" id="4"/>
+          <p:cNvGrpSpPr/>
+          <p:nvPr/>
+        </p:nvGrpSpPr>
+        <p:grpSpPr>
+          <a:xfrm rot="0">
+            <a:off x="15578853" y="1138428"/>
+            <a:ext cx="432054" cy="7996428"/>
+            <a:chOff x="0" y="0"/>
+            <a:chExt cx="409651" cy="7581798"/>
+          </a:xfrm>
+        </p:grpSpPr>
+        <p:sp>
+          <p:nvSpPr>
+            <p:cNvPr name="Freeform 5" id="5"/>
+            <p:cNvSpPr/>
+            <p:nvPr/>
+          </p:nvSpPr>
+          <p:spPr>
+            <a:xfrm flipH="false" flipV="false" rot="0">
+              <a:off x="0" y="0"/>
+              <a:ext cx="409702" cy="7581773"/>
+            </a:xfrm>
+            <a:custGeom>
+              <a:avLst/>
+              <a:gdLst/>
+              <a:ahLst/>
+              <a:cxnLst/>
+              <a:rect r="r" b="b" t="t" l="l"/>
+              <a:pathLst>
+                <a:path h="7581773" w="409702">
+                  <a:moveTo>
+                    <a:pt x="0" y="0"/>
+                  </a:moveTo>
+                  <a:lnTo>
+                    <a:pt x="409702" y="0"/>
+                  </a:lnTo>
+                  <a:lnTo>
+                    <a:pt x="409702" y="7581773"/>
+                  </a:lnTo>
+                  <a:lnTo>
+                    <a:pt x="0" y="7581773"/>
+                  </a:lnTo>
+                  <a:close/>
+                </a:path>
+              </a:pathLst>
+            </a:custGeom>
+            <a:solidFill>
+              <a:srgbClr val="948A82">
+                <a:alpha val="24706"/>
+              </a:srgbClr>
+            </a:solidFill>
+          </p:spPr>
+        </p:sp>
+      </p:grpSp>
+      <p:grpSp>
+        <p:nvGrpSpPr>
+          <p:cNvPr name="Group 6" id="6"/>
+          <p:cNvGrpSpPr/>
+          <p:nvPr/>
+        </p:nvGrpSpPr>
+        <p:grpSpPr>
+          <a:xfrm rot="0">
+            <a:off x="2570540" y="1685755"/>
+            <a:ext cx="3315923" cy="6901773"/>
+            <a:chOff x="0" y="0"/>
+            <a:chExt cx="3143987" cy="6543904"/>
+          </a:xfrm>
+        </p:grpSpPr>
+        <p:sp>
+          <p:nvSpPr>
+            <p:cNvPr name="Freeform 7" id="7"/>
+            <p:cNvSpPr/>
+            <p:nvPr/>
+          </p:nvSpPr>
+          <p:spPr>
+            <a:xfrm flipH="false" flipV="false" rot="0">
+              <a:off x="0" y="0"/>
+              <a:ext cx="3143982" cy="6543904"/>
+            </a:xfrm>
+            <a:custGeom>
+              <a:avLst/>
+              <a:gdLst/>
+              <a:ahLst/>
+              <a:cxnLst/>
+              <a:rect r="r" b="b" t="t" l="l"/>
+              <a:pathLst>
+                <a:path h="6543904" w="3143982">
+                  <a:moveTo>
+                    <a:pt x="0" y="0"/>
+                  </a:moveTo>
+                  <a:lnTo>
+                    <a:pt x="3143982" y="0"/>
+                  </a:lnTo>
+                  <a:lnTo>
+                    <a:pt x="3143982" y="6543904"/>
+                  </a:lnTo>
+                  <a:lnTo>
+                    <a:pt x="0" y="6543904"/>
+                  </a:lnTo>
+                  <a:close/>
+                </a:path>
+              </a:pathLst>
+            </a:custGeom>
+            <a:blipFill>
+              <a:blip r:embed="rId2">
+                <a:alphaModFix amt="0"/>
+              </a:blip>
+              <a:stretch>
+                <a:fillRect l="-217051" t="0" r="-217051" b="0"/>
+              </a:stretch>
+            </a:blipFill>
+          </p:spPr>
+        </p:sp>
+        <p:sp>
+          <p:nvSpPr>
+            <p:cNvPr name="TextBox 8" id="8"/>
+            <p:cNvSpPr txBox="true"/>
+            <p:nvPr/>
+          </p:nvSpPr>
+          <p:spPr>
+            <a:xfrm>
+              <a:off x="0" y="47625"/>
+              <a:ext cx="3143987" cy="6496279"/>
+            </a:xfrm>
+            <a:prstGeom prst="rect">
+              <a:avLst/>
+            </a:prstGeom>
+          </p:spPr>
+          <p:txBody>
+            <a:bodyPr anchor="ctr" rtlCol="false" tIns="0" lIns="0" bIns="0" rIns="0"/>
+            <a:lstStyle/>
+            <a:p>
+              <a:pPr algn="l">
+                <a:lnSpc>
+                  <a:spcPts val="4860"/>
+                </a:lnSpc>
+              </a:pPr>
+              <a:r>
+                <a:rPr lang="en-US" b="true" sz="4500" spc="-96">
+                  <a:solidFill>
+                    <a:srgbClr val="000000"/>
+                  </a:solidFill>
+                  <a:latin typeface="PT Sans Bold"/>
+                  <a:ea typeface="PT Sans Bold"/>
+                  <a:cs typeface="PT Sans Bold"/>
+                  <a:sym typeface="PT Sans Bold"/>
+                </a:rPr>
+                <a:t>Business Context &amp; Objective</a:t>
+              </a:r>
+            </a:p>
+          </p:txBody>
+        </p:sp>
+      </p:grpSp>
+      <p:grpSp>
+        <p:nvGrpSpPr>
+          <p:cNvPr name="Group 9" id="9"/>
+          <p:cNvGrpSpPr/>
+          <p:nvPr/>
+        </p:nvGrpSpPr>
+        <p:grpSpPr>
+          <a:xfrm rot="0">
+            <a:off x="6638928" y="1296162"/>
+            <a:ext cx="8229600" cy="7680960"/>
+            <a:chOff x="0" y="0"/>
+            <a:chExt cx="7802880" cy="7282688"/>
+          </a:xfrm>
+        </p:grpSpPr>
+        <p:sp>
+          <p:nvSpPr>
+            <p:cNvPr name="Freeform 10" id="10"/>
+            <p:cNvSpPr/>
+            <p:nvPr/>
+          </p:nvSpPr>
+          <p:spPr>
+            <a:xfrm flipH="false" flipV="false" rot="0">
+              <a:off x="0" y="0"/>
+              <a:ext cx="7802880" cy="7282688"/>
+            </a:xfrm>
+            <a:custGeom>
+              <a:avLst/>
+              <a:gdLst/>
+              <a:ahLst/>
+              <a:cxnLst/>
+              <a:rect r="r" b="b" t="t" l="l"/>
+              <a:pathLst>
+                <a:path h="7282688" w="7802880">
+                  <a:moveTo>
+                    <a:pt x="0" y="0"/>
+                  </a:moveTo>
+                  <a:lnTo>
+                    <a:pt x="7802880" y="0"/>
+                  </a:lnTo>
+                  <a:lnTo>
+                    <a:pt x="7802880" y="7282688"/>
+                  </a:lnTo>
+                  <a:lnTo>
+                    <a:pt x="0" y="7282688"/>
+                  </a:lnTo>
+                  <a:close/>
+                </a:path>
+              </a:pathLst>
+            </a:custGeom>
+            <a:blipFill>
+              <a:blip r:embed="rId2">
+                <a:alphaModFix amt="0"/>
+              </a:blip>
+              <a:stretch>
+                <a:fillRect l="-69749" t="0" r="-69749" b="0"/>
+              </a:stretch>
+            </a:blipFill>
+          </p:spPr>
+        </p:sp>
+        <p:sp>
+          <p:nvSpPr>
+            <p:cNvPr name="TextBox 11" id="11"/>
+            <p:cNvSpPr txBox="true"/>
+            <p:nvPr/>
+          </p:nvSpPr>
+          <p:spPr>
+            <a:xfrm>
+              <a:off x="0" y="28575"/>
+              <a:ext cx="7802880" cy="7254113"/>
+            </a:xfrm>
+            <a:prstGeom prst="rect">
+              <a:avLst/>
+            </a:prstGeom>
+          </p:spPr>
+          <p:txBody>
+            <a:bodyPr anchor="ctr" rtlCol="false" tIns="0" lIns="0" bIns="0" rIns="0"/>
+            <a:lstStyle/>
+            <a:p>
+              <a:pPr algn="l" marL="347472" indent="-173736" lvl="1">
+                <a:lnSpc>
+                  <a:spcPts val="2916"/>
+                </a:lnSpc>
+                <a:buFont typeface="Arial"/>
+                <a:buChar char="•"/>
+              </a:pPr>
+              <a:r>
+                <a:rPr lang="en-US" sz="2700" spc="-3">
+                  <a:solidFill>
+                    <a:srgbClr val="000000"/>
+                  </a:solidFill>
+                  <a:latin typeface="PT Sans"/>
+                  <a:ea typeface="PT Sans"/>
+                  <a:cs typeface="PT Sans"/>
+                  <a:sym typeface="PT Sans"/>
+                </a:rPr>
+                <a:t>Organizations lack structured customer segmentation</a:t>
+              </a:r>
+            </a:p>
+            <a:p>
+              <a:pPr algn="l" marL="1101852" indent="-367284" lvl="2">
+                <a:lnSpc>
+                  <a:spcPts val="2916"/>
+                </a:lnSpc>
+                <a:buFont typeface="Arial"/>
+                <a:buChar char="⚬"/>
+              </a:pPr>
+              <a:r>
+                <a:rPr lang="en-US" sz="2700" spc="-3">
+                  <a:solidFill>
+                    <a:srgbClr val="000000"/>
+                  </a:solidFill>
+                  <a:latin typeface="PT Sans"/>
+                  <a:ea typeface="PT Sans"/>
+                  <a:cs typeface="PT Sans"/>
+                  <a:sym typeface="PT Sans"/>
+                </a:rPr>
+                <a:t>Difficulty identifying revenue-driving and churn-risk customers</a:t>
+              </a:r>
+            </a:p>
+            <a:p>
+              <a:pPr algn="l" marL="1101852" indent="-367284" lvl="2">
+                <a:lnSpc>
+                  <a:spcPts val="2916"/>
+                </a:lnSpc>
+                <a:buFont typeface="Arial"/>
+                <a:buChar char="⚬"/>
+              </a:pPr>
+              <a:r>
+                <a:rPr lang="en-US" sz="2700" spc="-3">
+                  <a:solidFill>
+                    <a:srgbClr val="000000"/>
+                  </a:solidFill>
+                  <a:latin typeface="PT Sans"/>
+                  <a:ea typeface="PT Sans"/>
+                  <a:cs typeface="PT Sans"/>
+                  <a:sym typeface="PT Sans"/>
+                </a:rPr>
+                <a:t>Need for data-driven marketing allocation</a:t>
+              </a:r>
+            </a:p>
+            <a:p>
+              <a:pPr algn="l" marL="1101852" indent="-367284" lvl="2">
+                <a:lnSpc>
+                  <a:spcPts val="2916"/>
+                </a:lnSpc>
+                <a:buFont typeface="Arial"/>
+                <a:buChar char="⚬"/>
+              </a:pPr>
+              <a:r>
+                <a:rPr lang="en-US" sz="2700" spc="-3">
+                  <a:solidFill>
+                    <a:srgbClr val="000000"/>
+                  </a:solidFill>
+                  <a:latin typeface="PT Sans"/>
+                  <a:ea typeface="PT Sans"/>
+                  <a:cs typeface="PT Sans"/>
+                  <a:sym typeface="PT Sans"/>
+                </a:rPr>
+                <a:t>Objective: Build scalable unsupervised segmentation framework</a:t>
+              </a:r>
+            </a:p>
+          </p:txBody>
+        </p:sp>
+      </p:grpSp>
       <p:sp>
         <p:nvSpPr>
-          <p:cNvPr id="2" name="Title 1"/>
-          <p:cNvSpPr>
-            <a:spLocks noGrp="1"/>
-          </p:cNvSpPr>
-          <p:nvPr>
-            <p:ph type="title"/>
-          </p:nvPr>
-        </p:nvSpPr>
-        <p:spPr/>
-        <p:txBody>
-          <a:bodyPr/>
-          <a:lstStyle/>
-          <a:p>
-            <a:pPr>
-              <a:defRPr sz="3000" b="1">
-                <a:solidFill>
-                  <a:srgbClr val="203864"/>
-                </a:solidFill>
-              </a:defRPr>
-            </a:pPr>
-            <a:r>
-              <a:t>Business Context &amp; Objective</a:t>
-            </a:r>
-          </a:p>
-        </p:txBody>
-      </p:sp>
-      <p:sp>
-        <p:nvSpPr>
-          <p:cNvPr id="3" name="Content Placeholder 2"/>
-          <p:cNvSpPr>
-            <a:spLocks noGrp="1"/>
-          </p:cNvSpPr>
-          <p:nvPr>
-            <p:ph idx="1"/>
-          </p:nvPr>
-        </p:nvSpPr>
-        <p:spPr/>
-        <p:txBody>
-          <a:bodyPr/>
-          <a:lstStyle/>
-          <a:p>
-            <a:pPr>
-              <a:defRPr sz="1800">
-                <a:solidFill>
-                  <a:srgbClr val="5A5A5A"/>
-                </a:solidFill>
-              </a:defRPr>
-            </a:pPr>
-            <a:r>
-              <a:t>Organizations lack structured customer segmentation</a:t>
-            </a:r>
-          </a:p>
-          <a:p>
-            <a:pPr lvl="1">
-              <a:defRPr sz="1800">
-                <a:solidFill>
-                  <a:srgbClr val="5A5A5A"/>
-                </a:solidFill>
-              </a:defRPr>
-            </a:pPr>
-            <a:r>
-              <a:t>Difficulty identifying revenue-driving and churn-risk customers</a:t>
-            </a:r>
-          </a:p>
-          <a:p>
-            <a:pPr lvl="1">
-              <a:defRPr sz="1800">
-                <a:solidFill>
-                  <a:srgbClr val="5A5A5A"/>
-                </a:solidFill>
-              </a:defRPr>
-            </a:pPr>
-            <a:r>
-              <a:t>Need for data-driven marketing allocation</a:t>
-            </a:r>
-          </a:p>
-          <a:p>
-            <a:pPr lvl="1">
-              <a:defRPr sz="1800">
-                <a:solidFill>
-                  <a:srgbClr val="5A5A5A"/>
-                </a:solidFill>
-              </a:defRPr>
-            </a:pPr>
-            <a:r>
-              <a:t>Objective: Build scalable unsupervised segmentation framework</a:t>
-            </a:r>
-          </a:p>
-        </p:txBody>
-      </p:sp>
-      <p:sp>
-        <p:nvSpPr>
-          <p:cNvPr id="4" name="TextBox 3"/>
-          <p:cNvSpPr txBox="1"/>
+          <p:cNvPr name="TextBox 12" id="12"/>
+          <p:cNvSpPr txBox="true"/>
           <p:nvPr/>
         </p:nvSpPr>
         <p:spPr>
-          <a:xfrm>
-            <a:off x="457200" y="6217920"/>
-            <a:ext cx="8229600" cy="274320"/>
+          <a:xfrm rot="0">
+            <a:off x="3100388" y="9391174"/>
+            <a:ext cx="12087225" cy="282892"/>
           </a:xfrm>
           <a:prstGeom prst="rect">
             <a:avLst/>
           </a:prstGeom>
-          <a:noFill/>
         </p:spPr>
         <p:txBody>
-          <a:bodyPr wrap="none">
+          <a:bodyPr anchor="t" rtlCol="false" tIns="0" lIns="0" bIns="0" rIns="0">
             <a:spAutoFit/>
           </a:bodyPr>
           <a:lstStyle/>
           <a:p>
-            <a:pPr>
-              <a:defRPr sz="1000">
-                <a:solidFill>
-                  <a:srgbClr val="5A5A5A"/>
-                </a:solidFill>
-              </a:defRPr>
+            <a:pPr algn="l">
+              <a:lnSpc>
+                <a:spcPts val="1800"/>
+              </a:lnSpc>
             </a:pPr>
             <a:r>
+              <a:rPr lang="en-US" sz="1500" spc="-2">
+                <a:solidFill>
+                  <a:srgbClr val="000000"/>
+                </a:solidFill>
+                <a:latin typeface="PT Sans"/>
+                <a:ea typeface="PT Sans"/>
+                <a:cs typeface="PT Sans"/>
+                <a:sym typeface="PT Sans"/>
+              </a:rPr>
               <a:t>Advanced Customer Segmentation | Capstone Project    |    Slide 2</a:t>
             </a:r>
           </a:p>
@@ -4189,137 +6551,440 @@
 </file>
 
 <file path=ppt/slides/slide3.xml><?xml version="1.0" encoding="utf-8"?>
-<p:sld xmlns:a="http://schemas.openxmlformats.org/drawingml/2006/main" xmlns:p="http://schemas.openxmlformats.org/presentationml/2006/main" xmlns:r="http://schemas.openxmlformats.org/officeDocument/2006/relationships">
+<p:sld xmlns:p="http://schemas.openxmlformats.org/presentationml/2006/main" xmlns:a="http://schemas.openxmlformats.org/drawingml/2006/main" xmlns:r="http://schemas.openxmlformats.org/officeDocument/2006/relationships">
   <p:cSld>
+    <p:bg>
+      <p:bgPr>
+        <a:solidFill>
+          <a:srgbClr val="FEF8F5"/>
+        </a:solidFill>
+      </p:bgPr>
+    </p:bg>
     <p:spTree>
       <p:nvGrpSpPr>
         <p:cNvPr id="1" name=""/>
         <p:cNvGrpSpPr/>
         <p:nvPr/>
       </p:nvGrpSpPr>
-      <p:grpSpPr/>
+      <p:grpSpPr>
+        <a:xfrm>
+          <a:off x="0" y="0"/>
+          <a:ext cx="0" cy="0"/>
+          <a:chOff x="0" y="0"/>
+          <a:chExt cx="0" cy="0"/>
+        </a:xfrm>
+      </p:grpSpPr>
+      <p:grpSp>
+        <p:nvGrpSpPr>
+          <p:cNvPr name="Group 2" id="2"/>
+          <p:cNvGrpSpPr/>
+          <p:nvPr/>
+        </p:nvGrpSpPr>
+        <p:grpSpPr>
+          <a:xfrm rot="0">
+            <a:off x="2286002" y="1138428"/>
+            <a:ext cx="3874033" cy="7996428"/>
+            <a:chOff x="0" y="0"/>
+            <a:chExt cx="3673158" cy="7581798"/>
+          </a:xfrm>
+        </p:grpSpPr>
+        <p:sp>
+          <p:nvSpPr>
+            <p:cNvPr name="Freeform 3" id="3"/>
+            <p:cNvSpPr/>
+            <p:nvPr/>
+          </p:nvSpPr>
+          <p:spPr>
+            <a:xfrm flipH="false" flipV="false" rot="0">
+              <a:off x="0" y="0"/>
+              <a:ext cx="3673221" cy="7581773"/>
+            </a:xfrm>
+            <a:custGeom>
+              <a:avLst/>
+              <a:gdLst/>
+              <a:ahLst/>
+              <a:cxnLst/>
+              <a:rect r="r" b="b" t="t" l="l"/>
+              <a:pathLst>
+                <a:path h="7581773" w="3673221">
+                  <a:moveTo>
+                    <a:pt x="0" y="0"/>
+                  </a:moveTo>
+                  <a:lnTo>
+                    <a:pt x="3673221" y="0"/>
+                  </a:lnTo>
+                  <a:lnTo>
+                    <a:pt x="3673221" y="7581773"/>
+                  </a:lnTo>
+                  <a:lnTo>
+                    <a:pt x="0" y="7581773"/>
+                  </a:lnTo>
+                  <a:close/>
+                </a:path>
+              </a:pathLst>
+            </a:custGeom>
+            <a:solidFill>
+              <a:srgbClr val="DFA186"/>
+            </a:solidFill>
+          </p:spPr>
+        </p:sp>
+      </p:grpSp>
+      <p:grpSp>
+        <p:nvGrpSpPr>
+          <p:cNvPr name="Group 4" id="4"/>
+          <p:cNvGrpSpPr/>
+          <p:nvPr/>
+        </p:nvGrpSpPr>
+        <p:grpSpPr>
+          <a:xfrm rot="0">
+            <a:off x="15578853" y="1138428"/>
+            <a:ext cx="432054" cy="7996428"/>
+            <a:chOff x="0" y="0"/>
+            <a:chExt cx="409651" cy="7581798"/>
+          </a:xfrm>
+        </p:grpSpPr>
+        <p:sp>
+          <p:nvSpPr>
+            <p:cNvPr name="Freeform 5" id="5"/>
+            <p:cNvSpPr/>
+            <p:nvPr/>
+          </p:nvSpPr>
+          <p:spPr>
+            <a:xfrm flipH="false" flipV="false" rot="0">
+              <a:off x="0" y="0"/>
+              <a:ext cx="409702" cy="7581773"/>
+            </a:xfrm>
+            <a:custGeom>
+              <a:avLst/>
+              <a:gdLst/>
+              <a:ahLst/>
+              <a:cxnLst/>
+              <a:rect r="r" b="b" t="t" l="l"/>
+              <a:pathLst>
+                <a:path h="7581773" w="409702">
+                  <a:moveTo>
+                    <a:pt x="0" y="0"/>
+                  </a:moveTo>
+                  <a:lnTo>
+                    <a:pt x="409702" y="0"/>
+                  </a:lnTo>
+                  <a:lnTo>
+                    <a:pt x="409702" y="7581773"/>
+                  </a:lnTo>
+                  <a:lnTo>
+                    <a:pt x="0" y="7581773"/>
+                  </a:lnTo>
+                  <a:close/>
+                </a:path>
+              </a:pathLst>
+            </a:custGeom>
+            <a:solidFill>
+              <a:srgbClr val="948A82">
+                <a:alpha val="24706"/>
+              </a:srgbClr>
+            </a:solidFill>
+          </p:spPr>
+        </p:sp>
+      </p:grpSp>
+      <p:grpSp>
+        <p:nvGrpSpPr>
+          <p:cNvPr name="Group 6" id="6"/>
+          <p:cNvGrpSpPr/>
+          <p:nvPr/>
+        </p:nvGrpSpPr>
+        <p:grpSpPr>
+          <a:xfrm rot="0">
+            <a:off x="2570540" y="1685755"/>
+            <a:ext cx="3315923" cy="6901773"/>
+            <a:chOff x="0" y="0"/>
+            <a:chExt cx="3143987" cy="6543904"/>
+          </a:xfrm>
+        </p:grpSpPr>
+        <p:sp>
+          <p:nvSpPr>
+            <p:cNvPr name="Freeform 7" id="7"/>
+            <p:cNvSpPr/>
+            <p:nvPr/>
+          </p:nvSpPr>
+          <p:spPr>
+            <a:xfrm flipH="false" flipV="false" rot="0">
+              <a:off x="0" y="0"/>
+              <a:ext cx="3143982" cy="6543904"/>
+            </a:xfrm>
+            <a:custGeom>
+              <a:avLst/>
+              <a:gdLst/>
+              <a:ahLst/>
+              <a:cxnLst/>
+              <a:rect r="r" b="b" t="t" l="l"/>
+              <a:pathLst>
+                <a:path h="6543904" w="3143982">
+                  <a:moveTo>
+                    <a:pt x="0" y="0"/>
+                  </a:moveTo>
+                  <a:lnTo>
+                    <a:pt x="3143982" y="0"/>
+                  </a:lnTo>
+                  <a:lnTo>
+                    <a:pt x="3143982" y="6543904"/>
+                  </a:lnTo>
+                  <a:lnTo>
+                    <a:pt x="0" y="6543904"/>
+                  </a:lnTo>
+                  <a:close/>
+                </a:path>
+              </a:pathLst>
+            </a:custGeom>
+            <a:blipFill>
+              <a:blip r:embed="rId2">
+                <a:alphaModFix amt="0"/>
+              </a:blip>
+              <a:stretch>
+                <a:fillRect l="-217051" t="0" r="-217051" b="0"/>
+              </a:stretch>
+            </a:blipFill>
+          </p:spPr>
+        </p:sp>
+        <p:sp>
+          <p:nvSpPr>
+            <p:cNvPr name="TextBox 8" id="8"/>
+            <p:cNvSpPr txBox="true"/>
+            <p:nvPr/>
+          </p:nvSpPr>
+          <p:spPr>
+            <a:xfrm>
+              <a:off x="0" y="47625"/>
+              <a:ext cx="3143987" cy="6496279"/>
+            </a:xfrm>
+            <a:prstGeom prst="rect">
+              <a:avLst/>
+            </a:prstGeom>
+          </p:spPr>
+          <p:txBody>
+            <a:bodyPr anchor="ctr" rtlCol="false" tIns="0" lIns="0" bIns="0" rIns="0"/>
+            <a:lstStyle/>
+            <a:p>
+              <a:pPr algn="l">
+                <a:lnSpc>
+                  <a:spcPts val="4860"/>
+                </a:lnSpc>
+              </a:pPr>
+              <a:r>
+                <a:rPr lang="en-US" b="true" sz="4500" spc="-96">
+                  <a:solidFill>
+                    <a:srgbClr val="000000"/>
+                  </a:solidFill>
+                  <a:latin typeface="PT Sans Bold"/>
+                  <a:ea typeface="PT Sans Bold"/>
+                  <a:cs typeface="PT Sans Bold"/>
+                  <a:sym typeface="PT Sans Bold"/>
+                </a:rPr>
+                <a:t>Dataset Overview</a:t>
+              </a:r>
+            </a:p>
+          </p:txBody>
+        </p:sp>
+      </p:grpSp>
+      <p:grpSp>
+        <p:nvGrpSpPr>
+          <p:cNvPr name="Group 9" id="9"/>
+          <p:cNvGrpSpPr/>
+          <p:nvPr/>
+        </p:nvGrpSpPr>
+        <p:grpSpPr>
+          <a:xfrm rot="0">
+            <a:off x="6638928" y="1296162"/>
+            <a:ext cx="8229600" cy="7680960"/>
+            <a:chOff x="0" y="0"/>
+            <a:chExt cx="7802880" cy="7282688"/>
+          </a:xfrm>
+        </p:grpSpPr>
+        <p:sp>
+          <p:nvSpPr>
+            <p:cNvPr name="Freeform 10" id="10"/>
+            <p:cNvSpPr/>
+            <p:nvPr/>
+          </p:nvSpPr>
+          <p:spPr>
+            <a:xfrm flipH="false" flipV="false" rot="0">
+              <a:off x="0" y="0"/>
+              <a:ext cx="7802880" cy="7282688"/>
+            </a:xfrm>
+            <a:custGeom>
+              <a:avLst/>
+              <a:gdLst/>
+              <a:ahLst/>
+              <a:cxnLst/>
+              <a:rect r="r" b="b" t="t" l="l"/>
+              <a:pathLst>
+                <a:path h="7282688" w="7802880">
+                  <a:moveTo>
+                    <a:pt x="0" y="0"/>
+                  </a:moveTo>
+                  <a:lnTo>
+                    <a:pt x="7802880" y="0"/>
+                  </a:lnTo>
+                  <a:lnTo>
+                    <a:pt x="7802880" y="7282688"/>
+                  </a:lnTo>
+                  <a:lnTo>
+                    <a:pt x="0" y="7282688"/>
+                  </a:lnTo>
+                  <a:close/>
+                </a:path>
+              </a:pathLst>
+            </a:custGeom>
+            <a:blipFill>
+              <a:blip r:embed="rId2">
+                <a:alphaModFix amt="0"/>
+              </a:blip>
+              <a:stretch>
+                <a:fillRect l="-69749" t="0" r="-69749" b="0"/>
+              </a:stretch>
+            </a:blipFill>
+          </p:spPr>
+        </p:sp>
+        <p:sp>
+          <p:nvSpPr>
+            <p:cNvPr name="TextBox 11" id="11"/>
+            <p:cNvSpPr txBox="true"/>
+            <p:nvPr/>
+          </p:nvSpPr>
+          <p:spPr>
+            <a:xfrm>
+              <a:off x="0" y="28575"/>
+              <a:ext cx="7802880" cy="7254113"/>
+            </a:xfrm>
+            <a:prstGeom prst="rect">
+              <a:avLst/>
+            </a:prstGeom>
+          </p:spPr>
+          <p:txBody>
+            <a:bodyPr anchor="ctr" rtlCol="false" tIns="0" lIns="0" bIns="0" rIns="0"/>
+            <a:lstStyle/>
+            <a:p>
+              <a:pPr algn="l" marL="347472" indent="-173736" lvl="1">
+                <a:lnSpc>
+                  <a:spcPts val="2916"/>
+                </a:lnSpc>
+                <a:buFont typeface="Arial"/>
+                <a:buChar char="•"/>
+              </a:pPr>
+              <a:r>
+                <a:rPr lang="en-US" sz="2700" spc="-3">
+                  <a:solidFill>
+                    <a:srgbClr val="000000"/>
+                  </a:solidFill>
+                  <a:latin typeface="PT Sans"/>
+                  <a:ea typeface="PT Sans"/>
+                  <a:cs typeface="PT Sans"/>
+                  <a:sym typeface="PT Sans"/>
+                </a:rPr>
+                <a:t>Online Retail Dataset (5000+ transactions)</a:t>
+              </a:r>
+            </a:p>
+            <a:p>
+              <a:pPr algn="l" marL="1101852" indent="-367284" lvl="2">
+                <a:lnSpc>
+                  <a:spcPts val="2916"/>
+                </a:lnSpc>
+                <a:buFont typeface="Arial"/>
+                <a:buChar char="⚬"/>
+              </a:pPr>
+              <a:r>
+                <a:rPr lang="en-US" sz="2700" spc="-3">
+                  <a:solidFill>
+                    <a:srgbClr val="000000"/>
+                  </a:solidFill>
+                  <a:latin typeface="PT Sans"/>
+                  <a:ea typeface="PT Sans"/>
+                  <a:cs typeface="PT Sans"/>
+                  <a:sym typeface="PT Sans"/>
+                </a:rPr>
+                <a:t>Transactional purchase records</a:t>
+              </a:r>
+            </a:p>
+            <a:p>
+              <a:pPr algn="l" marL="1101852" indent="-367284" lvl="2">
+                <a:lnSpc>
+                  <a:spcPts val="2916"/>
+                </a:lnSpc>
+                <a:buFont typeface="Arial"/>
+                <a:buChar char="⚬"/>
+              </a:pPr>
+              <a:r>
+                <a:rPr lang="en-US" sz="2700" spc="-3">
+                  <a:solidFill>
+                    <a:srgbClr val="000000"/>
+                  </a:solidFill>
+                  <a:latin typeface="PT Sans"/>
+                  <a:ea typeface="PT Sans"/>
+                  <a:cs typeface="PT Sans"/>
+                  <a:sym typeface="PT Sans"/>
+                </a:rPr>
+                <a:t>Customer-level aggregation performed</a:t>
+              </a:r>
+            </a:p>
+            <a:p>
+              <a:pPr algn="l" marL="1101852" indent="-367284" lvl="2">
+                <a:lnSpc>
+                  <a:spcPts val="2916"/>
+                </a:lnSpc>
+                <a:buFont typeface="Arial"/>
+                <a:buChar char="⚬"/>
+              </a:pPr>
+              <a:r>
+                <a:rPr lang="en-US" sz="2700" spc="-3">
+                  <a:solidFill>
+                    <a:srgbClr val="000000"/>
+                  </a:solidFill>
+                  <a:latin typeface="PT Sans"/>
+                  <a:ea typeface="PT Sans"/>
+                  <a:cs typeface="PT Sans"/>
+                  <a:sym typeface="PT Sans"/>
+                </a:rPr>
+                <a:t>RFM behavioral modeling applied</a:t>
+              </a:r>
+            </a:p>
+          </p:txBody>
+        </p:sp>
+      </p:grpSp>
       <p:sp>
         <p:nvSpPr>
-          <p:cNvPr id="2" name="Title 1"/>
-          <p:cNvSpPr>
-            <a:spLocks noGrp="1"/>
-          </p:cNvSpPr>
-          <p:nvPr>
-            <p:ph type="title"/>
-          </p:nvPr>
-        </p:nvSpPr>
-        <p:spPr/>
-        <p:txBody>
-          <a:bodyPr/>
-          <a:lstStyle/>
-          <a:p>
-            <a:pPr>
-              <a:defRPr sz="3000" b="1">
-                <a:solidFill>
-                  <a:srgbClr val="203864"/>
-                </a:solidFill>
-              </a:defRPr>
-            </a:pPr>
-            <a:r>
-              <a:t>Dataset Overview</a:t>
-            </a:r>
-          </a:p>
-        </p:txBody>
-      </p:sp>
-      <p:sp>
-        <p:nvSpPr>
-          <p:cNvPr id="3" name="Content Placeholder 2"/>
-          <p:cNvSpPr>
-            <a:spLocks noGrp="1"/>
-          </p:cNvSpPr>
-          <p:nvPr>
-            <p:ph idx="1"/>
-          </p:nvPr>
-        </p:nvSpPr>
-        <p:spPr/>
-        <p:txBody>
-          <a:bodyPr/>
-          <a:lstStyle/>
-          <a:p>
-            <a:pPr>
-              <a:defRPr sz="1800">
-                <a:solidFill>
-                  <a:srgbClr val="5A5A5A"/>
-                </a:solidFill>
-              </a:defRPr>
-            </a:pPr>
-            <a:r>
-              <a:t>Online Retail Dataset (5000+ transactions)</a:t>
-            </a:r>
-          </a:p>
-          <a:p>
-            <a:pPr lvl="1">
-              <a:defRPr sz="1800">
-                <a:solidFill>
-                  <a:srgbClr val="5A5A5A"/>
-                </a:solidFill>
-              </a:defRPr>
-            </a:pPr>
-            <a:r>
-              <a:t>Transactional purchase records</a:t>
-            </a:r>
-          </a:p>
-          <a:p>
-            <a:pPr lvl="1">
-              <a:defRPr sz="1800">
-                <a:solidFill>
-                  <a:srgbClr val="5A5A5A"/>
-                </a:solidFill>
-              </a:defRPr>
-            </a:pPr>
-            <a:r>
-              <a:t>Customer-level aggregation performed</a:t>
-            </a:r>
-          </a:p>
-          <a:p>
-            <a:pPr lvl="1">
-              <a:defRPr sz="1800">
-                <a:solidFill>
-                  <a:srgbClr val="5A5A5A"/>
-                </a:solidFill>
-              </a:defRPr>
-            </a:pPr>
-            <a:r>
-              <a:t>RFM behavioral modeling applied</a:t>
-            </a:r>
-          </a:p>
-        </p:txBody>
-      </p:sp>
-      <p:sp>
-        <p:nvSpPr>
-          <p:cNvPr id="4" name="TextBox 3"/>
-          <p:cNvSpPr txBox="1"/>
+          <p:cNvPr name="TextBox 12" id="12"/>
+          <p:cNvSpPr txBox="true"/>
           <p:nvPr/>
         </p:nvSpPr>
         <p:spPr>
-          <a:xfrm>
-            <a:off x="457200" y="6217920"/>
-            <a:ext cx="8229600" cy="274320"/>
+          <a:xfrm rot="0">
+            <a:off x="3100388" y="9391174"/>
+            <a:ext cx="12087225" cy="282892"/>
           </a:xfrm>
           <a:prstGeom prst="rect">
             <a:avLst/>
           </a:prstGeom>
-          <a:noFill/>
         </p:spPr>
         <p:txBody>
-          <a:bodyPr wrap="none">
+          <a:bodyPr anchor="t" rtlCol="false" tIns="0" lIns="0" bIns="0" rIns="0">
             <a:spAutoFit/>
           </a:bodyPr>
           <a:lstStyle/>
           <a:p>
-            <a:pPr>
-              <a:defRPr sz="1000">
-                <a:solidFill>
-                  <a:srgbClr val="5A5A5A"/>
-                </a:solidFill>
-              </a:defRPr>
+            <a:pPr algn="l">
+              <a:lnSpc>
+                <a:spcPts val="1800"/>
+              </a:lnSpc>
             </a:pPr>
             <a:r>
+              <a:rPr lang="en-US" sz="1500" spc="-2">
+                <a:solidFill>
+                  <a:srgbClr val="000000"/>
+                </a:solidFill>
+                <a:latin typeface="PT Sans"/>
+                <a:ea typeface="PT Sans"/>
+                <a:cs typeface="PT Sans"/>
+                <a:sym typeface="PT Sans"/>
+              </a:rPr>
               <a:t>Advanced Customer Segmentation | Capstone Project    |    Slide 3</a:t>
             </a:r>
           </a:p>
@@ -4334,137 +6999,440 @@
 </file>
 
 <file path=ppt/slides/slide4.xml><?xml version="1.0" encoding="utf-8"?>
-<p:sld xmlns:a="http://schemas.openxmlformats.org/drawingml/2006/main" xmlns:p="http://schemas.openxmlformats.org/presentationml/2006/main" xmlns:r="http://schemas.openxmlformats.org/officeDocument/2006/relationships">
+<p:sld xmlns:p="http://schemas.openxmlformats.org/presentationml/2006/main" xmlns:a="http://schemas.openxmlformats.org/drawingml/2006/main" xmlns:r="http://schemas.openxmlformats.org/officeDocument/2006/relationships">
   <p:cSld>
+    <p:bg>
+      <p:bgPr>
+        <a:solidFill>
+          <a:srgbClr val="FEF8F5"/>
+        </a:solidFill>
+      </p:bgPr>
+    </p:bg>
     <p:spTree>
       <p:nvGrpSpPr>
         <p:cNvPr id="1" name=""/>
         <p:cNvGrpSpPr/>
         <p:nvPr/>
       </p:nvGrpSpPr>
-      <p:grpSpPr/>
+      <p:grpSpPr>
+        <a:xfrm>
+          <a:off x="0" y="0"/>
+          <a:ext cx="0" cy="0"/>
+          <a:chOff x="0" y="0"/>
+          <a:chExt cx="0" cy="0"/>
+        </a:xfrm>
+      </p:grpSpPr>
+      <p:grpSp>
+        <p:nvGrpSpPr>
+          <p:cNvPr name="Group 2" id="2"/>
+          <p:cNvGrpSpPr/>
+          <p:nvPr/>
+        </p:nvGrpSpPr>
+        <p:grpSpPr>
+          <a:xfrm rot="0">
+            <a:off x="2286002" y="1138428"/>
+            <a:ext cx="3874033" cy="7996428"/>
+            <a:chOff x="0" y="0"/>
+            <a:chExt cx="3673158" cy="7581798"/>
+          </a:xfrm>
+        </p:grpSpPr>
+        <p:sp>
+          <p:nvSpPr>
+            <p:cNvPr name="Freeform 3" id="3"/>
+            <p:cNvSpPr/>
+            <p:nvPr/>
+          </p:nvSpPr>
+          <p:spPr>
+            <a:xfrm flipH="false" flipV="false" rot="0">
+              <a:off x="0" y="0"/>
+              <a:ext cx="3673221" cy="7581773"/>
+            </a:xfrm>
+            <a:custGeom>
+              <a:avLst/>
+              <a:gdLst/>
+              <a:ahLst/>
+              <a:cxnLst/>
+              <a:rect r="r" b="b" t="t" l="l"/>
+              <a:pathLst>
+                <a:path h="7581773" w="3673221">
+                  <a:moveTo>
+                    <a:pt x="0" y="0"/>
+                  </a:moveTo>
+                  <a:lnTo>
+                    <a:pt x="3673221" y="0"/>
+                  </a:lnTo>
+                  <a:lnTo>
+                    <a:pt x="3673221" y="7581773"/>
+                  </a:lnTo>
+                  <a:lnTo>
+                    <a:pt x="0" y="7581773"/>
+                  </a:lnTo>
+                  <a:close/>
+                </a:path>
+              </a:pathLst>
+            </a:custGeom>
+            <a:solidFill>
+              <a:srgbClr val="DFA186"/>
+            </a:solidFill>
+          </p:spPr>
+        </p:sp>
+      </p:grpSp>
+      <p:grpSp>
+        <p:nvGrpSpPr>
+          <p:cNvPr name="Group 4" id="4"/>
+          <p:cNvGrpSpPr/>
+          <p:nvPr/>
+        </p:nvGrpSpPr>
+        <p:grpSpPr>
+          <a:xfrm rot="0">
+            <a:off x="15578853" y="1138428"/>
+            <a:ext cx="432054" cy="7996428"/>
+            <a:chOff x="0" y="0"/>
+            <a:chExt cx="409651" cy="7581798"/>
+          </a:xfrm>
+        </p:grpSpPr>
+        <p:sp>
+          <p:nvSpPr>
+            <p:cNvPr name="Freeform 5" id="5"/>
+            <p:cNvSpPr/>
+            <p:nvPr/>
+          </p:nvSpPr>
+          <p:spPr>
+            <a:xfrm flipH="false" flipV="false" rot="0">
+              <a:off x="0" y="0"/>
+              <a:ext cx="409702" cy="7581773"/>
+            </a:xfrm>
+            <a:custGeom>
+              <a:avLst/>
+              <a:gdLst/>
+              <a:ahLst/>
+              <a:cxnLst/>
+              <a:rect r="r" b="b" t="t" l="l"/>
+              <a:pathLst>
+                <a:path h="7581773" w="409702">
+                  <a:moveTo>
+                    <a:pt x="0" y="0"/>
+                  </a:moveTo>
+                  <a:lnTo>
+                    <a:pt x="409702" y="0"/>
+                  </a:lnTo>
+                  <a:lnTo>
+                    <a:pt x="409702" y="7581773"/>
+                  </a:lnTo>
+                  <a:lnTo>
+                    <a:pt x="0" y="7581773"/>
+                  </a:lnTo>
+                  <a:close/>
+                </a:path>
+              </a:pathLst>
+            </a:custGeom>
+            <a:solidFill>
+              <a:srgbClr val="948A82">
+                <a:alpha val="24706"/>
+              </a:srgbClr>
+            </a:solidFill>
+          </p:spPr>
+        </p:sp>
+      </p:grpSp>
+      <p:grpSp>
+        <p:nvGrpSpPr>
+          <p:cNvPr name="Group 6" id="6"/>
+          <p:cNvGrpSpPr/>
+          <p:nvPr/>
+        </p:nvGrpSpPr>
+        <p:grpSpPr>
+          <a:xfrm rot="0">
+            <a:off x="2570540" y="1685755"/>
+            <a:ext cx="3315923" cy="6901773"/>
+            <a:chOff x="0" y="0"/>
+            <a:chExt cx="3143987" cy="6543904"/>
+          </a:xfrm>
+        </p:grpSpPr>
+        <p:sp>
+          <p:nvSpPr>
+            <p:cNvPr name="Freeform 7" id="7"/>
+            <p:cNvSpPr/>
+            <p:nvPr/>
+          </p:nvSpPr>
+          <p:spPr>
+            <a:xfrm flipH="false" flipV="false" rot="0">
+              <a:off x="0" y="0"/>
+              <a:ext cx="3143982" cy="6543904"/>
+            </a:xfrm>
+            <a:custGeom>
+              <a:avLst/>
+              <a:gdLst/>
+              <a:ahLst/>
+              <a:cxnLst/>
+              <a:rect r="r" b="b" t="t" l="l"/>
+              <a:pathLst>
+                <a:path h="6543904" w="3143982">
+                  <a:moveTo>
+                    <a:pt x="0" y="0"/>
+                  </a:moveTo>
+                  <a:lnTo>
+                    <a:pt x="3143982" y="0"/>
+                  </a:lnTo>
+                  <a:lnTo>
+                    <a:pt x="3143982" y="6543904"/>
+                  </a:lnTo>
+                  <a:lnTo>
+                    <a:pt x="0" y="6543904"/>
+                  </a:lnTo>
+                  <a:close/>
+                </a:path>
+              </a:pathLst>
+            </a:custGeom>
+            <a:blipFill>
+              <a:blip r:embed="rId2">
+                <a:alphaModFix amt="0"/>
+              </a:blip>
+              <a:stretch>
+                <a:fillRect l="-217051" t="0" r="-217051" b="0"/>
+              </a:stretch>
+            </a:blipFill>
+          </p:spPr>
+        </p:sp>
+        <p:sp>
+          <p:nvSpPr>
+            <p:cNvPr name="TextBox 8" id="8"/>
+            <p:cNvSpPr txBox="true"/>
+            <p:nvPr/>
+          </p:nvSpPr>
+          <p:spPr>
+            <a:xfrm>
+              <a:off x="0" y="47625"/>
+              <a:ext cx="3143987" cy="6496279"/>
+            </a:xfrm>
+            <a:prstGeom prst="rect">
+              <a:avLst/>
+            </a:prstGeom>
+          </p:spPr>
+          <p:txBody>
+            <a:bodyPr anchor="ctr" rtlCol="false" tIns="0" lIns="0" bIns="0" rIns="0"/>
+            <a:lstStyle/>
+            <a:p>
+              <a:pPr algn="l">
+                <a:lnSpc>
+                  <a:spcPts val="4860"/>
+                </a:lnSpc>
+              </a:pPr>
+              <a:r>
+                <a:rPr lang="en-US" b="true" sz="4500" spc="-96">
+                  <a:solidFill>
+                    <a:srgbClr val="000000"/>
+                  </a:solidFill>
+                  <a:latin typeface="PT Sans Bold"/>
+                  <a:ea typeface="PT Sans Bold"/>
+                  <a:cs typeface="PT Sans Bold"/>
+                  <a:sym typeface="PT Sans Bold"/>
+                </a:rPr>
+                <a:t>Data Preprocessing Strategy</a:t>
+              </a:r>
+            </a:p>
+          </p:txBody>
+        </p:sp>
+      </p:grpSp>
+      <p:grpSp>
+        <p:nvGrpSpPr>
+          <p:cNvPr name="Group 9" id="9"/>
+          <p:cNvGrpSpPr/>
+          <p:nvPr/>
+        </p:nvGrpSpPr>
+        <p:grpSpPr>
+          <a:xfrm rot="0">
+            <a:off x="6638928" y="1296162"/>
+            <a:ext cx="8229600" cy="7680960"/>
+            <a:chOff x="0" y="0"/>
+            <a:chExt cx="7802880" cy="7282688"/>
+          </a:xfrm>
+        </p:grpSpPr>
+        <p:sp>
+          <p:nvSpPr>
+            <p:cNvPr name="Freeform 10" id="10"/>
+            <p:cNvSpPr/>
+            <p:nvPr/>
+          </p:nvSpPr>
+          <p:spPr>
+            <a:xfrm flipH="false" flipV="false" rot="0">
+              <a:off x="0" y="0"/>
+              <a:ext cx="7802880" cy="7282688"/>
+            </a:xfrm>
+            <a:custGeom>
+              <a:avLst/>
+              <a:gdLst/>
+              <a:ahLst/>
+              <a:cxnLst/>
+              <a:rect r="r" b="b" t="t" l="l"/>
+              <a:pathLst>
+                <a:path h="7282688" w="7802880">
+                  <a:moveTo>
+                    <a:pt x="0" y="0"/>
+                  </a:moveTo>
+                  <a:lnTo>
+                    <a:pt x="7802880" y="0"/>
+                  </a:lnTo>
+                  <a:lnTo>
+                    <a:pt x="7802880" y="7282688"/>
+                  </a:lnTo>
+                  <a:lnTo>
+                    <a:pt x="0" y="7282688"/>
+                  </a:lnTo>
+                  <a:close/>
+                </a:path>
+              </a:pathLst>
+            </a:custGeom>
+            <a:blipFill>
+              <a:blip r:embed="rId2">
+                <a:alphaModFix amt="0"/>
+              </a:blip>
+              <a:stretch>
+                <a:fillRect l="-69749" t="0" r="-69749" b="0"/>
+              </a:stretch>
+            </a:blipFill>
+          </p:spPr>
+        </p:sp>
+        <p:sp>
+          <p:nvSpPr>
+            <p:cNvPr name="TextBox 11" id="11"/>
+            <p:cNvSpPr txBox="true"/>
+            <p:nvPr/>
+          </p:nvSpPr>
+          <p:spPr>
+            <a:xfrm>
+              <a:off x="0" y="28575"/>
+              <a:ext cx="7802880" cy="7254113"/>
+            </a:xfrm>
+            <a:prstGeom prst="rect">
+              <a:avLst/>
+            </a:prstGeom>
+          </p:spPr>
+          <p:txBody>
+            <a:bodyPr anchor="ctr" rtlCol="false" tIns="0" lIns="0" bIns="0" rIns="0"/>
+            <a:lstStyle/>
+            <a:p>
+              <a:pPr algn="l" marL="347472" indent="-173736" lvl="1">
+                <a:lnSpc>
+                  <a:spcPts val="2916"/>
+                </a:lnSpc>
+                <a:buFont typeface="Arial"/>
+                <a:buChar char="•"/>
+              </a:pPr>
+              <a:r>
+                <a:rPr lang="en-US" sz="2700" spc="-3">
+                  <a:solidFill>
+                    <a:srgbClr val="000000"/>
+                  </a:solidFill>
+                  <a:latin typeface="PT Sans"/>
+                  <a:ea typeface="PT Sans"/>
+                  <a:cs typeface="PT Sans"/>
+                  <a:sym typeface="PT Sans"/>
+                </a:rPr>
+                <a:t>Removed missing Customer IDs</a:t>
+              </a:r>
+            </a:p>
+            <a:p>
+              <a:pPr algn="l" marL="1101852" indent="-367284" lvl="2">
+                <a:lnSpc>
+                  <a:spcPts val="2916"/>
+                </a:lnSpc>
+                <a:buFont typeface="Arial"/>
+                <a:buChar char="⚬"/>
+              </a:pPr>
+              <a:r>
+                <a:rPr lang="en-US" sz="2700" spc="-3">
+                  <a:solidFill>
+                    <a:srgbClr val="000000"/>
+                  </a:solidFill>
+                  <a:latin typeface="PT Sans"/>
+                  <a:ea typeface="PT Sans"/>
+                  <a:cs typeface="PT Sans"/>
+                  <a:sym typeface="PT Sans"/>
+                </a:rPr>
+                <a:t>Eliminated invalid and negative transactions</a:t>
+              </a:r>
+            </a:p>
+            <a:p>
+              <a:pPr algn="l" marL="1101852" indent="-367284" lvl="2">
+                <a:lnSpc>
+                  <a:spcPts val="2916"/>
+                </a:lnSpc>
+                <a:buFont typeface="Arial"/>
+                <a:buChar char="⚬"/>
+              </a:pPr>
+              <a:r>
+                <a:rPr lang="en-US" sz="2700" spc="-3">
+                  <a:solidFill>
+                    <a:srgbClr val="000000"/>
+                  </a:solidFill>
+                  <a:latin typeface="PT Sans"/>
+                  <a:ea typeface="PT Sans"/>
+                  <a:cs typeface="PT Sans"/>
+                  <a:sym typeface="PT Sans"/>
+                </a:rPr>
+                <a:t>Outlier treatment using statistical thresholds</a:t>
+              </a:r>
+            </a:p>
+            <a:p>
+              <a:pPr algn="l" marL="1101852" indent="-367284" lvl="2">
+                <a:lnSpc>
+                  <a:spcPts val="2916"/>
+                </a:lnSpc>
+                <a:buFont typeface="Arial"/>
+                <a:buChar char="⚬"/>
+              </a:pPr>
+              <a:r>
+                <a:rPr lang="en-US" sz="2700" spc="-3">
+                  <a:solidFill>
+                    <a:srgbClr val="000000"/>
+                  </a:solidFill>
+                  <a:latin typeface="PT Sans"/>
+                  <a:ea typeface="PT Sans"/>
+                  <a:cs typeface="PT Sans"/>
+                  <a:sym typeface="PT Sans"/>
+                </a:rPr>
+                <a:t>Feature scaling via StandardScaler</a:t>
+              </a:r>
+            </a:p>
+          </p:txBody>
+        </p:sp>
+      </p:grpSp>
       <p:sp>
         <p:nvSpPr>
-          <p:cNvPr id="2" name="Title 1"/>
-          <p:cNvSpPr>
-            <a:spLocks noGrp="1"/>
-          </p:cNvSpPr>
-          <p:nvPr>
-            <p:ph type="title"/>
-          </p:nvPr>
-        </p:nvSpPr>
-        <p:spPr/>
-        <p:txBody>
-          <a:bodyPr/>
-          <a:lstStyle/>
-          <a:p>
-            <a:pPr>
-              <a:defRPr sz="3000" b="1">
-                <a:solidFill>
-                  <a:srgbClr val="203864"/>
-                </a:solidFill>
-              </a:defRPr>
-            </a:pPr>
-            <a:r>
-              <a:t>Data Preprocessing Strategy</a:t>
-            </a:r>
-          </a:p>
-        </p:txBody>
-      </p:sp>
-      <p:sp>
-        <p:nvSpPr>
-          <p:cNvPr id="3" name="Content Placeholder 2"/>
-          <p:cNvSpPr>
-            <a:spLocks noGrp="1"/>
-          </p:cNvSpPr>
-          <p:nvPr>
-            <p:ph idx="1"/>
-          </p:nvPr>
-        </p:nvSpPr>
-        <p:spPr/>
-        <p:txBody>
-          <a:bodyPr/>
-          <a:lstStyle/>
-          <a:p>
-            <a:pPr>
-              <a:defRPr sz="1800">
-                <a:solidFill>
-                  <a:srgbClr val="5A5A5A"/>
-                </a:solidFill>
-              </a:defRPr>
-            </a:pPr>
-            <a:r>
-              <a:t>Removed missing Customer IDs</a:t>
-            </a:r>
-          </a:p>
-          <a:p>
-            <a:pPr lvl="1">
-              <a:defRPr sz="1800">
-                <a:solidFill>
-                  <a:srgbClr val="5A5A5A"/>
-                </a:solidFill>
-              </a:defRPr>
-            </a:pPr>
-            <a:r>
-              <a:t>Eliminated invalid and negative transactions</a:t>
-            </a:r>
-          </a:p>
-          <a:p>
-            <a:pPr lvl="1">
-              <a:defRPr sz="1800">
-                <a:solidFill>
-                  <a:srgbClr val="5A5A5A"/>
-                </a:solidFill>
-              </a:defRPr>
-            </a:pPr>
-            <a:r>
-              <a:t>Outlier treatment using statistical thresholds</a:t>
-            </a:r>
-          </a:p>
-          <a:p>
-            <a:pPr lvl="1">
-              <a:defRPr sz="1800">
-                <a:solidFill>
-                  <a:srgbClr val="5A5A5A"/>
-                </a:solidFill>
-              </a:defRPr>
-            </a:pPr>
-            <a:r>
-              <a:t>Feature scaling via StandardScaler</a:t>
-            </a:r>
-          </a:p>
-        </p:txBody>
-      </p:sp>
-      <p:sp>
-        <p:nvSpPr>
-          <p:cNvPr id="4" name="TextBox 3"/>
-          <p:cNvSpPr txBox="1"/>
+          <p:cNvPr name="TextBox 12" id="12"/>
+          <p:cNvSpPr txBox="true"/>
           <p:nvPr/>
         </p:nvSpPr>
         <p:spPr>
-          <a:xfrm>
-            <a:off x="457200" y="6217920"/>
-            <a:ext cx="8229600" cy="274320"/>
+          <a:xfrm rot="0">
+            <a:off x="3100388" y="9391174"/>
+            <a:ext cx="12087225" cy="282892"/>
           </a:xfrm>
           <a:prstGeom prst="rect">
             <a:avLst/>
           </a:prstGeom>
-          <a:noFill/>
         </p:spPr>
         <p:txBody>
-          <a:bodyPr wrap="none">
+          <a:bodyPr anchor="t" rtlCol="false" tIns="0" lIns="0" bIns="0" rIns="0">
             <a:spAutoFit/>
           </a:bodyPr>
           <a:lstStyle/>
           <a:p>
-            <a:pPr>
-              <a:defRPr sz="1000">
-                <a:solidFill>
-                  <a:srgbClr val="5A5A5A"/>
-                </a:solidFill>
-              </a:defRPr>
+            <a:pPr algn="l">
+              <a:lnSpc>
+                <a:spcPts val="1800"/>
+              </a:lnSpc>
             </a:pPr>
             <a:r>
+              <a:rPr lang="en-US" sz="1500" spc="-2">
+                <a:solidFill>
+                  <a:srgbClr val="000000"/>
+                </a:solidFill>
+                <a:latin typeface="PT Sans"/>
+                <a:ea typeface="PT Sans"/>
+                <a:cs typeface="PT Sans"/>
+                <a:sym typeface="PT Sans"/>
+              </a:rPr>
               <a:t>Advanced Customer Segmentation | Capstone Project    |    Slide 4</a:t>
             </a:r>
           </a:p>
@@ -4479,137 +7447,440 @@
 </file>
 
 <file path=ppt/slides/slide5.xml><?xml version="1.0" encoding="utf-8"?>
-<p:sld xmlns:a="http://schemas.openxmlformats.org/drawingml/2006/main" xmlns:p="http://schemas.openxmlformats.org/presentationml/2006/main" xmlns:r="http://schemas.openxmlformats.org/officeDocument/2006/relationships">
+<p:sld xmlns:p="http://schemas.openxmlformats.org/presentationml/2006/main" xmlns:a="http://schemas.openxmlformats.org/drawingml/2006/main" xmlns:r="http://schemas.openxmlformats.org/officeDocument/2006/relationships">
   <p:cSld>
+    <p:bg>
+      <p:bgPr>
+        <a:solidFill>
+          <a:srgbClr val="FEF8F5"/>
+        </a:solidFill>
+      </p:bgPr>
+    </p:bg>
     <p:spTree>
       <p:nvGrpSpPr>
         <p:cNvPr id="1" name=""/>
         <p:cNvGrpSpPr/>
         <p:nvPr/>
       </p:nvGrpSpPr>
-      <p:grpSpPr/>
+      <p:grpSpPr>
+        <a:xfrm>
+          <a:off x="0" y="0"/>
+          <a:ext cx="0" cy="0"/>
+          <a:chOff x="0" y="0"/>
+          <a:chExt cx="0" cy="0"/>
+        </a:xfrm>
+      </p:grpSpPr>
+      <p:grpSp>
+        <p:nvGrpSpPr>
+          <p:cNvPr name="Group 2" id="2"/>
+          <p:cNvGrpSpPr/>
+          <p:nvPr/>
+        </p:nvGrpSpPr>
+        <p:grpSpPr>
+          <a:xfrm rot="0">
+            <a:off x="2286002" y="1138428"/>
+            <a:ext cx="3874033" cy="7996428"/>
+            <a:chOff x="0" y="0"/>
+            <a:chExt cx="3673158" cy="7581798"/>
+          </a:xfrm>
+        </p:grpSpPr>
+        <p:sp>
+          <p:nvSpPr>
+            <p:cNvPr name="Freeform 3" id="3"/>
+            <p:cNvSpPr/>
+            <p:nvPr/>
+          </p:nvSpPr>
+          <p:spPr>
+            <a:xfrm flipH="false" flipV="false" rot="0">
+              <a:off x="0" y="0"/>
+              <a:ext cx="3673221" cy="7581773"/>
+            </a:xfrm>
+            <a:custGeom>
+              <a:avLst/>
+              <a:gdLst/>
+              <a:ahLst/>
+              <a:cxnLst/>
+              <a:rect r="r" b="b" t="t" l="l"/>
+              <a:pathLst>
+                <a:path h="7581773" w="3673221">
+                  <a:moveTo>
+                    <a:pt x="0" y="0"/>
+                  </a:moveTo>
+                  <a:lnTo>
+                    <a:pt x="3673221" y="0"/>
+                  </a:lnTo>
+                  <a:lnTo>
+                    <a:pt x="3673221" y="7581773"/>
+                  </a:lnTo>
+                  <a:lnTo>
+                    <a:pt x="0" y="7581773"/>
+                  </a:lnTo>
+                  <a:close/>
+                </a:path>
+              </a:pathLst>
+            </a:custGeom>
+            <a:solidFill>
+              <a:srgbClr val="DFA186"/>
+            </a:solidFill>
+          </p:spPr>
+        </p:sp>
+      </p:grpSp>
+      <p:grpSp>
+        <p:nvGrpSpPr>
+          <p:cNvPr name="Group 4" id="4"/>
+          <p:cNvGrpSpPr/>
+          <p:nvPr/>
+        </p:nvGrpSpPr>
+        <p:grpSpPr>
+          <a:xfrm rot="0">
+            <a:off x="15578853" y="1138428"/>
+            <a:ext cx="432054" cy="7996428"/>
+            <a:chOff x="0" y="0"/>
+            <a:chExt cx="409651" cy="7581798"/>
+          </a:xfrm>
+        </p:grpSpPr>
+        <p:sp>
+          <p:nvSpPr>
+            <p:cNvPr name="Freeform 5" id="5"/>
+            <p:cNvSpPr/>
+            <p:nvPr/>
+          </p:nvSpPr>
+          <p:spPr>
+            <a:xfrm flipH="false" flipV="false" rot="0">
+              <a:off x="0" y="0"/>
+              <a:ext cx="409702" cy="7581773"/>
+            </a:xfrm>
+            <a:custGeom>
+              <a:avLst/>
+              <a:gdLst/>
+              <a:ahLst/>
+              <a:cxnLst/>
+              <a:rect r="r" b="b" t="t" l="l"/>
+              <a:pathLst>
+                <a:path h="7581773" w="409702">
+                  <a:moveTo>
+                    <a:pt x="0" y="0"/>
+                  </a:moveTo>
+                  <a:lnTo>
+                    <a:pt x="409702" y="0"/>
+                  </a:lnTo>
+                  <a:lnTo>
+                    <a:pt x="409702" y="7581773"/>
+                  </a:lnTo>
+                  <a:lnTo>
+                    <a:pt x="0" y="7581773"/>
+                  </a:lnTo>
+                  <a:close/>
+                </a:path>
+              </a:pathLst>
+            </a:custGeom>
+            <a:solidFill>
+              <a:srgbClr val="948A82">
+                <a:alpha val="24706"/>
+              </a:srgbClr>
+            </a:solidFill>
+          </p:spPr>
+        </p:sp>
+      </p:grpSp>
+      <p:grpSp>
+        <p:nvGrpSpPr>
+          <p:cNvPr name="Group 6" id="6"/>
+          <p:cNvGrpSpPr/>
+          <p:nvPr/>
+        </p:nvGrpSpPr>
+        <p:grpSpPr>
+          <a:xfrm rot="0">
+            <a:off x="2570540" y="1685755"/>
+            <a:ext cx="3315923" cy="6901773"/>
+            <a:chOff x="0" y="0"/>
+            <a:chExt cx="3143987" cy="6543904"/>
+          </a:xfrm>
+        </p:grpSpPr>
+        <p:sp>
+          <p:nvSpPr>
+            <p:cNvPr name="Freeform 7" id="7"/>
+            <p:cNvSpPr/>
+            <p:nvPr/>
+          </p:nvSpPr>
+          <p:spPr>
+            <a:xfrm flipH="false" flipV="false" rot="0">
+              <a:off x="0" y="0"/>
+              <a:ext cx="3143982" cy="6543904"/>
+            </a:xfrm>
+            <a:custGeom>
+              <a:avLst/>
+              <a:gdLst/>
+              <a:ahLst/>
+              <a:cxnLst/>
+              <a:rect r="r" b="b" t="t" l="l"/>
+              <a:pathLst>
+                <a:path h="6543904" w="3143982">
+                  <a:moveTo>
+                    <a:pt x="0" y="0"/>
+                  </a:moveTo>
+                  <a:lnTo>
+                    <a:pt x="3143982" y="0"/>
+                  </a:lnTo>
+                  <a:lnTo>
+                    <a:pt x="3143982" y="6543904"/>
+                  </a:lnTo>
+                  <a:lnTo>
+                    <a:pt x="0" y="6543904"/>
+                  </a:lnTo>
+                  <a:close/>
+                </a:path>
+              </a:pathLst>
+            </a:custGeom>
+            <a:blipFill>
+              <a:blip r:embed="rId2">
+                <a:alphaModFix amt="0"/>
+              </a:blip>
+              <a:stretch>
+                <a:fillRect l="-217051" t="0" r="-217051" b="0"/>
+              </a:stretch>
+            </a:blipFill>
+          </p:spPr>
+        </p:sp>
+        <p:sp>
+          <p:nvSpPr>
+            <p:cNvPr name="TextBox 8" id="8"/>
+            <p:cNvSpPr txBox="true"/>
+            <p:nvPr/>
+          </p:nvSpPr>
+          <p:spPr>
+            <a:xfrm>
+              <a:off x="0" y="47625"/>
+              <a:ext cx="3143987" cy="6496279"/>
+            </a:xfrm>
+            <a:prstGeom prst="rect">
+              <a:avLst/>
+            </a:prstGeom>
+          </p:spPr>
+          <p:txBody>
+            <a:bodyPr anchor="ctr" rtlCol="false" tIns="0" lIns="0" bIns="0" rIns="0"/>
+            <a:lstStyle/>
+            <a:p>
+              <a:pPr algn="l">
+                <a:lnSpc>
+                  <a:spcPts val="4860"/>
+                </a:lnSpc>
+              </a:pPr>
+              <a:r>
+                <a:rPr lang="en-US" b="true" sz="4500" spc="-96">
+                  <a:solidFill>
+                    <a:srgbClr val="000000"/>
+                  </a:solidFill>
+                  <a:latin typeface="PT Sans Bold"/>
+                  <a:ea typeface="PT Sans Bold"/>
+                  <a:cs typeface="PT Sans Bold"/>
+                  <a:sym typeface="PT Sans Bold"/>
+                </a:rPr>
+                <a:t>Feature Engineering Framework</a:t>
+              </a:r>
+            </a:p>
+          </p:txBody>
+        </p:sp>
+      </p:grpSp>
+      <p:grpSp>
+        <p:nvGrpSpPr>
+          <p:cNvPr name="Group 9" id="9"/>
+          <p:cNvGrpSpPr/>
+          <p:nvPr/>
+        </p:nvGrpSpPr>
+        <p:grpSpPr>
+          <a:xfrm rot="0">
+            <a:off x="6638928" y="1296162"/>
+            <a:ext cx="8229600" cy="7680960"/>
+            <a:chOff x="0" y="0"/>
+            <a:chExt cx="7802880" cy="7282688"/>
+          </a:xfrm>
+        </p:grpSpPr>
+        <p:sp>
+          <p:nvSpPr>
+            <p:cNvPr name="Freeform 10" id="10"/>
+            <p:cNvSpPr/>
+            <p:nvPr/>
+          </p:nvSpPr>
+          <p:spPr>
+            <a:xfrm flipH="false" flipV="false" rot="0">
+              <a:off x="0" y="0"/>
+              <a:ext cx="7802880" cy="7282688"/>
+            </a:xfrm>
+            <a:custGeom>
+              <a:avLst/>
+              <a:gdLst/>
+              <a:ahLst/>
+              <a:cxnLst/>
+              <a:rect r="r" b="b" t="t" l="l"/>
+              <a:pathLst>
+                <a:path h="7282688" w="7802880">
+                  <a:moveTo>
+                    <a:pt x="0" y="0"/>
+                  </a:moveTo>
+                  <a:lnTo>
+                    <a:pt x="7802880" y="0"/>
+                  </a:lnTo>
+                  <a:lnTo>
+                    <a:pt x="7802880" y="7282688"/>
+                  </a:lnTo>
+                  <a:lnTo>
+                    <a:pt x="0" y="7282688"/>
+                  </a:lnTo>
+                  <a:close/>
+                </a:path>
+              </a:pathLst>
+            </a:custGeom>
+            <a:blipFill>
+              <a:blip r:embed="rId2">
+                <a:alphaModFix amt="0"/>
+              </a:blip>
+              <a:stretch>
+                <a:fillRect l="-69749" t="0" r="-69749" b="0"/>
+              </a:stretch>
+            </a:blipFill>
+          </p:spPr>
+        </p:sp>
+        <p:sp>
+          <p:nvSpPr>
+            <p:cNvPr name="TextBox 11" id="11"/>
+            <p:cNvSpPr txBox="true"/>
+            <p:nvPr/>
+          </p:nvSpPr>
+          <p:spPr>
+            <a:xfrm>
+              <a:off x="0" y="28575"/>
+              <a:ext cx="7802880" cy="7254113"/>
+            </a:xfrm>
+            <a:prstGeom prst="rect">
+              <a:avLst/>
+            </a:prstGeom>
+          </p:spPr>
+          <p:txBody>
+            <a:bodyPr anchor="ctr" rtlCol="false" tIns="0" lIns="0" bIns="0" rIns="0"/>
+            <a:lstStyle/>
+            <a:p>
+              <a:pPr algn="l" marL="347472" indent="-173736" lvl="1">
+                <a:lnSpc>
+                  <a:spcPts val="2916"/>
+                </a:lnSpc>
+                <a:buFont typeface="Arial"/>
+                <a:buChar char="•"/>
+              </a:pPr>
+              <a:r>
+                <a:rPr lang="en-US" sz="2700" spc="-3">
+                  <a:solidFill>
+                    <a:srgbClr val="000000"/>
+                  </a:solidFill>
+                  <a:latin typeface="PT Sans"/>
+                  <a:ea typeface="PT Sans"/>
+                  <a:cs typeface="PT Sans"/>
+                  <a:sym typeface="PT Sans"/>
+                </a:rPr>
+                <a:t>Recency – Days since last purchase</a:t>
+              </a:r>
+            </a:p>
+            <a:p>
+              <a:pPr algn="l" marL="1101852" indent="-367284" lvl="2">
+                <a:lnSpc>
+                  <a:spcPts val="2916"/>
+                </a:lnSpc>
+                <a:buFont typeface="Arial"/>
+                <a:buChar char="⚬"/>
+              </a:pPr>
+              <a:r>
+                <a:rPr lang="en-US" sz="2700" spc="-3">
+                  <a:solidFill>
+                    <a:srgbClr val="000000"/>
+                  </a:solidFill>
+                  <a:latin typeface="PT Sans"/>
+                  <a:ea typeface="PT Sans"/>
+                  <a:cs typeface="PT Sans"/>
+                  <a:sym typeface="PT Sans"/>
+                </a:rPr>
+                <a:t>Frequency – Transaction count</a:t>
+              </a:r>
+            </a:p>
+            <a:p>
+              <a:pPr algn="l" marL="1101852" indent="-367284" lvl="2">
+                <a:lnSpc>
+                  <a:spcPts val="2916"/>
+                </a:lnSpc>
+                <a:buFont typeface="Arial"/>
+                <a:buChar char="⚬"/>
+              </a:pPr>
+              <a:r>
+                <a:rPr lang="en-US" sz="2700" spc="-3">
+                  <a:solidFill>
+                    <a:srgbClr val="000000"/>
+                  </a:solidFill>
+                  <a:latin typeface="PT Sans"/>
+                  <a:ea typeface="PT Sans"/>
+                  <a:cs typeface="PT Sans"/>
+                  <a:sym typeface="PT Sans"/>
+                </a:rPr>
+                <a:t>Monetary – Revenue contribution</a:t>
+              </a:r>
+            </a:p>
+            <a:p>
+              <a:pPr algn="l" marL="1101852" indent="-367284" lvl="2">
+                <a:lnSpc>
+                  <a:spcPts val="2916"/>
+                </a:lnSpc>
+                <a:buFont typeface="Arial"/>
+                <a:buChar char="⚬"/>
+              </a:pPr>
+              <a:r>
+                <a:rPr lang="en-US" sz="2700" spc="-3">
+                  <a:solidFill>
+                    <a:srgbClr val="000000"/>
+                  </a:solidFill>
+                  <a:latin typeface="PT Sans"/>
+                  <a:ea typeface="PT Sans"/>
+                  <a:cs typeface="PT Sans"/>
+                  <a:sym typeface="PT Sans"/>
+                </a:rPr>
+                <a:t>Derived metrics: Avg order value, product diversity</a:t>
+              </a:r>
+            </a:p>
+          </p:txBody>
+        </p:sp>
+      </p:grpSp>
       <p:sp>
         <p:nvSpPr>
-          <p:cNvPr id="2" name="Title 1"/>
-          <p:cNvSpPr>
-            <a:spLocks noGrp="1"/>
-          </p:cNvSpPr>
-          <p:nvPr>
-            <p:ph type="title"/>
-          </p:nvPr>
-        </p:nvSpPr>
-        <p:spPr/>
-        <p:txBody>
-          <a:bodyPr/>
-          <a:lstStyle/>
-          <a:p>
-            <a:pPr>
-              <a:defRPr sz="3000" b="1">
-                <a:solidFill>
-                  <a:srgbClr val="203864"/>
-                </a:solidFill>
-              </a:defRPr>
-            </a:pPr>
-            <a:r>
-              <a:t>Feature Engineering Framework</a:t>
-            </a:r>
-          </a:p>
-        </p:txBody>
-      </p:sp>
-      <p:sp>
-        <p:nvSpPr>
-          <p:cNvPr id="3" name="Content Placeholder 2"/>
-          <p:cNvSpPr>
-            <a:spLocks noGrp="1"/>
-          </p:cNvSpPr>
-          <p:nvPr>
-            <p:ph idx="1"/>
-          </p:nvPr>
-        </p:nvSpPr>
-        <p:spPr/>
-        <p:txBody>
-          <a:bodyPr/>
-          <a:lstStyle/>
-          <a:p>
-            <a:pPr>
-              <a:defRPr sz="1800">
-                <a:solidFill>
-                  <a:srgbClr val="5A5A5A"/>
-                </a:solidFill>
-              </a:defRPr>
-            </a:pPr>
-            <a:r>
-              <a:t>Recency – Days since last purchase</a:t>
-            </a:r>
-          </a:p>
-          <a:p>
-            <a:pPr lvl="1">
-              <a:defRPr sz="1800">
-                <a:solidFill>
-                  <a:srgbClr val="5A5A5A"/>
-                </a:solidFill>
-              </a:defRPr>
-            </a:pPr>
-            <a:r>
-              <a:t>Frequency – Transaction count</a:t>
-            </a:r>
-          </a:p>
-          <a:p>
-            <a:pPr lvl="1">
-              <a:defRPr sz="1800">
-                <a:solidFill>
-                  <a:srgbClr val="5A5A5A"/>
-                </a:solidFill>
-              </a:defRPr>
-            </a:pPr>
-            <a:r>
-              <a:t>Monetary – Revenue contribution</a:t>
-            </a:r>
-          </a:p>
-          <a:p>
-            <a:pPr lvl="1">
-              <a:defRPr sz="1800">
-                <a:solidFill>
-                  <a:srgbClr val="5A5A5A"/>
-                </a:solidFill>
-              </a:defRPr>
-            </a:pPr>
-            <a:r>
-              <a:t>Derived metrics: Avg order value, product diversity</a:t>
-            </a:r>
-          </a:p>
-        </p:txBody>
-      </p:sp>
-      <p:sp>
-        <p:nvSpPr>
-          <p:cNvPr id="4" name="TextBox 3"/>
-          <p:cNvSpPr txBox="1"/>
+          <p:cNvPr name="TextBox 12" id="12"/>
+          <p:cNvSpPr txBox="true"/>
           <p:nvPr/>
         </p:nvSpPr>
         <p:spPr>
-          <a:xfrm>
-            <a:off x="457200" y="6217920"/>
-            <a:ext cx="8229600" cy="274320"/>
+          <a:xfrm rot="0">
+            <a:off x="3100388" y="9391174"/>
+            <a:ext cx="12087225" cy="282892"/>
           </a:xfrm>
           <a:prstGeom prst="rect">
             <a:avLst/>
           </a:prstGeom>
-          <a:noFill/>
         </p:spPr>
         <p:txBody>
-          <a:bodyPr wrap="none">
+          <a:bodyPr anchor="t" rtlCol="false" tIns="0" lIns="0" bIns="0" rIns="0">
             <a:spAutoFit/>
           </a:bodyPr>
           <a:lstStyle/>
           <a:p>
-            <a:pPr>
-              <a:defRPr sz="1000">
-                <a:solidFill>
-                  <a:srgbClr val="5A5A5A"/>
-                </a:solidFill>
-              </a:defRPr>
+            <a:pPr algn="l">
+              <a:lnSpc>
+                <a:spcPts val="1800"/>
+              </a:lnSpc>
             </a:pPr>
             <a:r>
+              <a:rPr lang="en-US" sz="1500" spc="-2">
+                <a:solidFill>
+                  <a:srgbClr val="000000"/>
+                </a:solidFill>
+                <a:latin typeface="PT Sans"/>
+                <a:ea typeface="PT Sans"/>
+                <a:cs typeface="PT Sans"/>
+                <a:sym typeface="PT Sans"/>
+              </a:rPr>
               <a:t>Advanced Customer Segmentation | Capstone Project    |    Slide 5</a:t>
             </a:r>
           </a:p>
@@ -4624,137 +7895,440 @@
 </file>
 
 <file path=ppt/slides/slide6.xml><?xml version="1.0" encoding="utf-8"?>
-<p:sld xmlns:a="http://schemas.openxmlformats.org/drawingml/2006/main" xmlns:p="http://schemas.openxmlformats.org/presentationml/2006/main" xmlns:r="http://schemas.openxmlformats.org/officeDocument/2006/relationships">
+<p:sld xmlns:p="http://schemas.openxmlformats.org/presentationml/2006/main" xmlns:a="http://schemas.openxmlformats.org/drawingml/2006/main" xmlns:r="http://schemas.openxmlformats.org/officeDocument/2006/relationships">
   <p:cSld>
+    <p:bg>
+      <p:bgPr>
+        <a:solidFill>
+          <a:srgbClr val="FEF8F5"/>
+        </a:solidFill>
+      </p:bgPr>
+    </p:bg>
     <p:spTree>
       <p:nvGrpSpPr>
         <p:cNvPr id="1" name=""/>
         <p:cNvGrpSpPr/>
         <p:nvPr/>
       </p:nvGrpSpPr>
-      <p:grpSpPr/>
+      <p:grpSpPr>
+        <a:xfrm>
+          <a:off x="0" y="0"/>
+          <a:ext cx="0" cy="0"/>
+          <a:chOff x="0" y="0"/>
+          <a:chExt cx="0" cy="0"/>
+        </a:xfrm>
+      </p:grpSpPr>
+      <p:grpSp>
+        <p:nvGrpSpPr>
+          <p:cNvPr name="Group 2" id="2"/>
+          <p:cNvGrpSpPr/>
+          <p:nvPr/>
+        </p:nvGrpSpPr>
+        <p:grpSpPr>
+          <a:xfrm rot="0">
+            <a:off x="2286002" y="1138428"/>
+            <a:ext cx="3874033" cy="7996428"/>
+            <a:chOff x="0" y="0"/>
+            <a:chExt cx="3673158" cy="7581798"/>
+          </a:xfrm>
+        </p:grpSpPr>
+        <p:sp>
+          <p:nvSpPr>
+            <p:cNvPr name="Freeform 3" id="3"/>
+            <p:cNvSpPr/>
+            <p:nvPr/>
+          </p:nvSpPr>
+          <p:spPr>
+            <a:xfrm flipH="false" flipV="false" rot="0">
+              <a:off x="0" y="0"/>
+              <a:ext cx="3673221" cy="7581773"/>
+            </a:xfrm>
+            <a:custGeom>
+              <a:avLst/>
+              <a:gdLst/>
+              <a:ahLst/>
+              <a:cxnLst/>
+              <a:rect r="r" b="b" t="t" l="l"/>
+              <a:pathLst>
+                <a:path h="7581773" w="3673221">
+                  <a:moveTo>
+                    <a:pt x="0" y="0"/>
+                  </a:moveTo>
+                  <a:lnTo>
+                    <a:pt x="3673221" y="0"/>
+                  </a:lnTo>
+                  <a:lnTo>
+                    <a:pt x="3673221" y="7581773"/>
+                  </a:lnTo>
+                  <a:lnTo>
+                    <a:pt x="0" y="7581773"/>
+                  </a:lnTo>
+                  <a:close/>
+                </a:path>
+              </a:pathLst>
+            </a:custGeom>
+            <a:solidFill>
+              <a:srgbClr val="DFA186"/>
+            </a:solidFill>
+          </p:spPr>
+        </p:sp>
+      </p:grpSp>
+      <p:grpSp>
+        <p:nvGrpSpPr>
+          <p:cNvPr name="Group 4" id="4"/>
+          <p:cNvGrpSpPr/>
+          <p:nvPr/>
+        </p:nvGrpSpPr>
+        <p:grpSpPr>
+          <a:xfrm rot="0">
+            <a:off x="15578853" y="1138428"/>
+            <a:ext cx="432054" cy="7996428"/>
+            <a:chOff x="0" y="0"/>
+            <a:chExt cx="409651" cy="7581798"/>
+          </a:xfrm>
+        </p:grpSpPr>
+        <p:sp>
+          <p:nvSpPr>
+            <p:cNvPr name="Freeform 5" id="5"/>
+            <p:cNvSpPr/>
+            <p:nvPr/>
+          </p:nvSpPr>
+          <p:spPr>
+            <a:xfrm flipH="false" flipV="false" rot="0">
+              <a:off x="0" y="0"/>
+              <a:ext cx="409702" cy="7581773"/>
+            </a:xfrm>
+            <a:custGeom>
+              <a:avLst/>
+              <a:gdLst/>
+              <a:ahLst/>
+              <a:cxnLst/>
+              <a:rect r="r" b="b" t="t" l="l"/>
+              <a:pathLst>
+                <a:path h="7581773" w="409702">
+                  <a:moveTo>
+                    <a:pt x="0" y="0"/>
+                  </a:moveTo>
+                  <a:lnTo>
+                    <a:pt x="409702" y="0"/>
+                  </a:lnTo>
+                  <a:lnTo>
+                    <a:pt x="409702" y="7581773"/>
+                  </a:lnTo>
+                  <a:lnTo>
+                    <a:pt x="0" y="7581773"/>
+                  </a:lnTo>
+                  <a:close/>
+                </a:path>
+              </a:pathLst>
+            </a:custGeom>
+            <a:solidFill>
+              <a:srgbClr val="948A82">
+                <a:alpha val="24706"/>
+              </a:srgbClr>
+            </a:solidFill>
+          </p:spPr>
+        </p:sp>
+      </p:grpSp>
+      <p:grpSp>
+        <p:nvGrpSpPr>
+          <p:cNvPr name="Group 6" id="6"/>
+          <p:cNvGrpSpPr/>
+          <p:nvPr/>
+        </p:nvGrpSpPr>
+        <p:grpSpPr>
+          <a:xfrm rot="0">
+            <a:off x="2570540" y="1685755"/>
+            <a:ext cx="3315923" cy="6901773"/>
+            <a:chOff x="0" y="0"/>
+            <a:chExt cx="3143987" cy="6543904"/>
+          </a:xfrm>
+        </p:grpSpPr>
+        <p:sp>
+          <p:nvSpPr>
+            <p:cNvPr name="Freeform 7" id="7"/>
+            <p:cNvSpPr/>
+            <p:nvPr/>
+          </p:nvSpPr>
+          <p:spPr>
+            <a:xfrm flipH="false" flipV="false" rot="0">
+              <a:off x="0" y="0"/>
+              <a:ext cx="3143982" cy="6543904"/>
+            </a:xfrm>
+            <a:custGeom>
+              <a:avLst/>
+              <a:gdLst/>
+              <a:ahLst/>
+              <a:cxnLst/>
+              <a:rect r="r" b="b" t="t" l="l"/>
+              <a:pathLst>
+                <a:path h="6543904" w="3143982">
+                  <a:moveTo>
+                    <a:pt x="0" y="0"/>
+                  </a:moveTo>
+                  <a:lnTo>
+                    <a:pt x="3143982" y="0"/>
+                  </a:lnTo>
+                  <a:lnTo>
+                    <a:pt x="3143982" y="6543904"/>
+                  </a:lnTo>
+                  <a:lnTo>
+                    <a:pt x="0" y="6543904"/>
+                  </a:lnTo>
+                  <a:close/>
+                </a:path>
+              </a:pathLst>
+            </a:custGeom>
+            <a:blipFill>
+              <a:blip r:embed="rId2">
+                <a:alphaModFix amt="0"/>
+              </a:blip>
+              <a:stretch>
+                <a:fillRect l="-217051" t="0" r="-217051" b="0"/>
+              </a:stretch>
+            </a:blipFill>
+          </p:spPr>
+        </p:sp>
+        <p:sp>
+          <p:nvSpPr>
+            <p:cNvPr name="TextBox 8" id="8"/>
+            <p:cNvSpPr txBox="true"/>
+            <p:nvPr/>
+          </p:nvSpPr>
+          <p:spPr>
+            <a:xfrm>
+              <a:off x="0" y="47625"/>
+              <a:ext cx="3143987" cy="6496279"/>
+            </a:xfrm>
+            <a:prstGeom prst="rect">
+              <a:avLst/>
+            </a:prstGeom>
+          </p:spPr>
+          <p:txBody>
+            <a:bodyPr anchor="ctr" rtlCol="false" tIns="0" lIns="0" bIns="0" rIns="0"/>
+            <a:lstStyle/>
+            <a:p>
+              <a:pPr algn="l">
+                <a:lnSpc>
+                  <a:spcPts val="4860"/>
+                </a:lnSpc>
+              </a:pPr>
+              <a:r>
+                <a:rPr lang="en-US" b="true" sz="4500" spc="-96">
+                  <a:solidFill>
+                    <a:srgbClr val="000000"/>
+                  </a:solidFill>
+                  <a:latin typeface="PT Sans Bold"/>
+                  <a:ea typeface="PT Sans Bold"/>
+                  <a:cs typeface="PT Sans Bold"/>
+                  <a:sym typeface="PT Sans Bold"/>
+                </a:rPr>
+                <a:t>Clustering Algorithms Implemented</a:t>
+              </a:r>
+            </a:p>
+          </p:txBody>
+        </p:sp>
+      </p:grpSp>
+      <p:grpSp>
+        <p:nvGrpSpPr>
+          <p:cNvPr name="Group 9" id="9"/>
+          <p:cNvGrpSpPr/>
+          <p:nvPr/>
+        </p:nvGrpSpPr>
+        <p:grpSpPr>
+          <a:xfrm rot="0">
+            <a:off x="6638928" y="1296162"/>
+            <a:ext cx="8229600" cy="7680960"/>
+            <a:chOff x="0" y="0"/>
+            <a:chExt cx="7802880" cy="7282688"/>
+          </a:xfrm>
+        </p:grpSpPr>
+        <p:sp>
+          <p:nvSpPr>
+            <p:cNvPr name="Freeform 10" id="10"/>
+            <p:cNvSpPr/>
+            <p:nvPr/>
+          </p:nvSpPr>
+          <p:spPr>
+            <a:xfrm flipH="false" flipV="false" rot="0">
+              <a:off x="0" y="0"/>
+              <a:ext cx="7802880" cy="7282688"/>
+            </a:xfrm>
+            <a:custGeom>
+              <a:avLst/>
+              <a:gdLst/>
+              <a:ahLst/>
+              <a:cxnLst/>
+              <a:rect r="r" b="b" t="t" l="l"/>
+              <a:pathLst>
+                <a:path h="7282688" w="7802880">
+                  <a:moveTo>
+                    <a:pt x="0" y="0"/>
+                  </a:moveTo>
+                  <a:lnTo>
+                    <a:pt x="7802880" y="0"/>
+                  </a:lnTo>
+                  <a:lnTo>
+                    <a:pt x="7802880" y="7282688"/>
+                  </a:lnTo>
+                  <a:lnTo>
+                    <a:pt x="0" y="7282688"/>
+                  </a:lnTo>
+                  <a:close/>
+                </a:path>
+              </a:pathLst>
+            </a:custGeom>
+            <a:blipFill>
+              <a:blip r:embed="rId2">
+                <a:alphaModFix amt="0"/>
+              </a:blip>
+              <a:stretch>
+                <a:fillRect l="-69749" t="0" r="-69749" b="0"/>
+              </a:stretch>
+            </a:blipFill>
+          </p:spPr>
+        </p:sp>
+        <p:sp>
+          <p:nvSpPr>
+            <p:cNvPr name="TextBox 11" id="11"/>
+            <p:cNvSpPr txBox="true"/>
+            <p:nvPr/>
+          </p:nvSpPr>
+          <p:spPr>
+            <a:xfrm>
+              <a:off x="0" y="28575"/>
+              <a:ext cx="7802880" cy="7254113"/>
+            </a:xfrm>
+            <a:prstGeom prst="rect">
+              <a:avLst/>
+            </a:prstGeom>
+          </p:spPr>
+          <p:txBody>
+            <a:bodyPr anchor="ctr" rtlCol="false" tIns="0" lIns="0" bIns="0" rIns="0"/>
+            <a:lstStyle/>
+            <a:p>
+              <a:pPr algn="l" marL="347472" indent="-173736" lvl="1">
+                <a:lnSpc>
+                  <a:spcPts val="2916"/>
+                </a:lnSpc>
+                <a:buFont typeface="Arial"/>
+                <a:buChar char="•"/>
+              </a:pPr>
+              <a:r>
+                <a:rPr lang="en-US" sz="2700" spc="-3">
+                  <a:solidFill>
+                    <a:srgbClr val="000000"/>
+                  </a:solidFill>
+                  <a:latin typeface="PT Sans"/>
+                  <a:ea typeface="PT Sans"/>
+                  <a:cs typeface="PT Sans"/>
+                  <a:sym typeface="PT Sans"/>
+                </a:rPr>
+                <a:t>KMeans (Partition-based)</a:t>
+              </a:r>
+            </a:p>
+            <a:p>
+              <a:pPr algn="l" marL="1101852" indent="-367284" lvl="2">
+                <a:lnSpc>
+                  <a:spcPts val="2916"/>
+                </a:lnSpc>
+                <a:buFont typeface="Arial"/>
+                <a:buChar char="⚬"/>
+              </a:pPr>
+              <a:r>
+                <a:rPr lang="en-US" sz="2700" spc="-3">
+                  <a:solidFill>
+                    <a:srgbClr val="000000"/>
+                  </a:solidFill>
+                  <a:latin typeface="PT Sans"/>
+                  <a:ea typeface="PT Sans"/>
+                  <a:cs typeface="PT Sans"/>
+                  <a:sym typeface="PT Sans"/>
+                </a:rPr>
+                <a:t>Hierarchical (Agglomerative)</a:t>
+              </a:r>
+            </a:p>
+            <a:p>
+              <a:pPr algn="l" marL="1101852" indent="-367284" lvl="2">
+                <a:lnSpc>
+                  <a:spcPts val="2916"/>
+                </a:lnSpc>
+                <a:buFont typeface="Arial"/>
+                <a:buChar char="⚬"/>
+              </a:pPr>
+              <a:r>
+                <a:rPr lang="en-US" sz="2700" spc="-3">
+                  <a:solidFill>
+                    <a:srgbClr val="000000"/>
+                  </a:solidFill>
+                  <a:latin typeface="PT Sans"/>
+                  <a:ea typeface="PT Sans"/>
+                  <a:cs typeface="PT Sans"/>
+                  <a:sym typeface="PT Sans"/>
+                </a:rPr>
+                <a:t>DBSCAN (Density-based)</a:t>
+              </a:r>
+            </a:p>
+            <a:p>
+              <a:pPr algn="l" marL="1101852" indent="-367284" lvl="2">
+                <a:lnSpc>
+                  <a:spcPts val="2916"/>
+                </a:lnSpc>
+                <a:buFont typeface="Arial"/>
+                <a:buChar char="⚬"/>
+              </a:pPr>
+              <a:r>
+                <a:rPr lang="en-US" sz="2700" spc="-3">
+                  <a:solidFill>
+                    <a:srgbClr val="000000"/>
+                  </a:solidFill>
+                  <a:latin typeface="PT Sans"/>
+                  <a:ea typeface="PT Sans"/>
+                  <a:cs typeface="PT Sans"/>
+                  <a:sym typeface="PT Sans"/>
+                </a:rPr>
+                <a:t>Gaussian Mixture Model (Probabilistic)</a:t>
+              </a:r>
+            </a:p>
+          </p:txBody>
+        </p:sp>
+      </p:grpSp>
       <p:sp>
         <p:nvSpPr>
-          <p:cNvPr id="2" name="Title 1"/>
-          <p:cNvSpPr>
-            <a:spLocks noGrp="1"/>
-          </p:cNvSpPr>
-          <p:nvPr>
-            <p:ph type="title"/>
-          </p:nvPr>
-        </p:nvSpPr>
-        <p:spPr/>
-        <p:txBody>
-          <a:bodyPr/>
-          <a:lstStyle/>
-          <a:p>
-            <a:pPr>
-              <a:defRPr sz="3000" b="1">
-                <a:solidFill>
-                  <a:srgbClr val="203864"/>
-                </a:solidFill>
-              </a:defRPr>
-            </a:pPr>
-            <a:r>
-              <a:t>Clustering Algorithms Implemented</a:t>
-            </a:r>
-          </a:p>
-        </p:txBody>
-      </p:sp>
-      <p:sp>
-        <p:nvSpPr>
-          <p:cNvPr id="3" name="Content Placeholder 2"/>
-          <p:cNvSpPr>
-            <a:spLocks noGrp="1"/>
-          </p:cNvSpPr>
-          <p:nvPr>
-            <p:ph idx="1"/>
-          </p:nvPr>
-        </p:nvSpPr>
-        <p:spPr/>
-        <p:txBody>
-          <a:bodyPr/>
-          <a:lstStyle/>
-          <a:p>
-            <a:pPr>
-              <a:defRPr sz="1800">
-                <a:solidFill>
-                  <a:srgbClr val="5A5A5A"/>
-                </a:solidFill>
-              </a:defRPr>
-            </a:pPr>
-            <a:r>
-              <a:t>KMeans (Partition-based)</a:t>
-            </a:r>
-          </a:p>
-          <a:p>
-            <a:pPr lvl="1">
-              <a:defRPr sz="1800">
-                <a:solidFill>
-                  <a:srgbClr val="5A5A5A"/>
-                </a:solidFill>
-              </a:defRPr>
-            </a:pPr>
-            <a:r>
-              <a:t>Hierarchical (Agglomerative)</a:t>
-            </a:r>
-          </a:p>
-          <a:p>
-            <a:pPr lvl="1">
-              <a:defRPr sz="1800">
-                <a:solidFill>
-                  <a:srgbClr val="5A5A5A"/>
-                </a:solidFill>
-              </a:defRPr>
-            </a:pPr>
-            <a:r>
-              <a:t>DBSCAN (Density-based)</a:t>
-            </a:r>
-          </a:p>
-          <a:p>
-            <a:pPr lvl="1">
-              <a:defRPr sz="1800">
-                <a:solidFill>
-                  <a:srgbClr val="5A5A5A"/>
-                </a:solidFill>
-              </a:defRPr>
-            </a:pPr>
-            <a:r>
-              <a:t>Gaussian Mixture Model (Probabilistic)</a:t>
-            </a:r>
-          </a:p>
-        </p:txBody>
-      </p:sp>
-      <p:sp>
-        <p:nvSpPr>
-          <p:cNvPr id="4" name="TextBox 3"/>
-          <p:cNvSpPr txBox="1"/>
+          <p:cNvPr name="TextBox 12" id="12"/>
+          <p:cNvSpPr txBox="true"/>
           <p:nvPr/>
         </p:nvSpPr>
         <p:spPr>
-          <a:xfrm>
-            <a:off x="457200" y="6217920"/>
-            <a:ext cx="8229600" cy="274320"/>
+          <a:xfrm rot="0">
+            <a:off x="3100388" y="9391174"/>
+            <a:ext cx="12087225" cy="282892"/>
           </a:xfrm>
           <a:prstGeom prst="rect">
             <a:avLst/>
           </a:prstGeom>
-          <a:noFill/>
         </p:spPr>
         <p:txBody>
-          <a:bodyPr wrap="none">
+          <a:bodyPr anchor="t" rtlCol="false" tIns="0" lIns="0" bIns="0" rIns="0">
             <a:spAutoFit/>
           </a:bodyPr>
           <a:lstStyle/>
           <a:p>
-            <a:pPr>
-              <a:defRPr sz="1000">
-                <a:solidFill>
-                  <a:srgbClr val="5A5A5A"/>
-                </a:solidFill>
-              </a:defRPr>
+            <a:pPr algn="l">
+              <a:lnSpc>
+                <a:spcPts val="1800"/>
+              </a:lnSpc>
             </a:pPr>
             <a:r>
+              <a:rPr lang="en-US" sz="1500" spc="-2">
+                <a:solidFill>
+                  <a:srgbClr val="000000"/>
+                </a:solidFill>
+                <a:latin typeface="PT Sans"/>
+                <a:ea typeface="PT Sans"/>
+                <a:cs typeface="PT Sans"/>
+                <a:sym typeface="PT Sans"/>
+              </a:rPr>
               <a:t>Advanced Customer Segmentation | Capstone Project    |    Slide 6</a:t>
             </a:r>
           </a:p>
@@ -4769,137 +8343,440 @@
 </file>
 
 <file path=ppt/slides/slide7.xml><?xml version="1.0" encoding="utf-8"?>
-<p:sld xmlns:a="http://schemas.openxmlformats.org/drawingml/2006/main" xmlns:p="http://schemas.openxmlformats.org/presentationml/2006/main" xmlns:r="http://schemas.openxmlformats.org/officeDocument/2006/relationships">
+<p:sld xmlns:p="http://schemas.openxmlformats.org/presentationml/2006/main" xmlns:a="http://schemas.openxmlformats.org/drawingml/2006/main" xmlns:r="http://schemas.openxmlformats.org/officeDocument/2006/relationships">
   <p:cSld>
+    <p:bg>
+      <p:bgPr>
+        <a:solidFill>
+          <a:srgbClr val="FEF8F5"/>
+        </a:solidFill>
+      </p:bgPr>
+    </p:bg>
     <p:spTree>
       <p:nvGrpSpPr>
         <p:cNvPr id="1" name=""/>
         <p:cNvGrpSpPr/>
         <p:nvPr/>
       </p:nvGrpSpPr>
-      <p:grpSpPr/>
+      <p:grpSpPr>
+        <a:xfrm>
+          <a:off x="0" y="0"/>
+          <a:ext cx="0" cy="0"/>
+          <a:chOff x="0" y="0"/>
+          <a:chExt cx="0" cy="0"/>
+        </a:xfrm>
+      </p:grpSpPr>
+      <p:grpSp>
+        <p:nvGrpSpPr>
+          <p:cNvPr name="Group 2" id="2"/>
+          <p:cNvGrpSpPr/>
+          <p:nvPr/>
+        </p:nvGrpSpPr>
+        <p:grpSpPr>
+          <a:xfrm rot="0">
+            <a:off x="2286002" y="1138428"/>
+            <a:ext cx="3874033" cy="7996428"/>
+            <a:chOff x="0" y="0"/>
+            <a:chExt cx="3673158" cy="7581798"/>
+          </a:xfrm>
+        </p:grpSpPr>
+        <p:sp>
+          <p:nvSpPr>
+            <p:cNvPr name="Freeform 3" id="3"/>
+            <p:cNvSpPr/>
+            <p:nvPr/>
+          </p:nvSpPr>
+          <p:spPr>
+            <a:xfrm flipH="false" flipV="false" rot="0">
+              <a:off x="0" y="0"/>
+              <a:ext cx="3673221" cy="7581773"/>
+            </a:xfrm>
+            <a:custGeom>
+              <a:avLst/>
+              <a:gdLst/>
+              <a:ahLst/>
+              <a:cxnLst/>
+              <a:rect r="r" b="b" t="t" l="l"/>
+              <a:pathLst>
+                <a:path h="7581773" w="3673221">
+                  <a:moveTo>
+                    <a:pt x="0" y="0"/>
+                  </a:moveTo>
+                  <a:lnTo>
+                    <a:pt x="3673221" y="0"/>
+                  </a:lnTo>
+                  <a:lnTo>
+                    <a:pt x="3673221" y="7581773"/>
+                  </a:lnTo>
+                  <a:lnTo>
+                    <a:pt x="0" y="7581773"/>
+                  </a:lnTo>
+                  <a:close/>
+                </a:path>
+              </a:pathLst>
+            </a:custGeom>
+            <a:solidFill>
+              <a:srgbClr val="DFA186"/>
+            </a:solidFill>
+          </p:spPr>
+        </p:sp>
+      </p:grpSp>
+      <p:grpSp>
+        <p:nvGrpSpPr>
+          <p:cNvPr name="Group 4" id="4"/>
+          <p:cNvGrpSpPr/>
+          <p:nvPr/>
+        </p:nvGrpSpPr>
+        <p:grpSpPr>
+          <a:xfrm rot="0">
+            <a:off x="15578853" y="1138428"/>
+            <a:ext cx="432054" cy="7996428"/>
+            <a:chOff x="0" y="0"/>
+            <a:chExt cx="409651" cy="7581798"/>
+          </a:xfrm>
+        </p:grpSpPr>
+        <p:sp>
+          <p:nvSpPr>
+            <p:cNvPr name="Freeform 5" id="5"/>
+            <p:cNvSpPr/>
+            <p:nvPr/>
+          </p:nvSpPr>
+          <p:spPr>
+            <a:xfrm flipH="false" flipV="false" rot="0">
+              <a:off x="0" y="0"/>
+              <a:ext cx="409702" cy="7581773"/>
+            </a:xfrm>
+            <a:custGeom>
+              <a:avLst/>
+              <a:gdLst/>
+              <a:ahLst/>
+              <a:cxnLst/>
+              <a:rect r="r" b="b" t="t" l="l"/>
+              <a:pathLst>
+                <a:path h="7581773" w="409702">
+                  <a:moveTo>
+                    <a:pt x="0" y="0"/>
+                  </a:moveTo>
+                  <a:lnTo>
+                    <a:pt x="409702" y="0"/>
+                  </a:lnTo>
+                  <a:lnTo>
+                    <a:pt x="409702" y="7581773"/>
+                  </a:lnTo>
+                  <a:lnTo>
+                    <a:pt x="0" y="7581773"/>
+                  </a:lnTo>
+                  <a:close/>
+                </a:path>
+              </a:pathLst>
+            </a:custGeom>
+            <a:solidFill>
+              <a:srgbClr val="948A82">
+                <a:alpha val="24706"/>
+              </a:srgbClr>
+            </a:solidFill>
+          </p:spPr>
+        </p:sp>
+      </p:grpSp>
+      <p:grpSp>
+        <p:nvGrpSpPr>
+          <p:cNvPr name="Group 6" id="6"/>
+          <p:cNvGrpSpPr/>
+          <p:nvPr/>
+        </p:nvGrpSpPr>
+        <p:grpSpPr>
+          <a:xfrm rot="0">
+            <a:off x="2570540" y="1685755"/>
+            <a:ext cx="3315923" cy="6901773"/>
+            <a:chOff x="0" y="0"/>
+            <a:chExt cx="3143987" cy="6543904"/>
+          </a:xfrm>
+        </p:grpSpPr>
+        <p:sp>
+          <p:nvSpPr>
+            <p:cNvPr name="Freeform 7" id="7"/>
+            <p:cNvSpPr/>
+            <p:nvPr/>
+          </p:nvSpPr>
+          <p:spPr>
+            <a:xfrm flipH="false" flipV="false" rot="0">
+              <a:off x="0" y="0"/>
+              <a:ext cx="3143982" cy="6543904"/>
+            </a:xfrm>
+            <a:custGeom>
+              <a:avLst/>
+              <a:gdLst/>
+              <a:ahLst/>
+              <a:cxnLst/>
+              <a:rect r="r" b="b" t="t" l="l"/>
+              <a:pathLst>
+                <a:path h="6543904" w="3143982">
+                  <a:moveTo>
+                    <a:pt x="0" y="0"/>
+                  </a:moveTo>
+                  <a:lnTo>
+                    <a:pt x="3143982" y="0"/>
+                  </a:lnTo>
+                  <a:lnTo>
+                    <a:pt x="3143982" y="6543904"/>
+                  </a:lnTo>
+                  <a:lnTo>
+                    <a:pt x="0" y="6543904"/>
+                  </a:lnTo>
+                  <a:close/>
+                </a:path>
+              </a:pathLst>
+            </a:custGeom>
+            <a:blipFill>
+              <a:blip r:embed="rId2">
+                <a:alphaModFix amt="0"/>
+              </a:blip>
+              <a:stretch>
+                <a:fillRect l="-217051" t="0" r="-217051" b="0"/>
+              </a:stretch>
+            </a:blipFill>
+          </p:spPr>
+        </p:sp>
+        <p:sp>
+          <p:nvSpPr>
+            <p:cNvPr name="TextBox 8" id="8"/>
+            <p:cNvSpPr txBox="true"/>
+            <p:nvPr/>
+          </p:nvSpPr>
+          <p:spPr>
+            <a:xfrm>
+              <a:off x="0" y="47625"/>
+              <a:ext cx="3143987" cy="6496279"/>
+            </a:xfrm>
+            <a:prstGeom prst="rect">
+              <a:avLst/>
+            </a:prstGeom>
+          </p:spPr>
+          <p:txBody>
+            <a:bodyPr anchor="ctr" rtlCol="false" tIns="0" lIns="0" bIns="0" rIns="0"/>
+            <a:lstStyle/>
+            <a:p>
+              <a:pPr algn="l">
+                <a:lnSpc>
+                  <a:spcPts val="4860"/>
+                </a:lnSpc>
+              </a:pPr>
+              <a:r>
+                <a:rPr lang="en-US" b="true" sz="4500" spc="-96">
+                  <a:solidFill>
+                    <a:srgbClr val="000000"/>
+                  </a:solidFill>
+                  <a:latin typeface="PT Sans Bold"/>
+                  <a:ea typeface="PT Sans Bold"/>
+                  <a:cs typeface="PT Sans Bold"/>
+                  <a:sym typeface="PT Sans Bold"/>
+                </a:rPr>
+                <a:t>Cluster Optimization Strategy</a:t>
+              </a:r>
+            </a:p>
+          </p:txBody>
+        </p:sp>
+      </p:grpSp>
+      <p:grpSp>
+        <p:nvGrpSpPr>
+          <p:cNvPr name="Group 9" id="9"/>
+          <p:cNvGrpSpPr/>
+          <p:nvPr/>
+        </p:nvGrpSpPr>
+        <p:grpSpPr>
+          <a:xfrm rot="0">
+            <a:off x="6638928" y="1296162"/>
+            <a:ext cx="8229600" cy="7680960"/>
+            <a:chOff x="0" y="0"/>
+            <a:chExt cx="7802880" cy="7282688"/>
+          </a:xfrm>
+        </p:grpSpPr>
+        <p:sp>
+          <p:nvSpPr>
+            <p:cNvPr name="Freeform 10" id="10"/>
+            <p:cNvSpPr/>
+            <p:nvPr/>
+          </p:nvSpPr>
+          <p:spPr>
+            <a:xfrm flipH="false" flipV="false" rot="0">
+              <a:off x="0" y="0"/>
+              <a:ext cx="7802880" cy="7282688"/>
+            </a:xfrm>
+            <a:custGeom>
+              <a:avLst/>
+              <a:gdLst/>
+              <a:ahLst/>
+              <a:cxnLst/>
+              <a:rect r="r" b="b" t="t" l="l"/>
+              <a:pathLst>
+                <a:path h="7282688" w="7802880">
+                  <a:moveTo>
+                    <a:pt x="0" y="0"/>
+                  </a:moveTo>
+                  <a:lnTo>
+                    <a:pt x="7802880" y="0"/>
+                  </a:lnTo>
+                  <a:lnTo>
+                    <a:pt x="7802880" y="7282688"/>
+                  </a:lnTo>
+                  <a:lnTo>
+                    <a:pt x="0" y="7282688"/>
+                  </a:lnTo>
+                  <a:close/>
+                </a:path>
+              </a:pathLst>
+            </a:custGeom>
+            <a:blipFill>
+              <a:blip r:embed="rId2">
+                <a:alphaModFix amt="0"/>
+              </a:blip>
+              <a:stretch>
+                <a:fillRect l="-69749" t="0" r="-69749" b="0"/>
+              </a:stretch>
+            </a:blipFill>
+          </p:spPr>
+        </p:sp>
+        <p:sp>
+          <p:nvSpPr>
+            <p:cNvPr name="TextBox 11" id="11"/>
+            <p:cNvSpPr txBox="true"/>
+            <p:nvPr/>
+          </p:nvSpPr>
+          <p:spPr>
+            <a:xfrm>
+              <a:off x="0" y="28575"/>
+              <a:ext cx="7802880" cy="7254113"/>
+            </a:xfrm>
+            <a:prstGeom prst="rect">
+              <a:avLst/>
+            </a:prstGeom>
+          </p:spPr>
+          <p:txBody>
+            <a:bodyPr anchor="ctr" rtlCol="false" tIns="0" lIns="0" bIns="0" rIns="0"/>
+            <a:lstStyle/>
+            <a:p>
+              <a:pPr algn="l" marL="347472" indent="-173736" lvl="1">
+                <a:lnSpc>
+                  <a:spcPts val="2916"/>
+                </a:lnSpc>
+                <a:buFont typeface="Arial"/>
+                <a:buChar char="•"/>
+              </a:pPr>
+              <a:r>
+                <a:rPr lang="en-US" sz="2700" spc="-3">
+                  <a:solidFill>
+                    <a:srgbClr val="000000"/>
+                  </a:solidFill>
+                  <a:latin typeface="PT Sans"/>
+                  <a:ea typeface="PT Sans"/>
+                  <a:cs typeface="PT Sans"/>
+                  <a:sym typeface="PT Sans"/>
+                </a:rPr>
+                <a:t>Elbow Method for optimal K detection</a:t>
+              </a:r>
+            </a:p>
+            <a:p>
+              <a:pPr algn="l" marL="1101852" indent="-367284" lvl="2">
+                <a:lnSpc>
+                  <a:spcPts val="2916"/>
+                </a:lnSpc>
+                <a:buFont typeface="Arial"/>
+                <a:buChar char="⚬"/>
+              </a:pPr>
+              <a:r>
+                <a:rPr lang="en-US" sz="2700" spc="-3">
+                  <a:solidFill>
+                    <a:srgbClr val="000000"/>
+                  </a:solidFill>
+                  <a:latin typeface="PT Sans"/>
+                  <a:ea typeface="PT Sans"/>
+                  <a:cs typeface="PT Sans"/>
+                  <a:sym typeface="PT Sans"/>
+                </a:rPr>
+                <a:t>Silhouette Score for cluster separation</a:t>
+              </a:r>
+            </a:p>
+            <a:p>
+              <a:pPr algn="l" marL="1101852" indent="-367284" lvl="2">
+                <a:lnSpc>
+                  <a:spcPts val="2916"/>
+                </a:lnSpc>
+                <a:buFont typeface="Arial"/>
+                <a:buChar char="⚬"/>
+              </a:pPr>
+              <a:r>
+                <a:rPr lang="en-US" sz="2700" spc="-3">
+                  <a:solidFill>
+                    <a:srgbClr val="000000"/>
+                  </a:solidFill>
+                  <a:latin typeface="PT Sans"/>
+                  <a:ea typeface="PT Sans"/>
+                  <a:cs typeface="PT Sans"/>
+                  <a:sym typeface="PT Sans"/>
+                </a:rPr>
+                <a:t>Davies-Bouldin Index for compactness evaluation</a:t>
+              </a:r>
+            </a:p>
+            <a:p>
+              <a:pPr algn="l" marL="1101852" indent="-367284" lvl="2">
+                <a:lnSpc>
+                  <a:spcPts val="2916"/>
+                </a:lnSpc>
+                <a:buFont typeface="Arial"/>
+                <a:buChar char="⚬"/>
+              </a:pPr>
+              <a:r>
+                <a:rPr lang="en-US" sz="2700" spc="-3">
+                  <a:solidFill>
+                    <a:srgbClr val="000000"/>
+                  </a:solidFill>
+                  <a:latin typeface="PT Sans"/>
+                  <a:ea typeface="PT Sans"/>
+                  <a:cs typeface="PT Sans"/>
+                  <a:sym typeface="PT Sans"/>
+                </a:rPr>
+                <a:t>K=3 selected based on balanced metrics</a:t>
+              </a:r>
+            </a:p>
+          </p:txBody>
+        </p:sp>
+      </p:grpSp>
       <p:sp>
         <p:nvSpPr>
-          <p:cNvPr id="2" name="Title 1"/>
-          <p:cNvSpPr>
-            <a:spLocks noGrp="1"/>
-          </p:cNvSpPr>
-          <p:nvPr>
-            <p:ph type="title"/>
-          </p:nvPr>
-        </p:nvSpPr>
-        <p:spPr/>
-        <p:txBody>
-          <a:bodyPr/>
-          <a:lstStyle/>
-          <a:p>
-            <a:pPr>
-              <a:defRPr sz="3000" b="1">
-                <a:solidFill>
-                  <a:srgbClr val="203864"/>
-                </a:solidFill>
-              </a:defRPr>
-            </a:pPr>
-            <a:r>
-              <a:t>Cluster Optimization Strategy</a:t>
-            </a:r>
-          </a:p>
-        </p:txBody>
-      </p:sp>
-      <p:sp>
-        <p:nvSpPr>
-          <p:cNvPr id="3" name="Content Placeholder 2"/>
-          <p:cNvSpPr>
-            <a:spLocks noGrp="1"/>
-          </p:cNvSpPr>
-          <p:nvPr>
-            <p:ph idx="1"/>
-          </p:nvPr>
-        </p:nvSpPr>
-        <p:spPr/>
-        <p:txBody>
-          <a:bodyPr/>
-          <a:lstStyle/>
-          <a:p>
-            <a:pPr>
-              <a:defRPr sz="1800">
-                <a:solidFill>
-                  <a:srgbClr val="5A5A5A"/>
-                </a:solidFill>
-              </a:defRPr>
-            </a:pPr>
-            <a:r>
-              <a:t>Elbow Method for optimal K detection</a:t>
-            </a:r>
-          </a:p>
-          <a:p>
-            <a:pPr lvl="1">
-              <a:defRPr sz="1800">
-                <a:solidFill>
-                  <a:srgbClr val="5A5A5A"/>
-                </a:solidFill>
-              </a:defRPr>
-            </a:pPr>
-            <a:r>
-              <a:t>Silhouette Score for cluster separation</a:t>
-            </a:r>
-          </a:p>
-          <a:p>
-            <a:pPr lvl="1">
-              <a:defRPr sz="1800">
-                <a:solidFill>
-                  <a:srgbClr val="5A5A5A"/>
-                </a:solidFill>
-              </a:defRPr>
-            </a:pPr>
-            <a:r>
-              <a:t>Davies-Bouldin Index for compactness evaluation</a:t>
-            </a:r>
-          </a:p>
-          <a:p>
-            <a:pPr lvl="1">
-              <a:defRPr sz="1800">
-                <a:solidFill>
-                  <a:srgbClr val="5A5A5A"/>
-                </a:solidFill>
-              </a:defRPr>
-            </a:pPr>
-            <a:r>
-              <a:t>K=3 selected based on balanced metrics</a:t>
-            </a:r>
-          </a:p>
-        </p:txBody>
-      </p:sp>
-      <p:sp>
-        <p:nvSpPr>
-          <p:cNvPr id="4" name="TextBox 3"/>
-          <p:cNvSpPr txBox="1"/>
+          <p:cNvPr name="TextBox 12" id="12"/>
+          <p:cNvSpPr txBox="true"/>
           <p:nvPr/>
         </p:nvSpPr>
         <p:spPr>
-          <a:xfrm>
-            <a:off x="457200" y="6217920"/>
-            <a:ext cx="8229600" cy="274320"/>
+          <a:xfrm rot="0">
+            <a:off x="3100388" y="9391174"/>
+            <a:ext cx="12087225" cy="282892"/>
           </a:xfrm>
           <a:prstGeom prst="rect">
             <a:avLst/>
           </a:prstGeom>
-          <a:noFill/>
         </p:spPr>
         <p:txBody>
-          <a:bodyPr wrap="none">
+          <a:bodyPr anchor="t" rtlCol="false" tIns="0" lIns="0" bIns="0" rIns="0">
             <a:spAutoFit/>
           </a:bodyPr>
           <a:lstStyle/>
           <a:p>
-            <a:pPr>
-              <a:defRPr sz="1000">
-                <a:solidFill>
-                  <a:srgbClr val="5A5A5A"/>
-                </a:solidFill>
-              </a:defRPr>
+            <a:pPr algn="l">
+              <a:lnSpc>
+                <a:spcPts val="1800"/>
+              </a:lnSpc>
             </a:pPr>
             <a:r>
+              <a:rPr lang="en-US" sz="1500" spc="-2">
+                <a:solidFill>
+                  <a:srgbClr val="000000"/>
+                </a:solidFill>
+                <a:latin typeface="PT Sans"/>
+                <a:ea typeface="PT Sans"/>
+                <a:cs typeface="PT Sans"/>
+                <a:sym typeface="PT Sans"/>
+              </a:rPr>
               <a:t>Advanced Customer Segmentation | Capstone Project    |    Slide 7</a:t>
             </a:r>
           </a:p>
@@ -4914,137 +8791,440 @@
 </file>
 
 <file path=ppt/slides/slide8.xml><?xml version="1.0" encoding="utf-8"?>
-<p:sld xmlns:a="http://schemas.openxmlformats.org/drawingml/2006/main" xmlns:p="http://schemas.openxmlformats.org/presentationml/2006/main" xmlns:r="http://schemas.openxmlformats.org/officeDocument/2006/relationships">
+<p:sld xmlns:p="http://schemas.openxmlformats.org/presentationml/2006/main" xmlns:a="http://schemas.openxmlformats.org/drawingml/2006/main" xmlns:r="http://schemas.openxmlformats.org/officeDocument/2006/relationships">
   <p:cSld>
+    <p:bg>
+      <p:bgPr>
+        <a:solidFill>
+          <a:srgbClr val="FEF8F5"/>
+        </a:solidFill>
+      </p:bgPr>
+    </p:bg>
     <p:spTree>
       <p:nvGrpSpPr>
         <p:cNvPr id="1" name=""/>
         <p:cNvGrpSpPr/>
         <p:nvPr/>
       </p:nvGrpSpPr>
-      <p:grpSpPr/>
+      <p:grpSpPr>
+        <a:xfrm>
+          <a:off x="0" y="0"/>
+          <a:ext cx="0" cy="0"/>
+          <a:chOff x="0" y="0"/>
+          <a:chExt cx="0" cy="0"/>
+        </a:xfrm>
+      </p:grpSpPr>
+      <p:grpSp>
+        <p:nvGrpSpPr>
+          <p:cNvPr name="Group 2" id="2"/>
+          <p:cNvGrpSpPr/>
+          <p:nvPr/>
+        </p:nvGrpSpPr>
+        <p:grpSpPr>
+          <a:xfrm rot="0">
+            <a:off x="2286002" y="1138428"/>
+            <a:ext cx="3874033" cy="7996428"/>
+            <a:chOff x="0" y="0"/>
+            <a:chExt cx="3673158" cy="7581798"/>
+          </a:xfrm>
+        </p:grpSpPr>
+        <p:sp>
+          <p:nvSpPr>
+            <p:cNvPr name="Freeform 3" id="3"/>
+            <p:cNvSpPr/>
+            <p:nvPr/>
+          </p:nvSpPr>
+          <p:spPr>
+            <a:xfrm flipH="false" flipV="false" rot="0">
+              <a:off x="0" y="0"/>
+              <a:ext cx="3673221" cy="7581773"/>
+            </a:xfrm>
+            <a:custGeom>
+              <a:avLst/>
+              <a:gdLst/>
+              <a:ahLst/>
+              <a:cxnLst/>
+              <a:rect r="r" b="b" t="t" l="l"/>
+              <a:pathLst>
+                <a:path h="7581773" w="3673221">
+                  <a:moveTo>
+                    <a:pt x="0" y="0"/>
+                  </a:moveTo>
+                  <a:lnTo>
+                    <a:pt x="3673221" y="0"/>
+                  </a:lnTo>
+                  <a:lnTo>
+                    <a:pt x="3673221" y="7581773"/>
+                  </a:lnTo>
+                  <a:lnTo>
+                    <a:pt x="0" y="7581773"/>
+                  </a:lnTo>
+                  <a:close/>
+                </a:path>
+              </a:pathLst>
+            </a:custGeom>
+            <a:solidFill>
+              <a:srgbClr val="DFA186"/>
+            </a:solidFill>
+          </p:spPr>
+        </p:sp>
+      </p:grpSp>
+      <p:grpSp>
+        <p:nvGrpSpPr>
+          <p:cNvPr name="Group 4" id="4"/>
+          <p:cNvGrpSpPr/>
+          <p:nvPr/>
+        </p:nvGrpSpPr>
+        <p:grpSpPr>
+          <a:xfrm rot="0">
+            <a:off x="15578853" y="1138428"/>
+            <a:ext cx="432054" cy="7996428"/>
+            <a:chOff x="0" y="0"/>
+            <a:chExt cx="409651" cy="7581798"/>
+          </a:xfrm>
+        </p:grpSpPr>
+        <p:sp>
+          <p:nvSpPr>
+            <p:cNvPr name="Freeform 5" id="5"/>
+            <p:cNvSpPr/>
+            <p:nvPr/>
+          </p:nvSpPr>
+          <p:spPr>
+            <a:xfrm flipH="false" flipV="false" rot="0">
+              <a:off x="0" y="0"/>
+              <a:ext cx="409702" cy="7581773"/>
+            </a:xfrm>
+            <a:custGeom>
+              <a:avLst/>
+              <a:gdLst/>
+              <a:ahLst/>
+              <a:cxnLst/>
+              <a:rect r="r" b="b" t="t" l="l"/>
+              <a:pathLst>
+                <a:path h="7581773" w="409702">
+                  <a:moveTo>
+                    <a:pt x="0" y="0"/>
+                  </a:moveTo>
+                  <a:lnTo>
+                    <a:pt x="409702" y="0"/>
+                  </a:lnTo>
+                  <a:lnTo>
+                    <a:pt x="409702" y="7581773"/>
+                  </a:lnTo>
+                  <a:lnTo>
+                    <a:pt x="0" y="7581773"/>
+                  </a:lnTo>
+                  <a:close/>
+                </a:path>
+              </a:pathLst>
+            </a:custGeom>
+            <a:solidFill>
+              <a:srgbClr val="948A82">
+                <a:alpha val="24706"/>
+              </a:srgbClr>
+            </a:solidFill>
+          </p:spPr>
+        </p:sp>
+      </p:grpSp>
+      <p:grpSp>
+        <p:nvGrpSpPr>
+          <p:cNvPr name="Group 6" id="6"/>
+          <p:cNvGrpSpPr/>
+          <p:nvPr/>
+        </p:nvGrpSpPr>
+        <p:grpSpPr>
+          <a:xfrm rot="0">
+            <a:off x="2570540" y="1685755"/>
+            <a:ext cx="3315923" cy="6901773"/>
+            <a:chOff x="0" y="0"/>
+            <a:chExt cx="3143987" cy="6543904"/>
+          </a:xfrm>
+        </p:grpSpPr>
+        <p:sp>
+          <p:nvSpPr>
+            <p:cNvPr name="Freeform 7" id="7"/>
+            <p:cNvSpPr/>
+            <p:nvPr/>
+          </p:nvSpPr>
+          <p:spPr>
+            <a:xfrm flipH="false" flipV="false" rot="0">
+              <a:off x="0" y="0"/>
+              <a:ext cx="3143982" cy="6543904"/>
+            </a:xfrm>
+            <a:custGeom>
+              <a:avLst/>
+              <a:gdLst/>
+              <a:ahLst/>
+              <a:cxnLst/>
+              <a:rect r="r" b="b" t="t" l="l"/>
+              <a:pathLst>
+                <a:path h="6543904" w="3143982">
+                  <a:moveTo>
+                    <a:pt x="0" y="0"/>
+                  </a:moveTo>
+                  <a:lnTo>
+                    <a:pt x="3143982" y="0"/>
+                  </a:lnTo>
+                  <a:lnTo>
+                    <a:pt x="3143982" y="6543904"/>
+                  </a:lnTo>
+                  <a:lnTo>
+                    <a:pt x="0" y="6543904"/>
+                  </a:lnTo>
+                  <a:close/>
+                </a:path>
+              </a:pathLst>
+            </a:custGeom>
+            <a:blipFill>
+              <a:blip r:embed="rId2">
+                <a:alphaModFix amt="0"/>
+              </a:blip>
+              <a:stretch>
+                <a:fillRect l="-217051" t="0" r="-217051" b="0"/>
+              </a:stretch>
+            </a:blipFill>
+          </p:spPr>
+        </p:sp>
+        <p:sp>
+          <p:nvSpPr>
+            <p:cNvPr name="TextBox 8" id="8"/>
+            <p:cNvSpPr txBox="true"/>
+            <p:nvPr/>
+          </p:nvSpPr>
+          <p:spPr>
+            <a:xfrm>
+              <a:off x="0" y="47625"/>
+              <a:ext cx="3143987" cy="6496279"/>
+            </a:xfrm>
+            <a:prstGeom prst="rect">
+              <a:avLst/>
+            </a:prstGeom>
+          </p:spPr>
+          <p:txBody>
+            <a:bodyPr anchor="ctr" rtlCol="false" tIns="0" lIns="0" bIns="0" rIns="0"/>
+            <a:lstStyle/>
+            <a:p>
+              <a:pPr algn="l">
+                <a:lnSpc>
+                  <a:spcPts val="4860"/>
+                </a:lnSpc>
+              </a:pPr>
+              <a:r>
+                <a:rPr lang="en-US" b="true" sz="4500" spc="-96">
+                  <a:solidFill>
+                    <a:srgbClr val="000000"/>
+                  </a:solidFill>
+                  <a:latin typeface="PT Sans Bold"/>
+                  <a:ea typeface="PT Sans Bold"/>
+                  <a:cs typeface="PT Sans Bold"/>
+                  <a:sym typeface="PT Sans Bold"/>
+                </a:rPr>
+                <a:t>Model Performance Comparison</a:t>
+              </a:r>
+            </a:p>
+          </p:txBody>
+        </p:sp>
+      </p:grpSp>
+      <p:grpSp>
+        <p:nvGrpSpPr>
+          <p:cNvPr name="Group 9" id="9"/>
+          <p:cNvGrpSpPr/>
+          <p:nvPr/>
+        </p:nvGrpSpPr>
+        <p:grpSpPr>
+          <a:xfrm rot="0">
+            <a:off x="6638928" y="1296162"/>
+            <a:ext cx="8229600" cy="7680960"/>
+            <a:chOff x="0" y="0"/>
+            <a:chExt cx="7802880" cy="7282688"/>
+          </a:xfrm>
+        </p:grpSpPr>
+        <p:sp>
+          <p:nvSpPr>
+            <p:cNvPr name="Freeform 10" id="10"/>
+            <p:cNvSpPr/>
+            <p:nvPr/>
+          </p:nvSpPr>
+          <p:spPr>
+            <a:xfrm flipH="false" flipV="false" rot="0">
+              <a:off x="0" y="0"/>
+              <a:ext cx="7802880" cy="7282688"/>
+            </a:xfrm>
+            <a:custGeom>
+              <a:avLst/>
+              <a:gdLst/>
+              <a:ahLst/>
+              <a:cxnLst/>
+              <a:rect r="r" b="b" t="t" l="l"/>
+              <a:pathLst>
+                <a:path h="7282688" w="7802880">
+                  <a:moveTo>
+                    <a:pt x="0" y="0"/>
+                  </a:moveTo>
+                  <a:lnTo>
+                    <a:pt x="7802880" y="0"/>
+                  </a:lnTo>
+                  <a:lnTo>
+                    <a:pt x="7802880" y="7282688"/>
+                  </a:lnTo>
+                  <a:lnTo>
+                    <a:pt x="0" y="7282688"/>
+                  </a:lnTo>
+                  <a:close/>
+                </a:path>
+              </a:pathLst>
+            </a:custGeom>
+            <a:blipFill>
+              <a:blip r:embed="rId2">
+                <a:alphaModFix amt="0"/>
+              </a:blip>
+              <a:stretch>
+                <a:fillRect l="-69749" t="0" r="-69749" b="0"/>
+              </a:stretch>
+            </a:blipFill>
+          </p:spPr>
+        </p:sp>
+        <p:sp>
+          <p:nvSpPr>
+            <p:cNvPr name="TextBox 11" id="11"/>
+            <p:cNvSpPr txBox="true"/>
+            <p:nvPr/>
+          </p:nvSpPr>
+          <p:spPr>
+            <a:xfrm>
+              <a:off x="0" y="28575"/>
+              <a:ext cx="7802880" cy="7254113"/>
+            </a:xfrm>
+            <a:prstGeom prst="rect">
+              <a:avLst/>
+            </a:prstGeom>
+          </p:spPr>
+          <p:txBody>
+            <a:bodyPr anchor="ctr" rtlCol="false" tIns="0" lIns="0" bIns="0" rIns="0"/>
+            <a:lstStyle/>
+            <a:p>
+              <a:pPr algn="l" marL="347472" indent="-173736" lvl="1">
+                <a:lnSpc>
+                  <a:spcPts val="2916"/>
+                </a:lnSpc>
+                <a:buFont typeface="Arial"/>
+                <a:buChar char="•"/>
+              </a:pPr>
+              <a:r>
+                <a:rPr lang="en-US" sz="2700" spc="-3">
+                  <a:solidFill>
+                    <a:srgbClr val="000000"/>
+                  </a:solidFill>
+                  <a:latin typeface="PT Sans"/>
+                  <a:ea typeface="PT Sans"/>
+                  <a:cs typeface="PT Sans"/>
+                  <a:sym typeface="PT Sans"/>
+                </a:rPr>
+                <a:t>GMM – Highest Silhouette Score (0.3907)</a:t>
+              </a:r>
+            </a:p>
+            <a:p>
+              <a:pPr algn="l" marL="1101852" indent="-367284" lvl="2">
+                <a:lnSpc>
+                  <a:spcPts val="2916"/>
+                </a:lnSpc>
+                <a:buFont typeface="Arial"/>
+                <a:buChar char="⚬"/>
+              </a:pPr>
+              <a:r>
+                <a:rPr lang="en-US" sz="2700" spc="-3">
+                  <a:solidFill>
+                    <a:srgbClr val="000000"/>
+                  </a:solidFill>
+                  <a:latin typeface="PT Sans"/>
+                  <a:ea typeface="PT Sans"/>
+                  <a:cs typeface="PT Sans"/>
+                  <a:sym typeface="PT Sans"/>
+                </a:rPr>
+                <a:t>DBSCAN – Lowest Davies-Bouldin Index (0.7535)</a:t>
+              </a:r>
+            </a:p>
+            <a:p>
+              <a:pPr algn="l" marL="1101852" indent="-367284" lvl="2">
+                <a:lnSpc>
+                  <a:spcPts val="2916"/>
+                </a:lnSpc>
+                <a:buFont typeface="Arial"/>
+                <a:buChar char="⚬"/>
+              </a:pPr>
+              <a:r>
+                <a:rPr lang="en-US" sz="2700" spc="-3">
+                  <a:solidFill>
+                    <a:srgbClr val="000000"/>
+                  </a:solidFill>
+                  <a:latin typeface="PT Sans"/>
+                  <a:ea typeface="PT Sans"/>
+                  <a:cs typeface="PT Sans"/>
+                  <a:sym typeface="PT Sans"/>
+                </a:rPr>
+                <a:t>KMeans – Strong interpretability</a:t>
+              </a:r>
+            </a:p>
+            <a:p>
+              <a:pPr algn="l" marL="1101852" indent="-367284" lvl="2">
+                <a:lnSpc>
+                  <a:spcPts val="2916"/>
+                </a:lnSpc>
+                <a:buFont typeface="Arial"/>
+                <a:buChar char="⚬"/>
+              </a:pPr>
+              <a:r>
+                <a:rPr lang="en-US" sz="2700" spc="-3">
+                  <a:solidFill>
+                    <a:srgbClr val="000000"/>
+                  </a:solidFill>
+                  <a:latin typeface="PT Sans"/>
+                  <a:ea typeface="PT Sans"/>
+                  <a:cs typeface="PT Sans"/>
+                  <a:sym typeface="PT Sans"/>
+                </a:rPr>
+                <a:t>Final approach balances technical strength &amp; business clarity</a:t>
+              </a:r>
+            </a:p>
+          </p:txBody>
+        </p:sp>
+      </p:grpSp>
       <p:sp>
         <p:nvSpPr>
-          <p:cNvPr id="2" name="Title 1"/>
-          <p:cNvSpPr>
-            <a:spLocks noGrp="1"/>
-          </p:cNvSpPr>
-          <p:nvPr>
-            <p:ph type="title"/>
-          </p:nvPr>
-        </p:nvSpPr>
-        <p:spPr/>
-        <p:txBody>
-          <a:bodyPr/>
-          <a:lstStyle/>
-          <a:p>
-            <a:pPr>
-              <a:defRPr sz="3000" b="1">
-                <a:solidFill>
-                  <a:srgbClr val="203864"/>
-                </a:solidFill>
-              </a:defRPr>
-            </a:pPr>
-            <a:r>
-              <a:t>Model Performance Comparison</a:t>
-            </a:r>
-          </a:p>
-        </p:txBody>
-      </p:sp>
-      <p:sp>
-        <p:nvSpPr>
-          <p:cNvPr id="3" name="Content Placeholder 2"/>
-          <p:cNvSpPr>
-            <a:spLocks noGrp="1"/>
-          </p:cNvSpPr>
-          <p:nvPr>
-            <p:ph idx="1"/>
-          </p:nvPr>
-        </p:nvSpPr>
-        <p:spPr/>
-        <p:txBody>
-          <a:bodyPr/>
-          <a:lstStyle/>
-          <a:p>
-            <a:pPr>
-              <a:defRPr sz="1800">
-                <a:solidFill>
-                  <a:srgbClr val="5A5A5A"/>
-                </a:solidFill>
-              </a:defRPr>
-            </a:pPr>
-            <a:r>
-              <a:t>GMM – Highest Silhouette Score (0.3907)</a:t>
-            </a:r>
-          </a:p>
-          <a:p>
-            <a:pPr lvl="1">
-              <a:defRPr sz="1800">
-                <a:solidFill>
-                  <a:srgbClr val="5A5A5A"/>
-                </a:solidFill>
-              </a:defRPr>
-            </a:pPr>
-            <a:r>
-              <a:t>DBSCAN – Lowest Davies-Bouldin Index (0.7535)</a:t>
-            </a:r>
-          </a:p>
-          <a:p>
-            <a:pPr lvl="1">
-              <a:defRPr sz="1800">
-                <a:solidFill>
-                  <a:srgbClr val="5A5A5A"/>
-                </a:solidFill>
-              </a:defRPr>
-            </a:pPr>
-            <a:r>
-              <a:t>KMeans – Strong interpretability</a:t>
-            </a:r>
-          </a:p>
-          <a:p>
-            <a:pPr lvl="1">
-              <a:defRPr sz="1800">
-                <a:solidFill>
-                  <a:srgbClr val="5A5A5A"/>
-                </a:solidFill>
-              </a:defRPr>
-            </a:pPr>
-            <a:r>
-              <a:t>Final approach balances technical strength &amp; business clarity</a:t>
-            </a:r>
-          </a:p>
-        </p:txBody>
-      </p:sp>
-      <p:sp>
-        <p:nvSpPr>
-          <p:cNvPr id="4" name="TextBox 3"/>
-          <p:cNvSpPr txBox="1"/>
+          <p:cNvPr name="TextBox 12" id="12"/>
+          <p:cNvSpPr txBox="true"/>
           <p:nvPr/>
         </p:nvSpPr>
         <p:spPr>
-          <a:xfrm>
-            <a:off x="457200" y="6217920"/>
-            <a:ext cx="8229600" cy="274320"/>
+          <a:xfrm rot="0">
+            <a:off x="3100388" y="9391174"/>
+            <a:ext cx="12087225" cy="282892"/>
           </a:xfrm>
           <a:prstGeom prst="rect">
             <a:avLst/>
           </a:prstGeom>
-          <a:noFill/>
         </p:spPr>
         <p:txBody>
-          <a:bodyPr wrap="none">
+          <a:bodyPr anchor="t" rtlCol="false" tIns="0" lIns="0" bIns="0" rIns="0">
             <a:spAutoFit/>
           </a:bodyPr>
           <a:lstStyle/>
           <a:p>
-            <a:pPr>
-              <a:defRPr sz="1000">
-                <a:solidFill>
-                  <a:srgbClr val="5A5A5A"/>
-                </a:solidFill>
-              </a:defRPr>
+            <a:pPr algn="l">
+              <a:lnSpc>
+                <a:spcPts val="1800"/>
+              </a:lnSpc>
             </a:pPr>
             <a:r>
+              <a:rPr lang="en-US" sz="1500" spc="-2">
+                <a:solidFill>
+                  <a:srgbClr val="000000"/>
+                </a:solidFill>
+                <a:latin typeface="PT Sans"/>
+                <a:ea typeface="PT Sans"/>
+                <a:cs typeface="PT Sans"/>
+                <a:sym typeface="PT Sans"/>
+              </a:rPr>
               <a:t>Advanced Customer Segmentation | Capstone Project    |    Slide 8</a:t>
             </a:r>
           </a:p>
@@ -5059,97 +9239,337 @@
 </file>
 
 <file path=ppt/slides/slide9.xml><?xml version="1.0" encoding="utf-8"?>
-<p:sld xmlns:a="http://schemas.openxmlformats.org/drawingml/2006/main" xmlns:p="http://schemas.openxmlformats.org/presentationml/2006/main" xmlns:r="http://schemas.openxmlformats.org/officeDocument/2006/relationships">
+<p:sld xmlns:p="http://schemas.openxmlformats.org/presentationml/2006/main" xmlns:a="http://schemas.openxmlformats.org/drawingml/2006/main" xmlns:r="http://schemas.openxmlformats.org/officeDocument/2006/relationships">
   <p:cSld>
+    <p:bg>
+      <p:bgPr>
+        <a:solidFill>
+          <a:srgbClr val="FEF8F5"/>
+        </a:solidFill>
+      </p:bgPr>
+    </p:bg>
     <p:spTree>
       <p:nvGrpSpPr>
         <p:cNvPr id="1" name=""/>
         <p:cNvGrpSpPr/>
         <p:nvPr/>
       </p:nvGrpSpPr>
-      <p:grpSpPr/>
+      <p:grpSpPr>
+        <a:xfrm>
+          <a:off x="0" y="0"/>
+          <a:ext cx="0" cy="0"/>
+          <a:chOff x="0" y="0"/>
+          <a:chExt cx="0" cy="0"/>
+        </a:xfrm>
+      </p:grpSpPr>
+      <p:grpSp>
+        <p:nvGrpSpPr>
+          <p:cNvPr name="Group 2" id="2"/>
+          <p:cNvGrpSpPr/>
+          <p:nvPr/>
+        </p:nvGrpSpPr>
+        <p:grpSpPr>
+          <a:xfrm rot="0">
+            <a:off x="2286002" y="1138428"/>
+            <a:ext cx="3874033" cy="7996428"/>
+            <a:chOff x="0" y="0"/>
+            <a:chExt cx="3673158" cy="7581798"/>
+          </a:xfrm>
+        </p:grpSpPr>
+        <p:sp>
+          <p:nvSpPr>
+            <p:cNvPr name="Freeform 3" id="3"/>
+            <p:cNvSpPr/>
+            <p:nvPr/>
+          </p:nvSpPr>
+          <p:spPr>
+            <a:xfrm flipH="false" flipV="false" rot="0">
+              <a:off x="0" y="0"/>
+              <a:ext cx="3673221" cy="7581773"/>
+            </a:xfrm>
+            <a:custGeom>
+              <a:avLst/>
+              <a:gdLst/>
+              <a:ahLst/>
+              <a:cxnLst/>
+              <a:rect r="r" b="b" t="t" l="l"/>
+              <a:pathLst>
+                <a:path h="7581773" w="3673221">
+                  <a:moveTo>
+                    <a:pt x="0" y="0"/>
+                  </a:moveTo>
+                  <a:lnTo>
+                    <a:pt x="3673221" y="0"/>
+                  </a:lnTo>
+                  <a:lnTo>
+                    <a:pt x="3673221" y="7581773"/>
+                  </a:lnTo>
+                  <a:lnTo>
+                    <a:pt x="0" y="7581773"/>
+                  </a:lnTo>
+                  <a:close/>
+                </a:path>
+              </a:pathLst>
+            </a:custGeom>
+            <a:solidFill>
+              <a:srgbClr val="CCB6AD"/>
+            </a:solidFill>
+          </p:spPr>
+        </p:sp>
+      </p:grpSp>
+      <p:grpSp>
+        <p:nvGrpSpPr>
+          <p:cNvPr name="Group 4" id="4"/>
+          <p:cNvGrpSpPr/>
+          <p:nvPr/>
+        </p:nvGrpSpPr>
+        <p:grpSpPr>
+          <a:xfrm rot="0">
+            <a:off x="15578853" y="1138428"/>
+            <a:ext cx="432054" cy="7996428"/>
+            <a:chOff x="0" y="0"/>
+            <a:chExt cx="409651" cy="7581798"/>
+          </a:xfrm>
+        </p:grpSpPr>
+        <p:sp>
+          <p:nvSpPr>
+            <p:cNvPr name="Freeform 5" id="5"/>
+            <p:cNvSpPr/>
+            <p:nvPr/>
+          </p:nvSpPr>
+          <p:spPr>
+            <a:xfrm flipH="false" flipV="false" rot="0">
+              <a:off x="0" y="0"/>
+              <a:ext cx="409702" cy="7581773"/>
+            </a:xfrm>
+            <a:custGeom>
+              <a:avLst/>
+              <a:gdLst/>
+              <a:ahLst/>
+              <a:cxnLst/>
+              <a:rect r="r" b="b" t="t" l="l"/>
+              <a:pathLst>
+                <a:path h="7581773" w="409702">
+                  <a:moveTo>
+                    <a:pt x="0" y="0"/>
+                  </a:moveTo>
+                  <a:lnTo>
+                    <a:pt x="409702" y="0"/>
+                  </a:lnTo>
+                  <a:lnTo>
+                    <a:pt x="409702" y="7581773"/>
+                  </a:lnTo>
+                  <a:lnTo>
+                    <a:pt x="0" y="7581773"/>
+                  </a:lnTo>
+                  <a:close/>
+                </a:path>
+              </a:pathLst>
+            </a:custGeom>
+            <a:solidFill>
+              <a:srgbClr val="948A82">
+                <a:alpha val="24706"/>
+              </a:srgbClr>
+            </a:solidFill>
+          </p:spPr>
+        </p:sp>
+      </p:grpSp>
+      <p:grpSp>
+        <p:nvGrpSpPr>
+          <p:cNvPr name="Group 6" id="6"/>
+          <p:cNvGrpSpPr/>
+          <p:nvPr/>
+        </p:nvGrpSpPr>
+        <p:grpSpPr>
+          <a:xfrm rot="0">
+            <a:off x="2570540" y="1685755"/>
+            <a:ext cx="3315923" cy="6901773"/>
+            <a:chOff x="0" y="0"/>
+            <a:chExt cx="3143987" cy="6543904"/>
+          </a:xfrm>
+        </p:grpSpPr>
+        <p:sp>
+          <p:nvSpPr>
+            <p:cNvPr name="Freeform 7" id="7"/>
+            <p:cNvSpPr/>
+            <p:nvPr/>
+          </p:nvSpPr>
+          <p:spPr>
+            <a:xfrm flipH="false" flipV="false" rot="0">
+              <a:off x="0" y="0"/>
+              <a:ext cx="3143982" cy="6543904"/>
+            </a:xfrm>
+            <a:custGeom>
+              <a:avLst/>
+              <a:gdLst/>
+              <a:ahLst/>
+              <a:cxnLst/>
+              <a:rect r="r" b="b" t="t" l="l"/>
+              <a:pathLst>
+                <a:path h="6543904" w="3143982">
+                  <a:moveTo>
+                    <a:pt x="0" y="0"/>
+                  </a:moveTo>
+                  <a:lnTo>
+                    <a:pt x="3143982" y="0"/>
+                  </a:lnTo>
+                  <a:lnTo>
+                    <a:pt x="3143982" y="6543904"/>
+                  </a:lnTo>
+                  <a:lnTo>
+                    <a:pt x="0" y="6543904"/>
+                  </a:lnTo>
+                  <a:close/>
+                </a:path>
+              </a:pathLst>
+            </a:custGeom>
+            <a:blipFill>
+              <a:blip r:embed="rId2">
+                <a:alphaModFix amt="0"/>
+              </a:blip>
+              <a:stretch>
+                <a:fillRect l="-217051" t="0" r="-217051" b="0"/>
+              </a:stretch>
+            </a:blipFill>
+          </p:spPr>
+        </p:sp>
+        <p:sp>
+          <p:nvSpPr>
+            <p:cNvPr name="TextBox 8" id="8"/>
+            <p:cNvSpPr txBox="true"/>
+            <p:nvPr/>
+          </p:nvSpPr>
+          <p:spPr>
+            <a:xfrm>
+              <a:off x="0" y="47625"/>
+              <a:ext cx="3143987" cy="6496279"/>
+            </a:xfrm>
+            <a:prstGeom prst="rect">
+              <a:avLst/>
+            </a:prstGeom>
+          </p:spPr>
+          <p:txBody>
+            <a:bodyPr anchor="ctr" rtlCol="false" tIns="0" lIns="0" bIns="0" rIns="0"/>
+            <a:lstStyle/>
+            <a:p>
+              <a:pPr algn="l">
+                <a:lnSpc>
+                  <a:spcPts val="4860"/>
+                </a:lnSpc>
+              </a:pPr>
+              <a:r>
+                <a:rPr lang="en-US" b="true" sz="4500" spc="-96">
+                  <a:solidFill>
+                    <a:srgbClr val="000000"/>
+                  </a:solidFill>
+                  <a:latin typeface="PT Sans Bold"/>
+                  <a:ea typeface="PT Sans Bold"/>
+                  <a:cs typeface="PT Sans Bold"/>
+                  <a:sym typeface="PT Sans Bold"/>
+                </a:rPr>
+                <a:t>Elbow Method Visualization</a:t>
+              </a:r>
+            </a:p>
+          </p:txBody>
+        </p:sp>
+      </p:grpSp>
+      <p:grpSp>
+        <p:nvGrpSpPr>
+          <p:cNvPr name="Group 9" id="9"/>
+          <p:cNvGrpSpPr/>
+          <p:nvPr/>
+        </p:nvGrpSpPr>
+        <p:grpSpPr>
+          <a:xfrm rot="0">
+            <a:off x="6865376" y="2057400"/>
+            <a:ext cx="8229600" cy="6172200"/>
+            <a:chOff x="0" y="0"/>
+            <a:chExt cx="7802880" cy="5852160"/>
+          </a:xfrm>
+        </p:grpSpPr>
+        <p:sp>
+          <p:nvSpPr>
+            <p:cNvPr name="Freeform 10" id="10" descr="elbow_plot.png"/>
+            <p:cNvSpPr/>
+            <p:nvPr/>
+          </p:nvSpPr>
+          <p:spPr>
+            <a:xfrm flipH="false" flipV="false" rot="0">
+              <a:off x="0" y="0"/>
+              <a:ext cx="7802880" cy="5852160"/>
+            </a:xfrm>
+            <a:custGeom>
+              <a:avLst/>
+              <a:gdLst/>
+              <a:ahLst/>
+              <a:cxnLst/>
+              <a:rect r="r" b="b" t="t" l="l"/>
+              <a:pathLst>
+                <a:path h="5852160" w="7802880">
+                  <a:moveTo>
+                    <a:pt x="0" y="0"/>
+                  </a:moveTo>
+                  <a:lnTo>
+                    <a:pt x="7802880" y="0"/>
+                  </a:lnTo>
+                  <a:lnTo>
+                    <a:pt x="7802880" y="5852160"/>
+                  </a:lnTo>
+                  <a:lnTo>
+                    <a:pt x="0" y="5852160"/>
+                  </a:lnTo>
+                  <a:lnTo>
+                    <a:pt x="0" y="0"/>
+                  </a:lnTo>
+                  <a:close/>
+                </a:path>
+              </a:pathLst>
+            </a:custGeom>
+            <a:blipFill>
+              <a:blip r:embed="rId3"/>
+              <a:stretch>
+                <a:fillRect l="0" t="0" r="0" b="0"/>
+              </a:stretch>
+            </a:blipFill>
+          </p:spPr>
+        </p:sp>
+      </p:grpSp>
       <p:sp>
         <p:nvSpPr>
-          <p:cNvPr id="2" name="Title 1"/>
-          <p:cNvSpPr>
-            <a:spLocks noGrp="1"/>
-          </p:cNvSpPr>
-          <p:nvPr>
-            <p:ph type="title"/>
-          </p:nvPr>
+          <p:cNvPr name="TextBox 11" id="11"/>
+          <p:cNvSpPr txBox="true"/>
+          <p:nvPr/>
         </p:nvSpPr>
-        <p:spPr/>
-        <p:txBody>
-          <a:bodyPr/>
-          <a:lstStyle/>
-          <a:p>
-            <a:pPr>
-              <a:defRPr sz="3000" b="1">
-                <a:solidFill>
-                  <a:srgbClr val="203864"/>
-                </a:solidFill>
-              </a:defRPr>
-            </a:pPr>
-            <a:r>
-              <a:t>Elbow Method Visualization</a:t>
-            </a:r>
-          </a:p>
-        </p:txBody>
-      </p:sp>
-      <p:pic>
-        <p:nvPicPr>
-          <p:cNvPr id="3" name="Picture 2" descr="elbow_plot.png"/>
-          <p:cNvPicPr>
-            <a:picLocks noChangeAspect="1"/>
-          </p:cNvPicPr>
-          <p:nvPr/>
-        </p:nvPicPr>
-        <p:blipFill>
-          <a:blip r:embed="rId2"/>
-          <a:stretch>
-            <a:fillRect/>
-          </a:stretch>
-        </p:blipFill>
         <p:spPr>
-          <a:xfrm>
-            <a:off x="914400" y="1371600"/>
-            <a:ext cx="5486400" cy="4114800"/>
+          <a:xfrm rot="0">
+            <a:off x="3100388" y="9391174"/>
+            <a:ext cx="12087225" cy="282892"/>
           </a:xfrm>
           <a:prstGeom prst="rect">
             <a:avLst/>
           </a:prstGeom>
         </p:spPr>
-      </p:pic>
-      <p:sp>
-        <p:nvSpPr>
-          <p:cNvPr id="4" name="TextBox 3"/>
-          <p:cNvSpPr txBox="1"/>
-          <p:nvPr/>
-        </p:nvSpPr>
-        <p:spPr>
-          <a:xfrm>
-            <a:off x="457200" y="6217920"/>
-            <a:ext cx="8229600" cy="274320"/>
-          </a:xfrm>
-          <a:prstGeom prst="rect">
-            <a:avLst/>
-          </a:prstGeom>
-          <a:noFill/>
-        </p:spPr>
         <p:txBody>
-          <a:bodyPr wrap="none">
+          <a:bodyPr anchor="t" rtlCol="false" tIns="0" lIns="0" bIns="0" rIns="0">
             <a:spAutoFit/>
           </a:bodyPr>
           <a:lstStyle/>
           <a:p>
-            <a:pPr>
-              <a:defRPr sz="1000">
-                <a:solidFill>
-                  <a:srgbClr val="5A5A5A"/>
-                </a:solidFill>
-              </a:defRPr>
+            <a:pPr algn="l">
+              <a:lnSpc>
+                <a:spcPts val="1800"/>
+              </a:lnSpc>
             </a:pPr>
             <a:r>
+              <a:rPr lang="en-US" sz="1500" spc="-2">
+                <a:solidFill>
+                  <a:srgbClr val="000000"/>
+                </a:solidFill>
+                <a:latin typeface="PT Sans"/>
+                <a:ea typeface="PT Sans"/>
+                <a:cs typeface="PT Sans"/>
+                <a:sym typeface="PT Sans"/>
+              </a:rPr>
               <a:t>Advanced Customer Segmentation | Capstone Project    |    Slide 9</a:t>
             </a:r>
           </a:p>
@@ -5238,7 +9658,6 @@
         <a:font script="Mong" typeface="Mongolian Baiti"/>
         <a:font script="Viet" typeface="Times New Roman"/>
         <a:font script="Uigh" typeface="Microsoft Uighur"/>
-        <a:font script="Geor" typeface="Sylfaen"/>
       </a:majorFont>
       <a:minorFont>
         <a:latin typeface="Calibri"/>
@@ -5273,7 +9692,6 @@
         <a:font script="Mong" typeface="Mongolian Baiti"/>
         <a:font script="Viet" typeface="Arial"/>
         <a:font script="Uigh" typeface="Microsoft Uighur"/>
-        <a:font script="Geor" typeface="Sylfaen"/>
       </a:minorFont>
     </a:fontScheme>
     <a:fmtScheme name="Office">
@@ -5308,16 +9726,20 @@
           <a:gsLst>
             <a:gs pos="0">
               <a:schemeClr val="phClr">
-                <a:tint val="100000"/>
-                <a:shade val="100000"/>
+                <a:shade val="51000"/>
+                <a:satMod val="130000"/>
+              </a:schemeClr>
+            </a:gs>
+            <a:gs pos="80000">
+              <a:schemeClr val="phClr">
+                <a:shade val="93000"/>
                 <a:satMod val="130000"/>
               </a:schemeClr>
             </a:gs>
             <a:gs pos="100000">
               <a:schemeClr val="phClr">
-                <a:tint val="50000"/>
-                <a:shade val="100000"/>
-                <a:satMod val="350000"/>
+                <a:shade val="94000"/>
+                <a:satMod val="135000"/>
               </a:schemeClr>
             </a:gs>
           </a:gsLst>
@@ -5439,46 +9861,7 @@
       </a:bgFillStyleLst>
     </a:fmtScheme>
   </a:themeElements>
-  <a:objectDefaults>
-    <a:spDef>
-      <a:spPr/>
-      <a:bodyPr/>
-      <a:lstStyle/>
-      <a:style>
-        <a:lnRef idx="1">
-          <a:schemeClr val="accent1"/>
-        </a:lnRef>
-        <a:fillRef idx="3">
-          <a:schemeClr val="accent1"/>
-        </a:fillRef>
-        <a:effectRef idx="2">
-          <a:schemeClr val="accent1"/>
-        </a:effectRef>
-        <a:fontRef idx="minor">
-          <a:schemeClr val="lt1"/>
-        </a:fontRef>
-      </a:style>
-    </a:spDef>
-    <a:lnDef>
-      <a:spPr/>
-      <a:bodyPr/>
-      <a:lstStyle/>
-      <a:style>
-        <a:lnRef idx="2">
-          <a:schemeClr val="accent1"/>
-        </a:lnRef>
-        <a:fillRef idx="0">
-          <a:schemeClr val="accent1"/>
-        </a:fillRef>
-        <a:effectRef idx="1">
-          <a:schemeClr val="accent1"/>
-        </a:effectRef>
-        <a:fontRef idx="minor">
-          <a:schemeClr val="tx1"/>
-        </a:fontRef>
-      </a:style>
-    </a:lnDef>
-  </a:objectDefaults>
+  <a:objectDefaults/>
   <a:extraClrSchemeLst/>
 </a:theme>
 </file>